--- a/Planning docs/Slides/lesson-14-1-teacher-slides.pptx
+++ b/Planning docs/Slides/lesson-14-1-teacher-slides.pptx
@@ -21,9 +21,12 @@
     <p:sldId id="269" r:id="rId15"/>
     <p:sldId id="270" r:id="rId16"/>
     <p:sldId id="271" r:id="rId17"/>
+    <p:sldId id="272" r:id="rId18"/>
+    <p:sldId id="273" r:id="rId19"/>
+    <p:sldId id="274" r:id="rId20"/>
   </p:sldIdLst>
   <p:notesMasterIdLst>
-    <p:notesMasterId r:id="rId18"/>
+    <p:notesMasterId r:id="rId21"/>
   </p:notesMasterIdLst>
   <p:sldSz cx="9144000" cy="5143500"/>
   <p:notesSz cx="5143500" cy="9144000"/>
@@ -605,7 +608,7 @@
           <a:p>
             <a:r>
               <a:rPr lang="en-US" dirty="0"/>
-              <a:t>Each word appears in the chapters read this week, in the author’s own sentence.</a:t>
+              <a:t>Break the word into base + word part. Ask what the part adds to the meaning.</a:t>
             </a:r>
             <a:endParaRPr lang="en-US" dirty="0"/>
           </a:p>
@@ -693,7 +696,7 @@
           <a:p>
             <a:r>
               <a:rPr lang="en-US" dirty="0"/>
-              <a:t>Answers: soup,, rats,, crown,, Garlic,</a:t>
+              <a:t>Each word appears in the chapters read this week, in the author’s own sentence.</a:t>
             </a:r>
             <a:endParaRPr lang="en-US" dirty="0"/>
           </a:p>
@@ -781,7 +784,10 @@
           <a:p>
             <a:r>
               <a:rPr lang="en-US" dirty="0"/>
-              <a:t>Answers: soup,, rats,, crown,, Garlic,</a:t>
+              <a:t>Let students talk through the questions before revealing the pattern.
+When you list three or more things, separate them with commas, and put and before the last one. The comma before and is optional in some styles — but be consistent.
+Three items, two commas, and and before the last.
+The same pattern, with longer items.</a:t>
             </a:r>
             <a:endParaRPr lang="en-US" dirty="0"/>
           </a:p>
@@ -869,7 +875,10 @@
           <a:p>
             <a:r>
               <a:rPr lang="en-US" dirty="0"/>
-              <a:t>Base + two endings: hopelessness, thoughtfulness, fearlessly, impatiently | Base + one ending: darkness, hopeful, quickly, disagree</a:t>
+              <a:t>Let students talk through the questions before revealing the pattern.
+When you list three or more things, separate them with commas, and put and before the last one. The comma before and is optional in some styles — but be consistent.
+Three items, two commas, and and before the last.
+The same pattern, with longer items.</a:t>
             </a:r>
             <a:endParaRPr lang="en-US" dirty="0"/>
           </a:p>
@@ -957,7 +966,7 @@
           <a:p>
             <a:r>
               <a:rPr lang="en-US" dirty="0"/>
-              <a:t>Base + two endings: hopelessness, thoughtfulness, fearlessly, impatiently | Base + one ending: darkness, hopeful, quickly, disagree</a:t>
+              <a:t>Group 1: soup, spoons, and thread, red, gold, and green, Mig, Roscuro, and Despereaux, ran, jumped, and hid | Group 2: soup spoons and thread, red gold and green, Mig Roscuro and Despereaux, ran jumped and hid</a:t>
             </a:r>
             <a:endParaRPr lang="en-US" dirty="0"/>
           </a:p>
@@ -1045,7 +1054,7 @@
           <a:p>
             <a:r>
               <a:rPr lang="en-US" dirty="0"/>
-              <a:t>Read the chapters, then return to the pause questions.</a:t>
+              <a:t>Group 1: soup, spoons, and thread, red, gold, and green, Mig, Roscuro, and Despereaux, ran, jumped, and hid | Group 2: soup spoons and thread, red gold and green, Mig Roscuro and Despereaux, ran jumped and hid</a:t>
             </a:r>
             <a:endParaRPr lang="en-US" dirty="0"/>
           </a:p>
@@ -1133,7 +1142,7 @@
           <a:p>
             <a:r>
               <a:rPr lang="en-US" dirty="0"/>
-              <a:t>Writer’s Workshop stage for the week.</a:t>
+              <a:t>Open syllable (long vowel at end): tiger, robot, music, tiny | Closed (short vowel): napkin, velvet, helmet, sudden</a:t>
             </a:r>
             <a:endParaRPr lang="en-US" dirty="0"/>
           </a:p>
@@ -1157,6 +1166,270 @@
             <a:fld id="{F7021451-1387-4CA6-816F-3879F97B5CBC}" type="slidenum">
               <a:rPr lang="en-US"/>
               <a:t>16</a:t>
+            </a:fld>
+            <a:endParaRPr lang="en-US"/>
+          </a:p>
+        </p:txBody>
+      </p:sp>
+    </p:spTree>
+    <p:extLst>
+      <p:ext uri="{BB962C8B-B14F-4D97-AF65-F5344CB8AC3E}">
+        <p14:creationId xmlns:p14="http://schemas.microsoft.com/office/powerpoint/2010/main" val="1024086991"/>
+      </p:ext>
+    </p:extLst>
+  </p:cSld>
+  <p:clrMapOvr>
+    <a:masterClrMapping/>
+  </p:clrMapOvr>
+</p:notes>
+</file>
+
+<file path=ppt/notesSlides/notesSlide17.xml><?xml version="1.0" encoding="utf-8"?>
+<p:notes xmlns:a="http://schemas.openxmlformats.org/drawingml/2006/main" xmlns:r="http://schemas.openxmlformats.org/officeDocument/2006/relationships" xmlns:p="http://schemas.openxmlformats.org/presentationml/2006/main">
+  <p:cSld>
+    <p:spTree>
+      <p:nvGrpSpPr>
+        <p:cNvPr id="1" name=""/>
+        <p:cNvGrpSpPr/>
+        <p:nvPr/>
+      </p:nvGrpSpPr>
+      <p:grpSpPr>
+        <a:xfrm>
+          <a:off x="0" y="0"/>
+          <a:ext cx="0" cy="0"/>
+          <a:chOff x="0" y="0"/>
+          <a:chExt cx="0" cy="0"/>
+        </a:xfrm>
+      </p:grpSpPr>
+      <p:sp>
+        <p:nvSpPr>
+          <p:cNvPr id="2" name="Slide Image Placeholder 1"/>
+          <p:cNvSpPr>
+            <a:spLocks noGrp="1" noRot="1" noChangeAspect="1"/>
+          </p:cNvSpPr>
+          <p:nvPr>
+            <p:ph type="sldImg"/>
+          </p:nvPr>
+        </p:nvSpPr>
+        <p:spPr/>
+      </p:sp>
+      <p:sp>
+        <p:nvSpPr>
+          <p:cNvPr id="3" name="Notes Placeholder 2"/>
+          <p:cNvSpPr>
+            <a:spLocks noGrp="1"/>
+          </p:cNvSpPr>
+          <p:nvPr>
+            <p:ph type="body" idx="1"/>
+          </p:nvPr>
+        </p:nvSpPr>
+        <p:spPr/>
+        <p:txBody>
+          <a:bodyPr/>
+          <a:lstStyle/>
+          <a:p>
+            <a:r>
+              <a:rPr lang="en-US" dirty="0"/>
+              <a:t>Open syllable (long vowel at end): tiger, robot, music, tiny | Closed (short vowel): napkin, velvet, helmet, sudden</a:t>
+            </a:r>
+            <a:endParaRPr lang="en-US" dirty="0"/>
+          </a:p>
+        </p:txBody>
+      </p:sp>
+      <p:sp>
+        <p:nvSpPr>
+          <p:cNvPr id="4" name="Slide Number Placeholder 3"/>
+          <p:cNvSpPr>
+            <a:spLocks noGrp="1"/>
+          </p:cNvSpPr>
+          <p:nvPr>
+            <p:ph type="sldNum" sz="quarter" idx="10"/>
+          </p:nvPr>
+        </p:nvSpPr>
+        <p:spPr/>
+        <p:txBody>
+          <a:bodyPr/>
+          <a:lstStyle/>
+          <a:p>
+            <a:fld id="{F7021451-1387-4CA6-816F-3879F97B5CBC}" type="slidenum">
+              <a:rPr lang="en-US"/>
+              <a:t>17</a:t>
+            </a:fld>
+            <a:endParaRPr lang="en-US"/>
+          </a:p>
+        </p:txBody>
+      </p:sp>
+    </p:spTree>
+    <p:extLst>
+      <p:ext uri="{BB962C8B-B14F-4D97-AF65-F5344CB8AC3E}">
+        <p14:creationId xmlns:p14="http://schemas.microsoft.com/office/powerpoint/2010/main" val="1024086991"/>
+      </p:ext>
+    </p:extLst>
+  </p:cSld>
+  <p:clrMapOvr>
+    <a:masterClrMapping/>
+  </p:clrMapOvr>
+</p:notes>
+</file>
+
+<file path=ppt/notesSlides/notesSlide18.xml><?xml version="1.0" encoding="utf-8"?>
+<p:notes xmlns:a="http://schemas.openxmlformats.org/drawingml/2006/main" xmlns:r="http://schemas.openxmlformats.org/officeDocument/2006/relationships" xmlns:p="http://schemas.openxmlformats.org/presentationml/2006/main">
+  <p:cSld>
+    <p:spTree>
+      <p:nvGrpSpPr>
+        <p:cNvPr id="1" name=""/>
+        <p:cNvGrpSpPr/>
+        <p:nvPr/>
+      </p:nvGrpSpPr>
+      <p:grpSpPr>
+        <a:xfrm>
+          <a:off x="0" y="0"/>
+          <a:ext cx="0" cy="0"/>
+          <a:chOff x="0" y="0"/>
+          <a:chExt cx="0" cy="0"/>
+        </a:xfrm>
+      </p:grpSpPr>
+      <p:sp>
+        <p:nvSpPr>
+          <p:cNvPr id="2" name="Slide Image Placeholder 1"/>
+          <p:cNvSpPr>
+            <a:spLocks noGrp="1" noRot="1" noChangeAspect="1"/>
+          </p:cNvSpPr>
+          <p:nvPr>
+            <p:ph type="sldImg"/>
+          </p:nvPr>
+        </p:nvSpPr>
+        <p:spPr/>
+      </p:sp>
+      <p:sp>
+        <p:nvSpPr>
+          <p:cNvPr id="3" name="Notes Placeholder 2"/>
+          <p:cNvSpPr>
+            <a:spLocks noGrp="1"/>
+          </p:cNvSpPr>
+          <p:nvPr>
+            <p:ph type="body" idx="1"/>
+          </p:nvPr>
+        </p:nvSpPr>
+        <p:spPr/>
+        <p:txBody>
+          <a:bodyPr/>
+          <a:lstStyle/>
+          <a:p>
+            <a:r>
+              <a:rPr lang="en-US" dirty="0"/>
+              <a:t>Read the chapters, then return to the pause questions.</a:t>
+            </a:r>
+            <a:endParaRPr lang="en-US" dirty="0"/>
+          </a:p>
+        </p:txBody>
+      </p:sp>
+      <p:sp>
+        <p:nvSpPr>
+          <p:cNvPr id="4" name="Slide Number Placeholder 3"/>
+          <p:cNvSpPr>
+            <a:spLocks noGrp="1"/>
+          </p:cNvSpPr>
+          <p:nvPr>
+            <p:ph type="sldNum" sz="quarter" idx="10"/>
+          </p:nvPr>
+        </p:nvSpPr>
+        <p:spPr/>
+        <p:txBody>
+          <a:bodyPr/>
+          <a:lstStyle/>
+          <a:p>
+            <a:fld id="{F7021451-1387-4CA6-816F-3879F97B5CBC}" type="slidenum">
+              <a:rPr lang="en-US"/>
+              <a:t>18</a:t>
+            </a:fld>
+            <a:endParaRPr lang="en-US"/>
+          </a:p>
+        </p:txBody>
+      </p:sp>
+    </p:spTree>
+    <p:extLst>
+      <p:ext uri="{BB962C8B-B14F-4D97-AF65-F5344CB8AC3E}">
+        <p14:creationId xmlns:p14="http://schemas.microsoft.com/office/powerpoint/2010/main" val="1024086991"/>
+      </p:ext>
+    </p:extLst>
+  </p:cSld>
+  <p:clrMapOvr>
+    <a:masterClrMapping/>
+  </p:clrMapOvr>
+</p:notes>
+</file>
+
+<file path=ppt/notesSlides/notesSlide19.xml><?xml version="1.0" encoding="utf-8"?>
+<p:notes xmlns:a="http://schemas.openxmlformats.org/drawingml/2006/main" xmlns:r="http://schemas.openxmlformats.org/officeDocument/2006/relationships" xmlns:p="http://schemas.openxmlformats.org/presentationml/2006/main">
+  <p:cSld>
+    <p:spTree>
+      <p:nvGrpSpPr>
+        <p:cNvPr id="1" name=""/>
+        <p:cNvGrpSpPr/>
+        <p:nvPr/>
+      </p:nvGrpSpPr>
+      <p:grpSpPr>
+        <a:xfrm>
+          <a:off x="0" y="0"/>
+          <a:ext cx="0" cy="0"/>
+          <a:chOff x="0" y="0"/>
+          <a:chExt cx="0" cy="0"/>
+        </a:xfrm>
+      </p:grpSpPr>
+      <p:sp>
+        <p:nvSpPr>
+          <p:cNvPr id="2" name="Slide Image Placeholder 1"/>
+          <p:cNvSpPr>
+            <a:spLocks noGrp="1" noRot="1" noChangeAspect="1"/>
+          </p:cNvSpPr>
+          <p:nvPr>
+            <p:ph type="sldImg"/>
+          </p:nvPr>
+        </p:nvSpPr>
+        <p:spPr/>
+      </p:sp>
+      <p:sp>
+        <p:nvSpPr>
+          <p:cNvPr id="3" name="Notes Placeholder 2"/>
+          <p:cNvSpPr>
+            <a:spLocks noGrp="1"/>
+          </p:cNvSpPr>
+          <p:nvPr>
+            <p:ph type="body" idx="1"/>
+          </p:nvPr>
+        </p:nvSpPr>
+        <p:spPr/>
+        <p:txBody>
+          <a:bodyPr/>
+          <a:lstStyle/>
+          <a:p>
+            <a:r>
+              <a:rPr lang="en-US" dirty="0"/>
+              <a:t>Writer’s Workshop stage for the week.</a:t>
+            </a:r>
+            <a:endParaRPr lang="en-US" dirty="0"/>
+          </a:p>
+        </p:txBody>
+      </p:sp>
+      <p:sp>
+        <p:nvSpPr>
+          <p:cNvPr id="4" name="Slide Number Placeholder 3"/>
+          <p:cNvSpPr>
+            <a:spLocks noGrp="1"/>
+          </p:cNvSpPr>
+          <p:nvPr>
+            <p:ph type="sldNum" sz="quarter" idx="10"/>
+          </p:nvPr>
+        </p:nvSpPr>
+        <p:spPr/>
+        <p:txBody>
+          <a:bodyPr/>
+          <a:lstStyle/>
+          <a:p>
+            <a:fld id="{F7021451-1387-4CA6-816F-3879F97B5CBC}" type="slidenum">
+              <a:rPr lang="en-US"/>
+              <a:t>19</a:t>
             </a:fld>
             <a:endParaRPr lang="en-US"/>
           </a:p>
@@ -1661,8 +1934,7 @@
           <a:p>
             <a:r>
               <a:rPr lang="en-US" dirty="0"/>
-              <a:t>Corrected:  1. Despereaux sat in the sunshine with the princess and told her the story of how he came to rescue her.
-Look for: Did you catch the commas in the series (carefully, closely, and gratefully) and the comma between two adjectives (small, brave)?</a:t>
+              <a:t>Tap through each highlighted word in the lesson and name what it does right before moving to the fix-it.</a:t>
             </a:r>
             <a:endParaRPr lang="en-US" dirty="0"/>
           </a:p>
@@ -1750,8 +2022,8 @@
           <a:p>
             <a:r>
               <a:rPr lang="en-US" dirty="0"/>
-              <a:t>Corrected:  1. Despereaux sat in the sunshine with the princess and told her the story of how he came to rescue her.
-Look for: Did you catch the commas in the series (carefully, closely, and gratefully) and the comma between two adjectives (small, brave)?</a:t>
+              <a:t>Corrected: The princess listened carefully, closely, and gratefully as the small, brave mouse told his whole story. 
+Look for: </a:t>
             </a:r>
             <a:endParaRPr lang="en-US" dirty="0"/>
           </a:p>
@@ -1839,7 +2111,8 @@
           <a:p>
             <a:r>
               <a:rPr lang="en-US" dirty="0"/>
-              <a:t>Break the word into base + word part. Ask what the part adds to the meaning.</a:t>
+              <a:t>Corrected: The princess listened carefully, closely, and gratefully as the small, brave mouse told his whole story. 
+Look for: </a:t>
             </a:r>
             <a:endParaRPr lang="en-US" dirty="0"/>
           </a:p>
@@ -2412,7 +2685,7 @@
             <a:avLst/>
           </a:prstGeom>
           <a:solidFill>
-            <a:srgbClr val="55C8E8"/>
+            <a:srgbClr val="8B6FC0"/>
           </a:solidFill>
           <a:ln/>
         </p:spPr>
@@ -2450,7 +2723,7 @@
                 <a:ea typeface="Calibri" pitchFamily="34" charset="-122"/>
                 <a:cs typeface="Calibri" pitchFamily="34" charset="-120"/>
               </a:rPr>
-              <a:t>🔤  Vocabulary</a:t>
+              <a:t>🌱  Morphology</a:t>
             </a:r>
             <a:endParaRPr lang="en-US" sz="2200" dirty="0"/>
           </a:p>
@@ -2483,13 +2756,13 @@
             <a:r>
               <a:rPr lang="en-US" sz="1100" b="1" spc="100" kern="0" dirty="0">
                 <a:solidFill>
-                  <a:srgbClr val="55C8E8"/>
-                </a:solidFill>
-                <a:latin typeface="Calibri" pitchFamily="34" charset="0"/>
-                <a:ea typeface="Calibri" pitchFamily="34" charset="-122"/>
-                <a:cs typeface="Calibri" pitchFamily="34" charset="-120"/>
-              </a:rPr>
-              <a:t>VOCABULARY</a:t>
+                  <a:srgbClr val="8B6FC0"/>
+                </a:solidFill>
+                <a:latin typeface="Calibri" pitchFamily="34" charset="0"/>
+                <a:ea typeface="Calibri" pitchFamily="34" charset="-122"/>
+                <a:cs typeface="Calibri" pitchFamily="34" charset="-120"/>
+              </a:rPr>
+              <a:t>PREFIX OVER- MEANS TOO MUCH</a:t>
             </a:r>
             <a:endParaRPr lang="en-US" sz="1100" dirty="0"/>
           </a:p>
@@ -2504,15 +2777,15 @@
         <p:spPr>
           <a:xfrm>
             <a:off x="365760" y="1097280"/>
-            <a:ext cx="8412480" cy="658368"/>
+            <a:ext cx="8412480" cy="621792"/>
           </a:xfrm>
           <a:prstGeom prst="roundRect">
             <a:avLst>
-              <a:gd name="adj" fmla="val 13889"/>
+              <a:gd name="adj" fmla="val 14706"/>
             </a:avLst>
           </a:prstGeom>
           <a:solidFill>
-            <a:srgbClr val="E5F7FC"/>
+            <a:srgbClr val="F0E8FF"/>
           </a:solidFill>
           <a:ln/>
           <a:effectLst>
@@ -2532,8 +2805,8 @@
         </p:nvSpPr>
         <p:spPr>
           <a:xfrm>
-            <a:off x="594360" y="1225296"/>
-            <a:ext cx="7863840" cy="420624"/>
+            <a:off x="594360" y="1216152"/>
+            <a:ext cx="7863840" cy="384048"/>
           </a:xfrm>
           <a:prstGeom prst="rect">
             <a:avLst/>
@@ -2549,31 +2822,17 @@
               <a:buNone/>
             </a:pPr>
             <a:r>
-              <a:rPr lang="en-US" sz="1700" b="1" dirty="0">
-                <a:solidFill>
-                  <a:srgbClr val="0E1C42"/>
-                </a:solidFill>
-                <a:latin typeface="Calibri" pitchFamily="34" charset="0"/>
-                <a:ea typeface="Calibri" pitchFamily="34" charset="-122"/>
-                <a:cs typeface="Calibri" pitchFamily="34" charset="-120"/>
-              </a:rPr>
-              <a:t>together  </a:t>
-            </a:r>
-            <a:pPr indent="0" marL="0">
-              <a:buNone/>
-            </a:pPr>
-            <a:r>
-              <a:rPr lang="en-US" sz="1400" dirty="0">
-                <a:solidFill>
-                  <a:srgbClr val="1E293B"/>
-                </a:solidFill>
-                <a:latin typeface="Calibri" pitchFamily="34" charset="0"/>
-                <a:ea typeface="Calibri" pitchFamily="34" charset="-122"/>
-                <a:cs typeface="Calibri" pitchFamily="34" charset="-120"/>
-              </a:rPr>
-              <a:t>With each other; joined rather than apart.</a:t>
-            </a:r>
-            <a:endParaRPr lang="en-US" sz="1700" dirty="0"/>
+              <a:rPr lang="en-US" sz="1500" dirty="0">
+                <a:solidFill>
+                  <a:srgbClr val="1E293B"/>
+                </a:solidFill>
+                <a:latin typeface="Calibri" pitchFamily="34" charset="0"/>
+                <a:ea typeface="Calibri" pitchFamily="34" charset="-122"/>
+                <a:cs typeface="Calibri" pitchFamily="34" charset="-120"/>
+              </a:rPr>
+              <a:t>🌱  overconfident — too sure of oneself</a:t>
+            </a:r>
+            <a:endParaRPr lang="en-US" sz="1500" dirty="0"/>
           </a:p>
         </p:txBody>
       </p:sp>
@@ -2585,16 +2844,16 @@
         </p:nvSpPr>
         <p:spPr>
           <a:xfrm>
-            <a:off x="365760" y="1828800"/>
-            <a:ext cx="8412480" cy="658368"/>
+            <a:off x="365760" y="1792224"/>
+            <a:ext cx="8412480" cy="621792"/>
           </a:xfrm>
           <a:prstGeom prst="roundRect">
             <a:avLst>
-              <a:gd name="adj" fmla="val 13889"/>
+              <a:gd name="adj" fmla="val 14706"/>
             </a:avLst>
           </a:prstGeom>
           <a:solidFill>
-            <a:srgbClr val="FFFFFF"/>
+            <a:srgbClr val="F8F4FF"/>
           </a:solidFill>
           <a:ln/>
           <a:effectLst>
@@ -2614,8 +2873,8 @@
         </p:nvSpPr>
         <p:spPr>
           <a:xfrm>
-            <a:off x="594360" y="1956816"/>
-            <a:ext cx="7863840" cy="420624"/>
+            <a:off x="594360" y="1911096"/>
+            <a:ext cx="7863840" cy="384048"/>
           </a:xfrm>
           <a:prstGeom prst="rect">
             <a:avLst/>
@@ -2631,31 +2890,17 @@
               <a:buNone/>
             </a:pPr>
             <a:r>
-              <a:rPr lang="en-US" sz="1700" b="1" dirty="0">
-                <a:solidFill>
-                  <a:srgbClr val="0E1C42"/>
-                </a:solidFill>
-                <a:latin typeface="Calibri" pitchFamily="34" charset="0"/>
-                <a:ea typeface="Calibri" pitchFamily="34" charset="-122"/>
-                <a:cs typeface="Calibri" pitchFamily="34" charset="-120"/>
-              </a:rPr>
-              <a:t>trembled  </a:t>
-            </a:r>
-            <a:pPr indent="0" marL="0">
-              <a:buNone/>
-            </a:pPr>
-            <a:r>
-              <a:rPr lang="en-US" sz="1400" dirty="0">
-                <a:solidFill>
-                  <a:srgbClr val="1E293B"/>
-                </a:solidFill>
-                <a:latin typeface="Calibri" pitchFamily="34" charset="0"/>
-                <a:ea typeface="Calibri" pitchFamily="34" charset="-122"/>
-                <a:cs typeface="Calibri" pitchFamily="34" charset="-120"/>
-              </a:rPr>
-              <a:t>Shook a little, usually from fear or cold.</a:t>
-            </a:r>
-            <a:endParaRPr lang="en-US" sz="1700" dirty="0"/>
+              <a:rPr lang="en-US" sz="1500" dirty="0">
+                <a:solidFill>
+                  <a:srgbClr val="1E293B"/>
+                </a:solidFill>
+                <a:latin typeface="Calibri" pitchFamily="34" charset="0"/>
+                <a:ea typeface="Calibri" pitchFamily="34" charset="-122"/>
+                <a:cs typeface="Calibri" pitchFamily="34" charset="-120"/>
+              </a:rPr>
+              <a:t>🌱  overdue — past the right time</a:t>
+            </a:r>
+            <a:endParaRPr lang="en-US" sz="1500" dirty="0"/>
           </a:p>
         </p:txBody>
       </p:sp>
@@ -2667,16 +2912,16 @@
         </p:nvSpPr>
         <p:spPr>
           <a:xfrm>
-            <a:off x="365760" y="2560320"/>
-            <a:ext cx="8412480" cy="658368"/>
+            <a:off x="365760" y="2487168"/>
+            <a:ext cx="8412480" cy="621792"/>
           </a:xfrm>
           <a:prstGeom prst="roundRect">
             <a:avLst>
-              <a:gd name="adj" fmla="val 13889"/>
+              <a:gd name="adj" fmla="val 14706"/>
             </a:avLst>
           </a:prstGeom>
           <a:solidFill>
-            <a:srgbClr val="E5F7FC"/>
+            <a:srgbClr val="F0E8FF"/>
           </a:solidFill>
           <a:ln/>
           <a:effectLst>
@@ -2696,8 +2941,8 @@
         </p:nvSpPr>
         <p:spPr>
           <a:xfrm>
-            <a:off x="594360" y="2688336"/>
-            <a:ext cx="7863840" cy="420624"/>
+            <a:off x="594360" y="2606040"/>
+            <a:ext cx="7863840" cy="384048"/>
           </a:xfrm>
           <a:prstGeom prst="rect">
             <a:avLst/>
@@ -2713,31 +2958,17 @@
               <a:buNone/>
             </a:pPr>
             <a:r>
-              <a:rPr lang="en-US" sz="1700" b="1" dirty="0">
-                <a:solidFill>
-                  <a:srgbClr val="0E1C42"/>
-                </a:solidFill>
-                <a:latin typeface="Calibri" pitchFamily="34" charset="0"/>
-                <a:ea typeface="Calibri" pitchFamily="34" charset="-122"/>
-                <a:cs typeface="Calibri" pitchFamily="34" charset="-120"/>
-              </a:rPr>
-              <a:t>tears  </a:t>
-            </a:r>
-            <a:pPr indent="0" marL="0">
-              <a:buNone/>
-            </a:pPr>
-            <a:r>
-              <a:rPr lang="en-US" sz="1400" dirty="0">
-                <a:solidFill>
-                  <a:srgbClr val="1E293B"/>
-                </a:solidFill>
-                <a:latin typeface="Calibri" pitchFamily="34" charset="0"/>
-                <a:ea typeface="Calibri" pitchFamily="34" charset="-122"/>
-                <a:cs typeface="Calibri" pitchFamily="34" charset="-120"/>
-              </a:rPr>
-              <a:t>Drops of water that come from your eyes when you cry.</a:t>
-            </a:r>
-            <a:endParaRPr lang="en-US" sz="1700" dirty="0"/>
+              <a:rPr lang="en-US" sz="1500" dirty="0">
+                <a:solidFill>
+                  <a:srgbClr val="1E293B"/>
+                </a:solidFill>
+                <a:latin typeface="Calibri" pitchFamily="34" charset="0"/>
+                <a:ea typeface="Calibri" pitchFamily="34" charset="-122"/>
+                <a:cs typeface="Calibri" pitchFamily="34" charset="-120"/>
+              </a:rPr>
+              <a:t>🌱  overloaded — carrying too much</a:t>
+            </a:r>
+            <a:endParaRPr lang="en-US" sz="1500" dirty="0"/>
           </a:p>
         </p:txBody>
       </p:sp>
@@ -2749,16 +2980,16 @@
         </p:nvSpPr>
         <p:spPr>
           <a:xfrm>
-            <a:off x="365760" y="3291840"/>
-            <a:ext cx="8412480" cy="658368"/>
+            <a:off x="365760" y="3182112"/>
+            <a:ext cx="8412480" cy="621792"/>
           </a:xfrm>
           <a:prstGeom prst="roundRect">
             <a:avLst>
-              <a:gd name="adj" fmla="val 13889"/>
+              <a:gd name="adj" fmla="val 14706"/>
             </a:avLst>
           </a:prstGeom>
           <a:solidFill>
-            <a:srgbClr val="FFFFFF"/>
+            <a:srgbClr val="F8F4FF"/>
           </a:solidFill>
           <a:ln/>
           <a:effectLst>
@@ -2778,8 +3009,8 @@
         </p:nvSpPr>
         <p:spPr>
           <a:xfrm>
-            <a:off x="594360" y="3419856"/>
-            <a:ext cx="7863840" cy="420624"/>
+            <a:off x="594360" y="3300984"/>
+            <a:ext cx="7863840" cy="384048"/>
           </a:xfrm>
           <a:prstGeom prst="rect">
             <a:avLst/>
@@ -2795,31 +3026,17 @@
               <a:buNone/>
             </a:pPr>
             <a:r>
-              <a:rPr lang="en-US" sz="1700" b="1" dirty="0">
-                <a:solidFill>
-                  <a:srgbClr val="0E1C42"/>
-                </a:solidFill>
-                <a:latin typeface="Calibri" pitchFamily="34" charset="0"/>
-                <a:ea typeface="Calibri" pitchFamily="34" charset="-122"/>
-                <a:cs typeface="Calibri" pitchFamily="34" charset="-120"/>
-              </a:rPr>
-              <a:t>happily  </a:t>
-            </a:r>
-            <a:pPr indent="0" marL="0">
-              <a:buNone/>
-            </a:pPr>
-            <a:r>
-              <a:rPr lang="en-US" sz="1400" dirty="0">
-                <a:solidFill>
-                  <a:srgbClr val="1E293B"/>
-                </a:solidFill>
-                <a:latin typeface="Calibri" pitchFamily="34" charset="0"/>
-                <a:ea typeface="Calibri" pitchFamily="34" charset="-122"/>
-                <a:cs typeface="Calibri" pitchFamily="34" charset="-120"/>
-              </a:rPr>
-              <a:t>In a happy way; with joy.</a:t>
-            </a:r>
-            <a:endParaRPr lang="en-US" sz="1700" dirty="0"/>
+              <a:rPr lang="en-US" sz="1500" dirty="0">
+                <a:solidFill>
+                  <a:srgbClr val="1E293B"/>
+                </a:solidFill>
+                <a:latin typeface="Calibri" pitchFamily="34" charset="0"/>
+                <a:ea typeface="Calibri" pitchFamily="34" charset="-122"/>
+                <a:cs typeface="Calibri" pitchFamily="34" charset="-120"/>
+              </a:rPr>
+              <a:t>🌱  overstepped — went too far</a:t>
+            </a:r>
+            <a:endParaRPr lang="en-US" sz="1500" dirty="0"/>
           </a:p>
         </p:txBody>
       </p:sp>
@@ -2837,7 +3054,7 @@
     <p:bg>
       <p:bgPr>
         <a:solidFill>
-          <a:srgbClr val="F8FAFC"/>
+          <a:srgbClr val="FFFFFF"/>
         </a:solidFill>
       </p:bgPr>
     </p:bg>
@@ -2870,7 +3087,7 @@
             <a:avLst/>
           </a:prstGeom>
           <a:solidFill>
-            <a:srgbClr val="C7922C"/>
+            <a:srgbClr val="55C8E8"/>
           </a:solidFill>
           <a:ln/>
         </p:spPr>
@@ -2908,7 +3125,7 @@
                 <a:ea typeface="Calibri" pitchFamily="34" charset="-122"/>
                 <a:cs typeface="Calibri" pitchFamily="34" charset="-120"/>
               </a:rPr>
-              <a:t>✏️  Grammar</a:t>
+              <a:t>🔤  Vocabulary</a:t>
             </a:r>
             <a:endParaRPr lang="en-US" sz="2200" dirty="0"/>
           </a:p>
@@ -2922,7 +3139,7 @@
         </p:nvSpPr>
         <p:spPr>
           <a:xfrm>
-            <a:off x="365760" y="777240"/>
+            <a:off x="365760" y="804672"/>
             <a:ext cx="8229600" cy="237744"/>
           </a:xfrm>
           <a:prstGeom prst="rect">
@@ -2941,13 +3158,13 @@
             <a:r>
               <a:rPr lang="en-US" sz="1100" b="1" spc="100" kern="0" dirty="0">
                 <a:solidFill>
-                  <a:srgbClr val="C7922C"/>
-                </a:solidFill>
-                <a:latin typeface="Calibri" pitchFamily="34" charset="0"/>
-                <a:ea typeface="Calibri" pitchFamily="34" charset="-122"/>
-                <a:cs typeface="Calibri" pitchFamily="34" charset="-120"/>
-              </a:rPr>
-              <a:t>COMMAS IN A SERIES</a:t>
+                  <a:srgbClr val="55C8E8"/>
+                </a:solidFill>
+                <a:latin typeface="Calibri" pitchFamily="34" charset="0"/>
+                <a:ea typeface="Calibri" pitchFamily="34" charset="-122"/>
+                <a:cs typeface="Calibri" pitchFamily="34" charset="-120"/>
+              </a:rPr>
+              <a:t>VOCABULARY</a:t>
             </a:r>
             <a:endParaRPr lang="en-US" sz="1100" dirty="0"/>
           </a:p>
@@ -2961,7 +3178,7 @@
         </p:nvSpPr>
         <p:spPr>
           <a:xfrm>
-            <a:off x="365760" y="1078992"/>
+            <a:off x="365760" y="1097280"/>
             <a:ext cx="8412480" cy="658368"/>
           </a:xfrm>
           <a:prstGeom prst="roundRect">
@@ -2970,7 +3187,7 @@
             </a:avLst>
           </a:prstGeom>
           <a:solidFill>
-            <a:srgbClr val="FEF6E8"/>
+            <a:srgbClr val="E5F7FC"/>
           </a:solidFill>
           <a:ln/>
           <a:effectLst>
@@ -2991,7 +3208,7 @@
         <p:spPr>
           <a:xfrm>
             <a:off x="594360" y="1225296"/>
-            <a:ext cx="7863840" cy="402336"/>
+            <a:ext cx="7863840" cy="420624"/>
           </a:xfrm>
           <a:prstGeom prst="rect">
             <a:avLst/>
@@ -3007,17 +3224,31 @@
               <a:buNone/>
             </a:pPr>
             <a:r>
-              <a:rPr lang="en-US" sz="1600" dirty="0">
-                <a:solidFill>
-                  <a:srgbClr val="1E293B"/>
-                </a:solidFill>
-                <a:latin typeface="Calibri" pitchFamily="34" charset="0"/>
-                <a:ea typeface="Calibri" pitchFamily="34" charset="-122"/>
-                <a:cs typeface="Calibri" pitchFamily="34" charset="-120"/>
-              </a:rPr>
-              <a:t>He brought soup, bread, and a candle.</a:t>
-            </a:r>
-            <a:endParaRPr lang="en-US" sz="1600" dirty="0"/>
+              <a:rPr lang="en-US" sz="1700" b="1" dirty="0">
+                <a:solidFill>
+                  <a:srgbClr val="0E1C42"/>
+                </a:solidFill>
+                <a:latin typeface="Calibri" pitchFamily="34" charset="0"/>
+                <a:ea typeface="Calibri" pitchFamily="34" charset="-122"/>
+                <a:cs typeface="Calibri" pitchFamily="34" charset="-120"/>
+              </a:rPr>
+              <a:t>together  </a:t>
+            </a:r>
+            <a:pPr indent="0" marL="0">
+              <a:buNone/>
+            </a:pPr>
+            <a:r>
+              <a:rPr lang="en-US" sz="1400" dirty="0">
+                <a:solidFill>
+                  <a:srgbClr val="1E293B"/>
+                </a:solidFill>
+                <a:latin typeface="Calibri" pitchFamily="34" charset="0"/>
+                <a:ea typeface="Calibri" pitchFamily="34" charset="-122"/>
+                <a:cs typeface="Calibri" pitchFamily="34" charset="-120"/>
+              </a:rPr>
+              <a:t>With each other; joined rather than apart.</a:t>
+            </a:r>
+            <a:endParaRPr lang="en-US" sz="1700" dirty="0"/>
           </a:p>
         </p:txBody>
       </p:sp>
@@ -3029,7 +3260,7 @@
         </p:nvSpPr>
         <p:spPr>
           <a:xfrm>
-            <a:off x="365760" y="1810512"/>
+            <a:off x="365760" y="1828800"/>
             <a:ext cx="8412480" cy="658368"/>
           </a:xfrm>
           <a:prstGeom prst="roundRect">
@@ -3059,7 +3290,7 @@
         <p:spPr>
           <a:xfrm>
             <a:off x="594360" y="1956816"/>
-            <a:ext cx="7863840" cy="402336"/>
+            <a:ext cx="7863840" cy="420624"/>
           </a:xfrm>
           <a:prstGeom prst="rect">
             <a:avLst/>
@@ -3075,17 +3306,31 @@
               <a:buNone/>
             </a:pPr>
             <a:r>
-              <a:rPr lang="en-US" sz="1600" dirty="0">
-                <a:solidFill>
-                  <a:srgbClr val="1E293B"/>
-                </a:solidFill>
-                <a:latin typeface="Calibri" pitchFamily="34" charset="0"/>
-                <a:ea typeface="Calibri" pitchFamily="34" charset="-122"/>
-                <a:cs typeface="Calibri" pitchFamily="34" charset="-120"/>
-              </a:rPr>
-              <a:t>The rats, the mice, and the people all feared the dark.</a:t>
-            </a:r>
-            <a:endParaRPr lang="en-US" sz="1600" dirty="0"/>
+              <a:rPr lang="en-US" sz="1700" b="1" dirty="0">
+                <a:solidFill>
+                  <a:srgbClr val="0E1C42"/>
+                </a:solidFill>
+                <a:latin typeface="Calibri" pitchFamily="34" charset="0"/>
+                <a:ea typeface="Calibri" pitchFamily="34" charset="-122"/>
+                <a:cs typeface="Calibri" pitchFamily="34" charset="-120"/>
+              </a:rPr>
+              <a:t>trembled  </a:t>
+            </a:r>
+            <a:pPr indent="0" marL="0">
+              <a:buNone/>
+            </a:pPr>
+            <a:r>
+              <a:rPr lang="en-US" sz="1400" dirty="0">
+                <a:solidFill>
+                  <a:srgbClr val="1E293B"/>
+                </a:solidFill>
+                <a:latin typeface="Calibri" pitchFamily="34" charset="0"/>
+                <a:ea typeface="Calibri" pitchFamily="34" charset="-122"/>
+                <a:cs typeface="Calibri" pitchFamily="34" charset="-120"/>
+              </a:rPr>
+              <a:t>Shook a little, usually from fear or cold.</a:t>
+            </a:r>
+            <a:endParaRPr lang="en-US" sz="1700" dirty="0"/>
           </a:p>
         </p:txBody>
       </p:sp>
@@ -3097,7 +3342,7 @@
         </p:nvSpPr>
         <p:spPr>
           <a:xfrm>
-            <a:off x="365760" y="2542032"/>
+            <a:off x="365760" y="2560320"/>
             <a:ext cx="8412480" cy="658368"/>
           </a:xfrm>
           <a:prstGeom prst="roundRect">
@@ -3106,7 +3351,7 @@
             </a:avLst>
           </a:prstGeom>
           <a:solidFill>
-            <a:srgbClr val="FEF6E8"/>
+            <a:srgbClr val="E5F7FC"/>
           </a:solidFill>
           <a:ln/>
           <a:effectLst>
@@ -3127,7 +3372,7 @@
         <p:spPr>
           <a:xfrm>
             <a:off x="594360" y="2688336"/>
-            <a:ext cx="7863840" cy="402336"/>
+            <a:ext cx="7863840" cy="420624"/>
           </a:xfrm>
           <a:prstGeom prst="rect">
             <a:avLst/>
@@ -3143,17 +3388,31 @@
               <a:buNone/>
             </a:pPr>
             <a:r>
-              <a:rPr lang="en-US" sz="1600" dirty="0">
-                <a:solidFill>
-                  <a:srgbClr val="1E293B"/>
-                </a:solidFill>
-                <a:latin typeface="Calibri" pitchFamily="34" charset="0"/>
-                <a:ea typeface="Calibri" pitchFamily="34" charset="-122"/>
-                <a:cs typeface="Calibri" pitchFamily="34" charset="-120"/>
-              </a:rPr>
-              <a:t>Mig wanted a crown, a gown, and a name.</a:t>
-            </a:r>
-            <a:endParaRPr lang="en-US" sz="1600" dirty="0"/>
+              <a:rPr lang="en-US" sz="1700" b="1" dirty="0">
+                <a:solidFill>
+                  <a:srgbClr val="0E1C42"/>
+                </a:solidFill>
+                <a:latin typeface="Calibri" pitchFamily="34" charset="0"/>
+                <a:ea typeface="Calibri" pitchFamily="34" charset="-122"/>
+                <a:cs typeface="Calibri" pitchFamily="34" charset="-120"/>
+              </a:rPr>
+              <a:t>tears  </a:t>
+            </a:r>
+            <a:pPr indent="0" marL="0">
+              <a:buNone/>
+            </a:pPr>
+            <a:r>
+              <a:rPr lang="en-US" sz="1400" dirty="0">
+                <a:solidFill>
+                  <a:srgbClr val="1E293B"/>
+                </a:solidFill>
+                <a:latin typeface="Calibri" pitchFamily="34" charset="0"/>
+                <a:ea typeface="Calibri" pitchFamily="34" charset="-122"/>
+                <a:cs typeface="Calibri" pitchFamily="34" charset="-120"/>
+              </a:rPr>
+              <a:t>Drops of water that come from your eyes when you cry.</a:t>
+            </a:r>
+            <a:endParaRPr lang="en-US" sz="1700" dirty="0"/>
           </a:p>
         </p:txBody>
       </p:sp>
@@ -3165,7 +3424,7 @@
         </p:nvSpPr>
         <p:spPr>
           <a:xfrm>
-            <a:off x="365760" y="3273552"/>
+            <a:off x="365760" y="3291840"/>
             <a:ext cx="8412480" cy="658368"/>
           </a:xfrm>
           <a:prstGeom prst="roundRect">
@@ -3195,7 +3454,7 @@
         <p:spPr>
           <a:xfrm>
             <a:off x="594360" y="3419856"/>
-            <a:ext cx="7863840" cy="402336"/>
+            <a:ext cx="7863840" cy="420624"/>
           </a:xfrm>
           <a:prstGeom prst="rect">
             <a:avLst/>
@@ -3211,56 +3470,31 @@
               <a:buNone/>
             </a:pPr>
             <a:r>
-              <a:rPr lang="en-US" sz="1600" dirty="0">
-                <a:solidFill>
-                  <a:srgbClr val="1E293B"/>
-                </a:solidFill>
-                <a:latin typeface="Calibri" pitchFamily="34" charset="0"/>
-                <a:ea typeface="Calibri" pitchFamily="34" charset="-122"/>
-                <a:cs typeface="Calibri" pitchFamily="34" charset="-120"/>
-              </a:rPr>
-              <a:t>Garlic, chicken, and watercress went into the pot.</a:t>
-            </a:r>
-            <a:endParaRPr lang="en-US" sz="1600" dirty="0"/>
-          </a:p>
-        </p:txBody>
-      </p:sp>
-      <p:sp>
-        <p:nvSpPr>
-          <p:cNvPr id="13" name="Text 11"/>
-          <p:cNvSpPr/>
-          <p:nvPr/>
-        </p:nvSpPr>
-        <p:spPr>
-          <a:xfrm>
-            <a:off x="365760" y="4050792"/>
-            <a:ext cx="8412480" cy="365760"/>
-          </a:xfrm>
-          <a:prstGeom prst="rect">
-            <a:avLst/>
-          </a:prstGeom>
-          <a:noFill/>
-          <a:ln/>
-        </p:spPr>
-        <p:txBody>
-          <a:bodyPr wrap="square" lIns="0" tIns="0" rIns="0" bIns="0" rtlCol="0" anchor="ctr"/>
-          <a:lstStyle/>
-          <a:p>
-            <a:pPr indent="0" marL="0">
-              <a:buNone/>
-            </a:pPr>
-            <a:r>
-              <a:rPr lang="en-US" sz="1500" i="1" dirty="0">
-                <a:solidFill>
-                  <a:srgbClr val="64748B"/>
-                </a:solidFill>
-                <a:latin typeface="Calibri" pitchFamily="34" charset="0"/>
-                <a:ea typeface="Calibri" pitchFamily="34" charset="-122"/>
-                <a:cs typeface="Calibri" pitchFamily="34" charset="-120"/>
-              </a:rPr>
-              <a:t>Your turn. Find a comma that is separating items in a list. Tap a word to check — green means you got it.</a:t>
-            </a:r>
-            <a:endParaRPr lang="en-US" sz="1500" dirty="0"/>
+              <a:rPr lang="en-US" sz="1700" b="1" dirty="0">
+                <a:solidFill>
+                  <a:srgbClr val="0E1C42"/>
+                </a:solidFill>
+                <a:latin typeface="Calibri" pitchFamily="34" charset="0"/>
+                <a:ea typeface="Calibri" pitchFamily="34" charset="-122"/>
+                <a:cs typeface="Calibri" pitchFamily="34" charset="-120"/>
+              </a:rPr>
+              <a:t>happily  </a:t>
+            </a:r>
+            <a:pPr indent="0" marL="0">
+              <a:buNone/>
+            </a:pPr>
+            <a:r>
+              <a:rPr lang="en-US" sz="1400" dirty="0">
+                <a:solidFill>
+                  <a:srgbClr val="1E293B"/>
+                </a:solidFill>
+                <a:latin typeface="Calibri" pitchFamily="34" charset="0"/>
+                <a:ea typeface="Calibri" pitchFamily="34" charset="-122"/>
+                <a:cs typeface="Calibri" pitchFamily="34" charset="-120"/>
+              </a:rPr>
+              <a:t>In a happy way; with joy.</a:t>
+            </a:r>
+            <a:endParaRPr lang="en-US" sz="1700" dirty="0"/>
           </a:p>
         </p:txBody>
       </p:sp>
@@ -3349,7 +3583,7 @@
                 <a:ea typeface="Calibri" pitchFamily="34" charset="-122"/>
                 <a:cs typeface="Calibri" pitchFamily="34" charset="-120"/>
               </a:rPr>
-              <a:t>✏️  Grammar</a:t>
+              <a:t>✏️  Grammar — What do you notice?</a:t>
             </a:r>
             <a:endParaRPr lang="en-US" sz="2200" dirty="0"/>
           </a:p>
@@ -3363,7 +3597,7 @@
         </p:nvSpPr>
         <p:spPr>
           <a:xfrm>
-            <a:off x="365760" y="777240"/>
+            <a:off x="365760" y="749808"/>
             <a:ext cx="8229600" cy="237744"/>
           </a:xfrm>
           <a:prstGeom prst="rect">
@@ -3396,13 +3630,52 @@
       </p:sp>
       <p:sp>
         <p:nvSpPr>
-          <p:cNvPr id="5" name="Shape 3"/>
-          <p:cNvSpPr/>
-          <p:nvPr/>
-        </p:nvSpPr>
-        <p:spPr>
-          <a:xfrm>
-            <a:off x="365760" y="1078992"/>
+          <p:cNvPr id="5" name="Text 3"/>
+          <p:cNvSpPr/>
+          <p:nvPr/>
+        </p:nvSpPr>
+        <p:spPr>
+          <a:xfrm>
+            <a:off x="365760" y="987552"/>
+            <a:ext cx="8412480" cy="411480"/>
+          </a:xfrm>
+          <a:prstGeom prst="rect">
+            <a:avLst/>
+          </a:prstGeom>
+          <a:noFill/>
+          <a:ln/>
+        </p:spPr>
+        <p:txBody>
+          <a:bodyPr wrap="square" lIns="0" tIns="0" rIns="0" bIns="0" rtlCol="0" anchor="ctr"/>
+          <a:lstStyle/>
+          <a:p>
+            <a:pPr indent="0" marL="0">
+              <a:buNone/>
+            </a:pPr>
+            <a:r>
+              <a:rPr lang="en-US" sz="1500" i="1" dirty="0">
+                <a:solidFill>
+                  <a:srgbClr val="64748B"/>
+                </a:solidFill>
+                <a:latin typeface="Calibri" pitchFamily="34" charset="0"/>
+                <a:ea typeface="Calibri" pitchFamily="34" charset="-122"/>
+                <a:cs typeface="Calibri" pitchFamily="34" charset="-120"/>
+              </a:rPr>
+              <a:t>Count the commas in each sentence, then count the things being listed.</a:t>
+            </a:r>
+            <a:endParaRPr lang="en-US" sz="1500" dirty="0"/>
+          </a:p>
+        </p:txBody>
+      </p:sp>
+      <p:sp>
+        <p:nvSpPr>
+          <p:cNvPr id="6" name="Shape 4"/>
+          <p:cNvSpPr/>
+          <p:nvPr/>
+        </p:nvSpPr>
+        <p:spPr>
+          <a:xfrm>
+            <a:off x="365760" y="1463040"/>
             <a:ext cx="8412480" cy="658368"/>
           </a:xfrm>
           <a:prstGeom prst="roundRect">
@@ -3413,7 +3686,12 @@
           <a:solidFill>
             <a:srgbClr val="FEF6E8"/>
           </a:solidFill>
-          <a:ln/>
+          <a:ln w="19050">
+            <a:solidFill>
+              <a:srgbClr val="C7922C"/>
+            </a:solidFill>
+            <a:prstDash val="solid"/>
+          </a:ln>
           <a:effectLst>
             <a:outerShdw sx="100000" sy="100000" kx="0" ky="0" algn="bl" rotWithShape="0" blurRad="101600" dist="38100" dir="2700000">
               <a:srgbClr val="000000">
@@ -3425,14 +3703,14 @@
       </p:sp>
       <p:sp>
         <p:nvSpPr>
-          <p:cNvPr id="6" name="Text 4"/>
-          <p:cNvSpPr/>
-          <p:nvPr/>
-        </p:nvSpPr>
-        <p:spPr>
-          <a:xfrm>
-            <a:off x="594360" y="1225296"/>
-            <a:ext cx="7863840" cy="402336"/>
+          <p:cNvPr id="7" name="Text 5"/>
+          <p:cNvSpPr/>
+          <p:nvPr/>
+        </p:nvSpPr>
+        <p:spPr>
+          <a:xfrm>
+            <a:off x="594360" y="1591056"/>
+            <a:ext cx="7955280" cy="402336"/>
           </a:xfrm>
           <a:prstGeom prst="rect">
             <a:avLst/>
@@ -3447,58 +3725,310 @@
             <a:pPr indent="0" marL="0">
               <a:buNone/>
             </a:pPr>
-            <a:r>
-              <a:rPr lang="en-US" sz="1600" dirty="0">
-                <a:solidFill>
-                  <a:srgbClr val="1E293B"/>
-                </a:solidFill>
-                <a:latin typeface="Calibri" pitchFamily="34" charset="0"/>
-                <a:ea typeface="Calibri" pitchFamily="34" charset="-122"/>
-                <a:cs typeface="Calibri" pitchFamily="34" charset="-120"/>
-              </a:rPr>
-              <a:t>He brought </a:t>
-            </a:r>
-            <a:pPr indent="0" marL="0">
-              <a:buNone/>
-            </a:pPr>
-            <a:r>
-              <a:rPr lang="en-US" sz="1600" b="1" dirty="0">
-                <a:solidFill>
-                  <a:srgbClr val="34B76F"/>
-                </a:solidFill>
-                <a:latin typeface="Calibri" pitchFamily="34" charset="0"/>
-                <a:ea typeface="Calibri" pitchFamily="34" charset="-122"/>
-                <a:cs typeface="Calibri" pitchFamily="34" charset="-120"/>
-              </a:rPr>
-              <a:t>soup,</a:t>
-            </a:r>
-            <a:pPr indent="0" marL="0">
-              <a:buNone/>
-            </a:pPr>
-            <a:r>
-              <a:rPr lang="en-US" sz="1600" dirty="0">
-                <a:solidFill>
-                  <a:srgbClr val="1E293B"/>
-                </a:solidFill>
-                <a:latin typeface="Calibri" pitchFamily="34" charset="0"/>
-                <a:ea typeface="Calibri" pitchFamily="34" charset="-122"/>
-                <a:cs typeface="Calibri" pitchFamily="34" charset="-120"/>
-              </a:rPr>
-              <a:t> bread, and a candle.</a:t>
-            </a:r>
-            <a:endParaRPr lang="en-US" sz="1600" dirty="0"/>
-          </a:p>
-        </p:txBody>
-      </p:sp>
-      <p:sp>
-        <p:nvSpPr>
-          <p:cNvPr id="7" name="Shape 5"/>
-          <p:cNvSpPr/>
-          <p:nvPr/>
-        </p:nvSpPr>
-        <p:spPr>
-          <a:xfrm>
-            <a:off x="365760" y="1810512"/>
+            <a:endParaRPr lang="en-US" sz="1700" dirty="0"/>
+          </a:p>
+        </p:txBody>
+      </p:sp>
+      <p:sp>
+        <p:nvSpPr>
+          <p:cNvPr id="8" name="Text 6"/>
+          <p:cNvSpPr/>
+          <p:nvPr/>
+        </p:nvSpPr>
+        <p:spPr>
+          <a:xfrm>
+            <a:off x="594360" y="1591056"/>
+            <a:ext cx="7955280" cy="402336"/>
+          </a:xfrm>
+          <a:prstGeom prst="rect">
+            <a:avLst/>
+          </a:prstGeom>
+          <a:noFill/>
+          <a:ln/>
+        </p:spPr>
+        <p:txBody>
+          <a:bodyPr wrap="square" lIns="0" tIns="0" rIns="0" bIns="0" rtlCol="0" anchor="ctr"/>
+          <a:lstStyle/>
+          <a:p>
+            <a:pPr indent="0" marL="0">
+              <a:buNone/>
+            </a:pPr>
+            <a:r>
+              <a:rPr lang="en-US" sz="1700" dirty="0">
+                <a:solidFill>
+                  <a:srgbClr val="1E293B"/>
+                </a:solidFill>
+                <a:latin typeface="Calibri" pitchFamily="34" charset="0"/>
+                <a:ea typeface="Calibri" pitchFamily="34" charset="-122"/>
+                <a:cs typeface="Calibri" pitchFamily="34" charset="-120"/>
+              </a:rPr>
+              <a:t>Please</a:t>
+            </a:r>
+            <a:pPr indent="0" marL="0">
+              <a:buNone/>
+            </a:pPr>
+            <a:r>
+              <a:rPr lang="en-US" sz="1700" dirty="0">
+                <a:solidFill>
+                  <a:srgbClr val="1E293B"/>
+                </a:solidFill>
+                <a:latin typeface="Calibri" pitchFamily="34" charset="0"/>
+                <a:ea typeface="Calibri" pitchFamily="34" charset="-122"/>
+                <a:cs typeface="Calibri" pitchFamily="34" charset="-120"/>
+              </a:rPr>
+              <a:t> </a:t>
+            </a:r>
+            <a:pPr indent="0" marL="0">
+              <a:buNone/>
+            </a:pPr>
+            <a:r>
+              <a:rPr lang="en-US" sz="1700" dirty="0">
+                <a:solidFill>
+                  <a:srgbClr val="1E293B"/>
+                </a:solidFill>
+                <a:latin typeface="Calibri" pitchFamily="34" charset="0"/>
+                <a:ea typeface="Calibri" pitchFamily="34" charset="-122"/>
+                <a:cs typeface="Calibri" pitchFamily="34" charset="-120"/>
+              </a:rPr>
+              <a:t>hand</a:t>
+            </a:r>
+            <a:pPr indent="0" marL="0">
+              <a:buNone/>
+            </a:pPr>
+            <a:r>
+              <a:rPr lang="en-US" sz="1700" dirty="0">
+                <a:solidFill>
+                  <a:srgbClr val="1E293B"/>
+                </a:solidFill>
+                <a:latin typeface="Calibri" pitchFamily="34" charset="0"/>
+                <a:ea typeface="Calibri" pitchFamily="34" charset="-122"/>
+                <a:cs typeface="Calibri" pitchFamily="34" charset="-120"/>
+              </a:rPr>
+              <a:t> </a:t>
+            </a:r>
+            <a:pPr indent="0" marL="0">
+              <a:buNone/>
+            </a:pPr>
+            <a:r>
+              <a:rPr lang="en-US" sz="1700" dirty="0">
+                <a:solidFill>
+                  <a:srgbClr val="1E293B"/>
+                </a:solidFill>
+                <a:latin typeface="Calibri" pitchFamily="34" charset="0"/>
+                <a:ea typeface="Calibri" pitchFamily="34" charset="-122"/>
+                <a:cs typeface="Calibri" pitchFamily="34" charset="-120"/>
+              </a:rPr>
+              <a:t>over</a:t>
+            </a:r>
+            <a:pPr indent="0" marL="0">
+              <a:buNone/>
+            </a:pPr>
+            <a:r>
+              <a:rPr lang="en-US" sz="1700" dirty="0">
+                <a:solidFill>
+                  <a:srgbClr val="1E293B"/>
+                </a:solidFill>
+                <a:latin typeface="Calibri" pitchFamily="34" charset="0"/>
+                <a:ea typeface="Calibri" pitchFamily="34" charset="-122"/>
+                <a:cs typeface="Calibri" pitchFamily="34" charset="-120"/>
+              </a:rPr>
+              <a:t> </a:t>
+            </a:r>
+            <a:pPr indent="0" marL="0">
+              <a:buNone/>
+            </a:pPr>
+            <a:r>
+              <a:rPr lang="en-US" sz="1700" dirty="0">
+                <a:solidFill>
+                  <a:srgbClr val="1E293B"/>
+                </a:solidFill>
+                <a:latin typeface="Calibri" pitchFamily="34" charset="0"/>
+                <a:ea typeface="Calibri" pitchFamily="34" charset="-122"/>
+                <a:cs typeface="Calibri" pitchFamily="34" charset="-120"/>
+              </a:rPr>
+              <a:t>your</a:t>
+            </a:r>
+            <a:pPr indent="0" marL="0">
+              <a:buNone/>
+            </a:pPr>
+            <a:r>
+              <a:rPr lang="en-US" sz="1700" dirty="0">
+                <a:solidFill>
+                  <a:srgbClr val="1E293B"/>
+                </a:solidFill>
+                <a:latin typeface="Calibri" pitchFamily="34" charset="0"/>
+                <a:ea typeface="Calibri" pitchFamily="34" charset="-122"/>
+                <a:cs typeface="Calibri" pitchFamily="34" charset="-120"/>
+              </a:rPr>
+              <a:t> </a:t>
+            </a:r>
+            <a:pPr indent="0" marL="0">
+              <a:buNone/>
+            </a:pPr>
+            <a:r>
+              <a:rPr lang="en-US" sz="1700" dirty="0">
+                <a:solidFill>
+                  <a:srgbClr val="1E293B"/>
+                </a:solidFill>
+                <a:latin typeface="Calibri" pitchFamily="34" charset="0"/>
+                <a:ea typeface="Calibri" pitchFamily="34" charset="-122"/>
+                <a:cs typeface="Calibri" pitchFamily="34" charset="-120"/>
+              </a:rPr>
+              <a:t>spoons,</a:t>
+            </a:r>
+            <a:pPr indent="0" marL="0">
+              <a:buNone/>
+            </a:pPr>
+            <a:r>
+              <a:rPr lang="en-US" sz="1700" dirty="0">
+                <a:solidFill>
+                  <a:srgbClr val="1E293B"/>
+                </a:solidFill>
+                <a:latin typeface="Calibri" pitchFamily="34" charset="0"/>
+                <a:ea typeface="Calibri" pitchFamily="34" charset="-122"/>
+                <a:cs typeface="Calibri" pitchFamily="34" charset="-120"/>
+              </a:rPr>
+              <a:t> </a:t>
+            </a:r>
+            <a:pPr indent="0" marL="0">
+              <a:buNone/>
+            </a:pPr>
+            <a:r>
+              <a:rPr lang="en-US" sz="1700" dirty="0">
+                <a:solidFill>
+                  <a:srgbClr val="1E293B"/>
+                </a:solidFill>
+                <a:latin typeface="Calibri" pitchFamily="34" charset="0"/>
+                <a:ea typeface="Calibri" pitchFamily="34" charset="-122"/>
+                <a:cs typeface="Calibri" pitchFamily="34" charset="-120"/>
+              </a:rPr>
+              <a:t>your</a:t>
+            </a:r>
+            <a:pPr indent="0" marL="0">
+              <a:buNone/>
+            </a:pPr>
+            <a:r>
+              <a:rPr lang="en-US" sz="1700" dirty="0">
+                <a:solidFill>
+                  <a:srgbClr val="1E293B"/>
+                </a:solidFill>
+                <a:latin typeface="Calibri" pitchFamily="34" charset="0"/>
+                <a:ea typeface="Calibri" pitchFamily="34" charset="-122"/>
+                <a:cs typeface="Calibri" pitchFamily="34" charset="-120"/>
+              </a:rPr>
+              <a:t> </a:t>
+            </a:r>
+            <a:pPr indent="0" marL="0">
+              <a:buNone/>
+            </a:pPr>
+            <a:r>
+              <a:rPr lang="en-US" sz="1700" dirty="0">
+                <a:solidFill>
+                  <a:srgbClr val="1E293B"/>
+                </a:solidFill>
+                <a:latin typeface="Calibri" pitchFamily="34" charset="0"/>
+                <a:ea typeface="Calibri" pitchFamily="34" charset="-122"/>
+                <a:cs typeface="Calibri" pitchFamily="34" charset="-120"/>
+              </a:rPr>
+              <a:t>bowls,</a:t>
+            </a:r>
+            <a:pPr indent="0" marL="0">
+              <a:buNone/>
+            </a:pPr>
+            <a:r>
+              <a:rPr lang="en-US" sz="1700" dirty="0">
+                <a:solidFill>
+                  <a:srgbClr val="1E293B"/>
+                </a:solidFill>
+                <a:latin typeface="Calibri" pitchFamily="34" charset="0"/>
+                <a:ea typeface="Calibri" pitchFamily="34" charset="-122"/>
+                <a:cs typeface="Calibri" pitchFamily="34" charset="-120"/>
+              </a:rPr>
+              <a:t> </a:t>
+            </a:r>
+            <a:pPr indent="0" marL="0">
+              <a:buNone/>
+            </a:pPr>
+            <a:r>
+              <a:rPr lang="en-US" sz="1700" dirty="0">
+                <a:solidFill>
+                  <a:srgbClr val="1E293B"/>
+                </a:solidFill>
+                <a:latin typeface="Calibri" pitchFamily="34" charset="0"/>
+                <a:ea typeface="Calibri" pitchFamily="34" charset="-122"/>
+                <a:cs typeface="Calibri" pitchFamily="34" charset="-120"/>
+              </a:rPr>
+              <a:t>and</a:t>
+            </a:r>
+            <a:pPr indent="0" marL="0">
+              <a:buNone/>
+            </a:pPr>
+            <a:r>
+              <a:rPr lang="en-US" sz="1700" dirty="0">
+                <a:solidFill>
+                  <a:srgbClr val="1E293B"/>
+                </a:solidFill>
+                <a:latin typeface="Calibri" pitchFamily="34" charset="0"/>
+                <a:ea typeface="Calibri" pitchFamily="34" charset="-122"/>
+                <a:cs typeface="Calibri" pitchFamily="34" charset="-120"/>
+              </a:rPr>
+              <a:t> </a:t>
+            </a:r>
+            <a:pPr indent="0" marL="0">
+              <a:buNone/>
+            </a:pPr>
+            <a:r>
+              <a:rPr lang="en-US" sz="1700" dirty="0">
+                <a:solidFill>
+                  <a:srgbClr val="1E293B"/>
+                </a:solidFill>
+                <a:latin typeface="Calibri" pitchFamily="34" charset="0"/>
+                <a:ea typeface="Calibri" pitchFamily="34" charset="-122"/>
+                <a:cs typeface="Calibri" pitchFamily="34" charset="-120"/>
+              </a:rPr>
+              <a:t>your</a:t>
+            </a:r>
+            <a:pPr indent="0" marL="0">
+              <a:buNone/>
+            </a:pPr>
+            <a:r>
+              <a:rPr lang="en-US" sz="1700" dirty="0">
+                <a:solidFill>
+                  <a:srgbClr val="1E293B"/>
+                </a:solidFill>
+                <a:latin typeface="Calibri" pitchFamily="34" charset="0"/>
+                <a:ea typeface="Calibri" pitchFamily="34" charset="-122"/>
+                <a:cs typeface="Calibri" pitchFamily="34" charset="-120"/>
+              </a:rPr>
+              <a:t> </a:t>
+            </a:r>
+            <a:pPr indent="0" marL="0">
+              <a:buNone/>
+            </a:pPr>
+            <a:r>
+              <a:rPr lang="en-US" sz="1700" dirty="0">
+                <a:solidFill>
+                  <a:srgbClr val="1E293B"/>
+                </a:solidFill>
+                <a:latin typeface="Calibri" pitchFamily="34" charset="0"/>
+                <a:ea typeface="Calibri" pitchFamily="34" charset="-122"/>
+                <a:cs typeface="Calibri" pitchFamily="34" charset="-120"/>
+              </a:rPr>
+              <a:t>kettle.</a:t>
+            </a:r>
+            <a:endParaRPr lang="en-US" sz="1700" dirty="0"/>
+          </a:p>
+        </p:txBody>
+      </p:sp>
+      <p:sp>
+        <p:nvSpPr>
+          <p:cNvPr id="9" name="Shape 7"/>
+          <p:cNvSpPr/>
+          <p:nvPr/>
+        </p:nvSpPr>
+        <p:spPr>
+          <a:xfrm>
+            <a:off x="365760" y="2212848"/>
             <a:ext cx="8412480" cy="658368"/>
           </a:xfrm>
           <a:prstGeom prst="roundRect">
@@ -3509,7 +4039,12 @@
           <a:solidFill>
             <a:srgbClr val="FFFFFF"/>
           </a:solidFill>
-          <a:ln/>
+          <a:ln w="19050">
+            <a:solidFill>
+              <a:srgbClr val="C7922C"/>
+            </a:solidFill>
+            <a:prstDash val="solid"/>
+          </a:ln>
           <a:effectLst>
             <a:outerShdw sx="100000" sy="100000" kx="0" ky="0" algn="bl" rotWithShape="0" blurRad="101600" dist="38100" dir="2700000">
               <a:srgbClr val="000000">
@@ -3521,14 +4056,14 @@
       </p:sp>
       <p:sp>
         <p:nvSpPr>
-          <p:cNvPr id="8" name="Text 6"/>
-          <p:cNvSpPr/>
-          <p:nvPr/>
-        </p:nvSpPr>
-        <p:spPr>
-          <a:xfrm>
-            <a:off x="594360" y="1956816"/>
-            <a:ext cx="7863840" cy="402336"/>
+          <p:cNvPr id="10" name="Text 8"/>
+          <p:cNvSpPr/>
+          <p:nvPr/>
+        </p:nvSpPr>
+        <p:spPr>
+          <a:xfrm>
+            <a:off x="594360" y="2340864"/>
+            <a:ext cx="7955280" cy="402336"/>
           </a:xfrm>
           <a:prstGeom prst="rect">
             <a:avLst/>
@@ -3543,88 +4078,20 @@
             <a:pPr indent="0" marL="0">
               <a:buNone/>
             </a:pPr>
-            <a:r>
-              <a:rPr lang="en-US" sz="1600" dirty="0">
-                <a:solidFill>
-                  <a:srgbClr val="1E293B"/>
-                </a:solidFill>
-                <a:latin typeface="Calibri" pitchFamily="34" charset="0"/>
-                <a:ea typeface="Calibri" pitchFamily="34" charset="-122"/>
-                <a:cs typeface="Calibri" pitchFamily="34" charset="-120"/>
-              </a:rPr>
-              <a:t>The </a:t>
-            </a:r>
-            <a:pPr indent="0" marL="0">
-              <a:buNone/>
-            </a:pPr>
-            <a:r>
-              <a:rPr lang="en-US" sz="1600" b="1" dirty="0">
-                <a:solidFill>
-                  <a:srgbClr val="34B76F"/>
-                </a:solidFill>
-                <a:latin typeface="Calibri" pitchFamily="34" charset="0"/>
-                <a:ea typeface="Calibri" pitchFamily="34" charset="-122"/>
-                <a:cs typeface="Calibri" pitchFamily="34" charset="-120"/>
-              </a:rPr>
-              <a:t>rats,</a:t>
-            </a:r>
-            <a:pPr indent="0" marL="0">
-              <a:buNone/>
-            </a:pPr>
-            <a:r>
-              <a:rPr lang="en-US" sz="1600" dirty="0">
-                <a:solidFill>
-                  <a:srgbClr val="1E293B"/>
-                </a:solidFill>
-                <a:latin typeface="Calibri" pitchFamily="34" charset="0"/>
-                <a:ea typeface="Calibri" pitchFamily="34" charset="-122"/>
-                <a:cs typeface="Calibri" pitchFamily="34" charset="-120"/>
-              </a:rPr>
-              <a:t> the mice, and the people all feared the dark.</a:t>
-            </a:r>
-            <a:endParaRPr lang="en-US" sz="1600" dirty="0"/>
-          </a:p>
-        </p:txBody>
-      </p:sp>
-      <p:sp>
-        <p:nvSpPr>
-          <p:cNvPr id="9" name="Shape 7"/>
-          <p:cNvSpPr/>
-          <p:nvPr/>
-        </p:nvSpPr>
-        <p:spPr>
-          <a:xfrm>
-            <a:off x="365760" y="2542032"/>
-            <a:ext cx="8412480" cy="658368"/>
-          </a:xfrm>
-          <a:prstGeom prst="roundRect">
-            <a:avLst>
-              <a:gd name="adj" fmla="val 13889"/>
-            </a:avLst>
-          </a:prstGeom>
-          <a:solidFill>
-            <a:srgbClr val="FEF6E8"/>
-          </a:solidFill>
-          <a:ln/>
-          <a:effectLst>
-            <a:outerShdw sx="100000" sy="100000" kx="0" ky="0" algn="bl" rotWithShape="0" blurRad="101600" dist="38100" dir="2700000">
-              <a:srgbClr val="000000">
-                <a:alpha val="12000"/>
-              </a:srgbClr>
-            </a:outerShdw>
-          </a:effectLst>
-        </p:spPr>
-      </p:sp>
-      <p:sp>
-        <p:nvSpPr>
-          <p:cNvPr id="10" name="Text 8"/>
-          <p:cNvSpPr/>
-          <p:nvPr/>
-        </p:nvSpPr>
-        <p:spPr>
-          <a:xfrm>
-            <a:off x="594360" y="2688336"/>
-            <a:ext cx="7863840" cy="402336"/>
+            <a:endParaRPr lang="en-US" sz="1700" dirty="0"/>
+          </a:p>
+        </p:txBody>
+      </p:sp>
+      <p:sp>
+        <p:nvSpPr>
+          <p:cNvPr id="11" name="Text 9"/>
+          <p:cNvSpPr/>
+          <p:nvPr/>
+        </p:nvSpPr>
+        <p:spPr>
+          <a:xfrm>
+            <a:off x="594360" y="2340864"/>
+            <a:ext cx="7955280" cy="402336"/>
           </a:xfrm>
           <a:prstGeom prst="rect">
             <a:avLst/>
@@ -3640,76 +4107,635 @@
               <a:buNone/>
             </a:pPr>
             <a:r>
-              <a:rPr lang="en-US" sz="1600" dirty="0">
-                <a:solidFill>
-                  <a:srgbClr val="1E293B"/>
-                </a:solidFill>
-                <a:latin typeface="Calibri" pitchFamily="34" charset="0"/>
-                <a:ea typeface="Calibri" pitchFamily="34" charset="-122"/>
-                <a:cs typeface="Calibri" pitchFamily="34" charset="-120"/>
-              </a:rPr>
-              <a:t>Mig wanted a </a:t>
-            </a:r>
-            <a:pPr indent="0" marL="0">
-              <a:buNone/>
-            </a:pPr>
-            <a:r>
-              <a:rPr lang="en-US" sz="1600" b="1" dirty="0">
-                <a:solidFill>
-                  <a:srgbClr val="34B76F"/>
-                </a:solidFill>
-                <a:latin typeface="Calibri" pitchFamily="34" charset="0"/>
-                <a:ea typeface="Calibri" pitchFamily="34" charset="-122"/>
-                <a:cs typeface="Calibri" pitchFamily="34" charset="-120"/>
-              </a:rPr>
-              <a:t>crown,</a:t>
-            </a:r>
-            <a:pPr indent="0" marL="0">
-              <a:buNone/>
-            </a:pPr>
-            <a:r>
-              <a:rPr lang="en-US" sz="1600" dirty="0">
-                <a:solidFill>
-                  <a:srgbClr val="1E293B"/>
-                </a:solidFill>
-                <a:latin typeface="Calibri" pitchFamily="34" charset="0"/>
-                <a:ea typeface="Calibri" pitchFamily="34" charset="-122"/>
-                <a:cs typeface="Calibri" pitchFamily="34" charset="-120"/>
-              </a:rPr>
-              <a:t> a gown, and a name.</a:t>
-            </a:r>
-            <a:endParaRPr lang="en-US" sz="1600" dirty="0"/>
-          </a:p>
-        </p:txBody>
-      </p:sp>
-      <p:sp>
-        <p:nvSpPr>
-          <p:cNvPr id="11" name="Shape 9"/>
-          <p:cNvSpPr/>
-          <p:nvPr/>
-        </p:nvSpPr>
-        <p:spPr>
-          <a:xfrm>
-            <a:off x="365760" y="3273552"/>
-            <a:ext cx="8412480" cy="658368"/>
-          </a:xfrm>
-          <a:prstGeom prst="roundRect">
-            <a:avLst>
-              <a:gd name="adj" fmla="val 13889"/>
-            </a:avLst>
-          </a:prstGeom>
-          <a:solidFill>
-            <a:srgbClr val="FFFFFF"/>
-          </a:solidFill>
-          <a:ln/>
-          <a:effectLst>
-            <a:outerShdw sx="100000" sy="100000" kx="0" ky="0" algn="bl" rotWithShape="0" blurRad="101600" dist="38100" dir="2700000">
-              <a:srgbClr val="000000">
-                <a:alpha val="12000"/>
-              </a:srgbClr>
-            </a:outerShdw>
-          </a:effectLst>
-        </p:spPr>
+              <a:rPr lang="en-US" sz="1700" dirty="0">
+                <a:solidFill>
+                  <a:srgbClr val="1E293B"/>
+                </a:solidFill>
+                <a:latin typeface="Calibri" pitchFamily="34" charset="0"/>
+                <a:ea typeface="Calibri" pitchFamily="34" charset="-122"/>
+                <a:cs typeface="Calibri" pitchFamily="34" charset="-120"/>
+              </a:rPr>
+              <a:t>He</a:t>
+            </a:r>
+            <a:pPr indent="0" marL="0">
+              <a:buNone/>
+            </a:pPr>
+            <a:r>
+              <a:rPr lang="en-US" sz="1700" dirty="0">
+                <a:solidFill>
+                  <a:srgbClr val="1E293B"/>
+                </a:solidFill>
+                <a:latin typeface="Calibri" pitchFamily="34" charset="0"/>
+                <a:ea typeface="Calibri" pitchFamily="34" charset="-122"/>
+                <a:cs typeface="Calibri" pitchFamily="34" charset="-120"/>
+              </a:rPr>
+              <a:t> </a:t>
+            </a:r>
+            <a:pPr indent="0" marL="0">
+              <a:buNone/>
+            </a:pPr>
+            <a:r>
+              <a:rPr lang="en-US" sz="1700" dirty="0">
+                <a:solidFill>
+                  <a:srgbClr val="1E293B"/>
+                </a:solidFill>
+                <a:latin typeface="Calibri" pitchFamily="34" charset="0"/>
+                <a:ea typeface="Calibri" pitchFamily="34" charset="-122"/>
+                <a:cs typeface="Calibri" pitchFamily="34" charset="-120"/>
+              </a:rPr>
+              <a:t>saw</a:t>
+            </a:r>
+            <a:pPr indent="0" marL="0">
+              <a:buNone/>
+            </a:pPr>
+            <a:r>
+              <a:rPr lang="en-US" sz="1700" dirty="0">
+                <a:solidFill>
+                  <a:srgbClr val="1E293B"/>
+                </a:solidFill>
+                <a:latin typeface="Calibri" pitchFamily="34" charset="0"/>
+                <a:ea typeface="Calibri" pitchFamily="34" charset="-122"/>
+                <a:cs typeface="Calibri" pitchFamily="34" charset="-120"/>
+              </a:rPr>
+              <a:t> </a:t>
+            </a:r>
+            <a:pPr indent="0" marL="0">
+              <a:buNone/>
+            </a:pPr>
+            <a:r>
+              <a:rPr lang="en-US" sz="1700" dirty="0">
+                <a:solidFill>
+                  <a:srgbClr val="1E293B"/>
+                </a:solidFill>
+                <a:latin typeface="Calibri" pitchFamily="34" charset="0"/>
+                <a:ea typeface="Calibri" pitchFamily="34" charset="-122"/>
+                <a:cs typeface="Calibri" pitchFamily="34" charset="-120"/>
+              </a:rPr>
+              <a:t>that</a:t>
+            </a:r>
+            <a:pPr indent="0" marL="0">
+              <a:buNone/>
+            </a:pPr>
+            <a:r>
+              <a:rPr lang="en-US" sz="1700" dirty="0">
+                <a:solidFill>
+                  <a:srgbClr val="1E293B"/>
+                </a:solidFill>
+                <a:latin typeface="Calibri" pitchFamily="34" charset="0"/>
+                <a:ea typeface="Calibri" pitchFamily="34" charset="-122"/>
+                <a:cs typeface="Calibri" pitchFamily="34" charset="-120"/>
+              </a:rPr>
+              <a:t> </a:t>
+            </a:r>
+            <a:pPr indent="0" marL="0">
+              <a:buNone/>
+            </a:pPr>
+            <a:r>
+              <a:rPr lang="en-US" sz="1700" dirty="0">
+                <a:solidFill>
+                  <a:srgbClr val="1E293B"/>
+                </a:solidFill>
+                <a:latin typeface="Calibri" pitchFamily="34" charset="0"/>
+                <a:ea typeface="Calibri" pitchFamily="34" charset="-122"/>
+                <a:cs typeface="Calibri" pitchFamily="34" charset="-120"/>
+              </a:rPr>
+              <a:t>the</a:t>
+            </a:r>
+            <a:pPr indent="0" marL="0">
+              <a:buNone/>
+            </a:pPr>
+            <a:r>
+              <a:rPr lang="en-US" sz="1700" dirty="0">
+                <a:solidFill>
+                  <a:srgbClr val="1E293B"/>
+                </a:solidFill>
+                <a:latin typeface="Calibri" pitchFamily="34" charset="0"/>
+                <a:ea typeface="Calibri" pitchFamily="34" charset="-122"/>
+                <a:cs typeface="Calibri" pitchFamily="34" charset="-120"/>
+              </a:rPr>
+              <a:t> </a:t>
+            </a:r>
+            <a:pPr indent="0" marL="0">
+              <a:buNone/>
+            </a:pPr>
+            <a:r>
+              <a:rPr lang="en-US" sz="1700" dirty="0">
+                <a:solidFill>
+                  <a:srgbClr val="1E293B"/>
+                </a:solidFill>
+                <a:latin typeface="Calibri" pitchFamily="34" charset="0"/>
+                <a:ea typeface="Calibri" pitchFamily="34" charset="-122"/>
+                <a:cs typeface="Calibri" pitchFamily="34" charset="-120"/>
+              </a:rPr>
+              <a:t>floor</a:t>
+            </a:r>
+            <a:pPr indent="0" marL="0">
+              <a:buNone/>
+            </a:pPr>
+            <a:r>
+              <a:rPr lang="en-US" sz="1700" dirty="0">
+                <a:solidFill>
+                  <a:srgbClr val="1E293B"/>
+                </a:solidFill>
+                <a:latin typeface="Calibri" pitchFamily="34" charset="0"/>
+                <a:ea typeface="Calibri" pitchFamily="34" charset="-122"/>
+                <a:cs typeface="Calibri" pitchFamily="34" charset="-120"/>
+              </a:rPr>
+              <a:t> </a:t>
+            </a:r>
+            <a:pPr indent="0" marL="0">
+              <a:buNone/>
+            </a:pPr>
+            <a:r>
+              <a:rPr lang="en-US" sz="1700" dirty="0">
+                <a:solidFill>
+                  <a:srgbClr val="1E293B"/>
+                </a:solidFill>
+                <a:latin typeface="Calibri" pitchFamily="34" charset="0"/>
+                <a:ea typeface="Calibri" pitchFamily="34" charset="-122"/>
+                <a:cs typeface="Calibri" pitchFamily="34" charset="-120"/>
+              </a:rPr>
+              <a:t>of</a:t>
+            </a:r>
+            <a:pPr indent="0" marL="0">
+              <a:buNone/>
+            </a:pPr>
+            <a:r>
+              <a:rPr lang="en-US" sz="1700" dirty="0">
+                <a:solidFill>
+                  <a:srgbClr val="1E293B"/>
+                </a:solidFill>
+                <a:latin typeface="Calibri" pitchFamily="34" charset="0"/>
+                <a:ea typeface="Calibri" pitchFamily="34" charset="-122"/>
+                <a:cs typeface="Calibri" pitchFamily="34" charset="-120"/>
+              </a:rPr>
+              <a:t> </a:t>
+            </a:r>
+            <a:pPr indent="0" marL="0">
+              <a:buNone/>
+            </a:pPr>
+            <a:r>
+              <a:rPr lang="en-US" sz="1700" dirty="0">
+                <a:solidFill>
+                  <a:srgbClr val="1E293B"/>
+                </a:solidFill>
+                <a:latin typeface="Calibri" pitchFamily="34" charset="0"/>
+                <a:ea typeface="Calibri" pitchFamily="34" charset="-122"/>
+                <a:cs typeface="Calibri" pitchFamily="34" charset="-120"/>
+              </a:rPr>
+              <a:t>the</a:t>
+            </a:r>
+            <a:pPr indent="0" marL="0">
+              <a:buNone/>
+            </a:pPr>
+            <a:r>
+              <a:rPr lang="en-US" sz="1700" dirty="0">
+                <a:solidFill>
+                  <a:srgbClr val="1E293B"/>
+                </a:solidFill>
+                <a:latin typeface="Calibri" pitchFamily="34" charset="0"/>
+                <a:ea typeface="Calibri" pitchFamily="34" charset="-122"/>
+                <a:cs typeface="Calibri" pitchFamily="34" charset="-120"/>
+              </a:rPr>
+              <a:t> </a:t>
+            </a:r>
+            <a:pPr indent="0" marL="0">
+              <a:buNone/>
+            </a:pPr>
+            <a:r>
+              <a:rPr lang="en-US" sz="1700" dirty="0">
+                <a:solidFill>
+                  <a:srgbClr val="1E293B"/>
+                </a:solidFill>
+                <a:latin typeface="Calibri" pitchFamily="34" charset="0"/>
+                <a:ea typeface="Calibri" pitchFamily="34" charset="-122"/>
+                <a:cs typeface="Calibri" pitchFamily="34" charset="-120"/>
+              </a:rPr>
+              <a:t>dungeon</a:t>
+            </a:r>
+            <a:pPr indent="0" marL="0">
+              <a:buNone/>
+            </a:pPr>
+            <a:r>
+              <a:rPr lang="en-US" sz="1700" dirty="0">
+                <a:solidFill>
+                  <a:srgbClr val="1E293B"/>
+                </a:solidFill>
+                <a:latin typeface="Calibri" pitchFamily="34" charset="0"/>
+                <a:ea typeface="Calibri" pitchFamily="34" charset="-122"/>
+                <a:cs typeface="Calibri" pitchFamily="34" charset="-120"/>
+              </a:rPr>
+              <a:t> </a:t>
+            </a:r>
+            <a:pPr indent="0" marL="0">
+              <a:buNone/>
+            </a:pPr>
+            <a:r>
+              <a:rPr lang="en-US" sz="1700" dirty="0">
+                <a:solidFill>
+                  <a:srgbClr val="1E293B"/>
+                </a:solidFill>
+                <a:latin typeface="Calibri" pitchFamily="34" charset="0"/>
+                <a:ea typeface="Calibri" pitchFamily="34" charset="-122"/>
+                <a:cs typeface="Calibri" pitchFamily="34" charset="-120"/>
+              </a:rPr>
+              <a:t>was</a:t>
+            </a:r>
+            <a:pPr indent="0" marL="0">
+              <a:buNone/>
+            </a:pPr>
+            <a:r>
+              <a:rPr lang="en-US" sz="1700" dirty="0">
+                <a:solidFill>
+                  <a:srgbClr val="1E293B"/>
+                </a:solidFill>
+                <a:latin typeface="Calibri" pitchFamily="34" charset="0"/>
+                <a:ea typeface="Calibri" pitchFamily="34" charset="-122"/>
+                <a:cs typeface="Calibri" pitchFamily="34" charset="-120"/>
+              </a:rPr>
+              <a:t> </a:t>
+            </a:r>
+            <a:pPr indent="0" marL="0">
+              <a:buNone/>
+            </a:pPr>
+            <a:r>
+              <a:rPr lang="en-US" sz="1700" dirty="0">
+                <a:solidFill>
+                  <a:srgbClr val="1E293B"/>
+                </a:solidFill>
+                <a:latin typeface="Calibri" pitchFamily="34" charset="0"/>
+                <a:ea typeface="Calibri" pitchFamily="34" charset="-122"/>
+                <a:cs typeface="Calibri" pitchFamily="34" charset="-120"/>
+              </a:rPr>
+              <a:t>littered</a:t>
+            </a:r>
+            <a:pPr indent="0" marL="0">
+              <a:buNone/>
+            </a:pPr>
+            <a:r>
+              <a:rPr lang="en-US" sz="1700" dirty="0">
+                <a:solidFill>
+                  <a:srgbClr val="1E293B"/>
+                </a:solidFill>
+                <a:latin typeface="Calibri" pitchFamily="34" charset="0"/>
+                <a:ea typeface="Calibri" pitchFamily="34" charset="-122"/>
+                <a:cs typeface="Calibri" pitchFamily="34" charset="-120"/>
+              </a:rPr>
+              <a:t> </a:t>
+            </a:r>
+            <a:pPr indent="0" marL="0">
+              <a:buNone/>
+            </a:pPr>
+            <a:r>
+              <a:rPr lang="en-US" sz="1700" dirty="0">
+                <a:solidFill>
+                  <a:srgbClr val="1E293B"/>
+                </a:solidFill>
+                <a:latin typeface="Calibri" pitchFamily="34" charset="0"/>
+                <a:ea typeface="Calibri" pitchFamily="34" charset="-122"/>
+                <a:cs typeface="Calibri" pitchFamily="34" charset="-120"/>
+              </a:rPr>
+              <a:t>with</a:t>
+            </a:r>
+            <a:pPr indent="0" marL="0">
+              <a:buNone/>
+            </a:pPr>
+            <a:r>
+              <a:rPr lang="en-US" sz="1700" dirty="0">
+                <a:solidFill>
+                  <a:srgbClr val="1E293B"/>
+                </a:solidFill>
+                <a:latin typeface="Calibri" pitchFamily="34" charset="0"/>
+                <a:ea typeface="Calibri" pitchFamily="34" charset="-122"/>
+                <a:cs typeface="Calibri" pitchFamily="34" charset="-120"/>
+              </a:rPr>
+              <a:t> </a:t>
+            </a:r>
+            <a:pPr indent="0" marL="0">
+              <a:buNone/>
+            </a:pPr>
+            <a:r>
+              <a:rPr lang="en-US" sz="1700" dirty="0">
+                <a:solidFill>
+                  <a:srgbClr val="1E293B"/>
+                </a:solidFill>
+                <a:latin typeface="Calibri" pitchFamily="34" charset="0"/>
+                <a:ea typeface="Calibri" pitchFamily="34" charset="-122"/>
+                <a:cs typeface="Calibri" pitchFamily="34" charset="-120"/>
+              </a:rPr>
+              <a:t>tufts</a:t>
+            </a:r>
+            <a:pPr indent="0" marL="0">
+              <a:buNone/>
+            </a:pPr>
+            <a:r>
+              <a:rPr lang="en-US" sz="1700" dirty="0">
+                <a:solidFill>
+                  <a:srgbClr val="1E293B"/>
+                </a:solidFill>
+                <a:latin typeface="Calibri" pitchFamily="34" charset="0"/>
+                <a:ea typeface="Calibri" pitchFamily="34" charset="-122"/>
+                <a:cs typeface="Calibri" pitchFamily="34" charset="-120"/>
+              </a:rPr>
+              <a:t> </a:t>
+            </a:r>
+            <a:pPr indent="0" marL="0">
+              <a:buNone/>
+            </a:pPr>
+            <a:r>
+              <a:rPr lang="en-US" sz="1700" dirty="0">
+                <a:solidFill>
+                  <a:srgbClr val="1E293B"/>
+                </a:solidFill>
+                <a:latin typeface="Calibri" pitchFamily="34" charset="0"/>
+                <a:ea typeface="Calibri" pitchFamily="34" charset="-122"/>
+                <a:cs typeface="Calibri" pitchFamily="34" charset="-120"/>
+              </a:rPr>
+              <a:t>of</a:t>
+            </a:r>
+            <a:pPr indent="0" marL="0">
+              <a:buNone/>
+            </a:pPr>
+            <a:r>
+              <a:rPr lang="en-US" sz="1700" dirty="0">
+                <a:solidFill>
+                  <a:srgbClr val="1E293B"/>
+                </a:solidFill>
+                <a:latin typeface="Calibri" pitchFamily="34" charset="0"/>
+                <a:ea typeface="Calibri" pitchFamily="34" charset="-122"/>
+                <a:cs typeface="Calibri" pitchFamily="34" charset="-120"/>
+              </a:rPr>
+              <a:t> </a:t>
+            </a:r>
+            <a:pPr indent="0" marL="0">
+              <a:buNone/>
+            </a:pPr>
+            <a:r>
+              <a:rPr lang="en-US" sz="1700" dirty="0">
+                <a:solidFill>
+                  <a:srgbClr val="1E293B"/>
+                </a:solidFill>
+                <a:latin typeface="Calibri" pitchFamily="34" charset="0"/>
+                <a:ea typeface="Calibri" pitchFamily="34" charset="-122"/>
+                <a:cs typeface="Calibri" pitchFamily="34" charset="-120"/>
+              </a:rPr>
+              <a:t>fur,</a:t>
+            </a:r>
+            <a:pPr indent="0" marL="0">
+              <a:buNone/>
+            </a:pPr>
+            <a:r>
+              <a:rPr lang="en-US" sz="1700" dirty="0">
+                <a:solidFill>
+                  <a:srgbClr val="1E293B"/>
+                </a:solidFill>
+                <a:latin typeface="Calibri" pitchFamily="34" charset="0"/>
+                <a:ea typeface="Calibri" pitchFamily="34" charset="-122"/>
+                <a:cs typeface="Calibri" pitchFamily="34" charset="-120"/>
+              </a:rPr>
+              <a:t> </a:t>
+            </a:r>
+            <a:pPr indent="0" marL="0">
+              <a:buNone/>
+            </a:pPr>
+            <a:r>
+              <a:rPr lang="en-US" sz="1700" dirty="0">
+                <a:solidFill>
+                  <a:srgbClr val="1E293B"/>
+                </a:solidFill>
+                <a:latin typeface="Calibri" pitchFamily="34" charset="0"/>
+                <a:ea typeface="Calibri" pitchFamily="34" charset="-122"/>
+                <a:cs typeface="Calibri" pitchFamily="34" charset="-120"/>
+              </a:rPr>
+              <a:t>knots</a:t>
+            </a:r>
+            <a:pPr indent="0" marL="0">
+              <a:buNone/>
+            </a:pPr>
+            <a:r>
+              <a:rPr lang="en-US" sz="1700" dirty="0">
+                <a:solidFill>
+                  <a:srgbClr val="1E293B"/>
+                </a:solidFill>
+                <a:latin typeface="Calibri" pitchFamily="34" charset="0"/>
+                <a:ea typeface="Calibri" pitchFamily="34" charset="-122"/>
+                <a:cs typeface="Calibri" pitchFamily="34" charset="-120"/>
+              </a:rPr>
+              <a:t> </a:t>
+            </a:r>
+            <a:pPr indent="0" marL="0">
+              <a:buNone/>
+            </a:pPr>
+            <a:r>
+              <a:rPr lang="en-US" sz="1700" dirty="0">
+                <a:solidFill>
+                  <a:srgbClr val="1E293B"/>
+                </a:solidFill>
+                <a:latin typeface="Calibri" pitchFamily="34" charset="0"/>
+                <a:ea typeface="Calibri" pitchFamily="34" charset="-122"/>
+                <a:cs typeface="Calibri" pitchFamily="34" charset="-120"/>
+              </a:rPr>
+              <a:t>of</a:t>
+            </a:r>
+            <a:pPr indent="0" marL="0">
+              <a:buNone/>
+            </a:pPr>
+            <a:r>
+              <a:rPr lang="en-US" sz="1700" dirty="0">
+                <a:solidFill>
+                  <a:srgbClr val="1E293B"/>
+                </a:solidFill>
+                <a:latin typeface="Calibri" pitchFamily="34" charset="0"/>
+                <a:ea typeface="Calibri" pitchFamily="34" charset="-122"/>
+                <a:cs typeface="Calibri" pitchFamily="34" charset="-120"/>
+              </a:rPr>
+              <a:t> </a:t>
+            </a:r>
+            <a:pPr indent="0" marL="0">
+              <a:buNone/>
+            </a:pPr>
+            <a:r>
+              <a:rPr lang="en-US" sz="1700" dirty="0">
+                <a:solidFill>
+                  <a:srgbClr val="1E293B"/>
+                </a:solidFill>
+                <a:latin typeface="Calibri" pitchFamily="34" charset="0"/>
+                <a:ea typeface="Calibri" pitchFamily="34" charset="-122"/>
+                <a:cs typeface="Calibri" pitchFamily="34" charset="-120"/>
+              </a:rPr>
+              <a:t>red</a:t>
+            </a:r>
+            <a:pPr indent="0" marL="0">
+              <a:buNone/>
+            </a:pPr>
+            <a:r>
+              <a:rPr lang="en-US" sz="1700" dirty="0">
+                <a:solidFill>
+                  <a:srgbClr val="1E293B"/>
+                </a:solidFill>
+                <a:latin typeface="Calibri" pitchFamily="34" charset="0"/>
+                <a:ea typeface="Calibri" pitchFamily="34" charset="-122"/>
+                <a:cs typeface="Calibri" pitchFamily="34" charset="-120"/>
+              </a:rPr>
+              <a:t> </a:t>
+            </a:r>
+            <a:pPr indent="0" marL="0">
+              <a:buNone/>
+            </a:pPr>
+            <a:r>
+              <a:rPr lang="en-US" sz="1700" dirty="0">
+                <a:solidFill>
+                  <a:srgbClr val="1E293B"/>
+                </a:solidFill>
+                <a:latin typeface="Calibri" pitchFamily="34" charset="0"/>
+                <a:ea typeface="Calibri" pitchFamily="34" charset="-122"/>
+                <a:cs typeface="Calibri" pitchFamily="34" charset="-120"/>
+              </a:rPr>
+              <a:t>thread,</a:t>
+            </a:r>
+            <a:pPr indent="0" marL="0">
+              <a:buNone/>
+            </a:pPr>
+            <a:r>
+              <a:rPr lang="en-US" sz="1700" dirty="0">
+                <a:solidFill>
+                  <a:srgbClr val="1E293B"/>
+                </a:solidFill>
+                <a:latin typeface="Calibri" pitchFamily="34" charset="0"/>
+                <a:ea typeface="Calibri" pitchFamily="34" charset="-122"/>
+                <a:cs typeface="Calibri" pitchFamily="34" charset="-120"/>
+              </a:rPr>
+              <a:t> </a:t>
+            </a:r>
+            <a:pPr indent="0" marL="0">
+              <a:buNone/>
+            </a:pPr>
+            <a:r>
+              <a:rPr lang="en-US" sz="1700" dirty="0">
+                <a:solidFill>
+                  <a:srgbClr val="1E293B"/>
+                </a:solidFill>
+                <a:latin typeface="Calibri" pitchFamily="34" charset="0"/>
+                <a:ea typeface="Calibri" pitchFamily="34" charset="-122"/>
+                <a:cs typeface="Calibri" pitchFamily="34" charset="-120"/>
+              </a:rPr>
+              <a:t>and</a:t>
+            </a:r>
+            <a:pPr indent="0" marL="0">
+              <a:buNone/>
+            </a:pPr>
+            <a:r>
+              <a:rPr lang="en-US" sz="1700" dirty="0">
+                <a:solidFill>
+                  <a:srgbClr val="1E293B"/>
+                </a:solidFill>
+                <a:latin typeface="Calibri" pitchFamily="34" charset="0"/>
+                <a:ea typeface="Calibri" pitchFamily="34" charset="-122"/>
+                <a:cs typeface="Calibri" pitchFamily="34" charset="-120"/>
+              </a:rPr>
+              <a:t> </a:t>
+            </a:r>
+            <a:pPr indent="0" marL="0">
+              <a:buNone/>
+            </a:pPr>
+            <a:r>
+              <a:rPr lang="en-US" sz="1700" dirty="0">
+                <a:solidFill>
+                  <a:srgbClr val="1E293B"/>
+                </a:solidFill>
+                <a:latin typeface="Calibri" pitchFamily="34" charset="0"/>
+                <a:ea typeface="Calibri" pitchFamily="34" charset="-122"/>
+                <a:cs typeface="Calibri" pitchFamily="34" charset="-120"/>
+              </a:rPr>
+              <a:t>the</a:t>
+            </a:r>
+            <a:pPr indent="0" marL="0">
+              <a:buNone/>
+            </a:pPr>
+            <a:r>
+              <a:rPr lang="en-US" sz="1700" dirty="0">
+                <a:solidFill>
+                  <a:srgbClr val="1E293B"/>
+                </a:solidFill>
+                <a:latin typeface="Calibri" pitchFamily="34" charset="0"/>
+                <a:ea typeface="Calibri" pitchFamily="34" charset="-122"/>
+                <a:cs typeface="Calibri" pitchFamily="34" charset="-120"/>
+              </a:rPr>
+              <a:t> </a:t>
+            </a:r>
+            <a:pPr indent="0" marL="0">
+              <a:buNone/>
+            </a:pPr>
+            <a:r>
+              <a:rPr lang="en-US" sz="1700" dirty="0">
+                <a:solidFill>
+                  <a:srgbClr val="1E293B"/>
+                </a:solidFill>
+                <a:latin typeface="Calibri" pitchFamily="34" charset="0"/>
+                <a:ea typeface="Calibri" pitchFamily="34" charset="-122"/>
+                <a:cs typeface="Calibri" pitchFamily="34" charset="-120"/>
+              </a:rPr>
+              <a:t>skeletons</a:t>
+            </a:r>
+            <a:pPr indent="0" marL="0">
+              <a:buNone/>
+            </a:pPr>
+            <a:r>
+              <a:rPr lang="en-US" sz="1700" dirty="0">
+                <a:solidFill>
+                  <a:srgbClr val="1E293B"/>
+                </a:solidFill>
+                <a:latin typeface="Calibri" pitchFamily="34" charset="0"/>
+                <a:ea typeface="Calibri" pitchFamily="34" charset="-122"/>
+                <a:cs typeface="Calibri" pitchFamily="34" charset="-120"/>
+              </a:rPr>
+              <a:t> </a:t>
+            </a:r>
+            <a:pPr indent="0" marL="0">
+              <a:buNone/>
+            </a:pPr>
+            <a:r>
+              <a:rPr lang="en-US" sz="1700" dirty="0">
+                <a:solidFill>
+                  <a:srgbClr val="1E293B"/>
+                </a:solidFill>
+                <a:latin typeface="Calibri" pitchFamily="34" charset="0"/>
+                <a:ea typeface="Calibri" pitchFamily="34" charset="-122"/>
+                <a:cs typeface="Calibri" pitchFamily="34" charset="-120"/>
+              </a:rPr>
+              <a:t>of</a:t>
+            </a:r>
+            <a:pPr indent="0" marL="0">
+              <a:buNone/>
+            </a:pPr>
+            <a:r>
+              <a:rPr lang="en-US" sz="1700" dirty="0">
+                <a:solidFill>
+                  <a:srgbClr val="1E293B"/>
+                </a:solidFill>
+                <a:latin typeface="Calibri" pitchFamily="34" charset="0"/>
+                <a:ea typeface="Calibri" pitchFamily="34" charset="-122"/>
+                <a:cs typeface="Calibri" pitchFamily="34" charset="-120"/>
+              </a:rPr>
+              <a:t> </a:t>
+            </a:r>
+            <a:pPr indent="0" marL="0">
+              <a:buNone/>
+            </a:pPr>
+            <a:r>
+              <a:rPr lang="en-US" sz="1700" dirty="0">
+                <a:solidFill>
+                  <a:srgbClr val="1E293B"/>
+                </a:solidFill>
+                <a:latin typeface="Calibri" pitchFamily="34" charset="0"/>
+                <a:ea typeface="Calibri" pitchFamily="34" charset="-122"/>
+                <a:cs typeface="Calibri" pitchFamily="34" charset="-120"/>
+              </a:rPr>
+              <a:t>mice.</a:t>
+            </a:r>
+            <a:endParaRPr lang="en-US" sz="1700" dirty="0"/>
+          </a:p>
+        </p:txBody>
       </p:sp>
       <p:sp>
         <p:nvSpPr>
@@ -3719,8 +4745,8 @@
         </p:nvSpPr>
         <p:spPr>
           <a:xfrm>
-            <a:off x="594360" y="3419856"/>
-            <a:ext cx="7863840" cy="402336"/>
+            <a:off x="365760" y="3008376"/>
+            <a:ext cx="8229600" cy="237744"/>
           </a:xfrm>
           <a:prstGeom prst="rect">
             <a:avLst/>
@@ -3736,31 +4762,17 @@
               <a:buNone/>
             </a:pPr>
             <a:r>
-              <a:rPr lang="en-US" sz="1600" b="1" dirty="0">
-                <a:solidFill>
-                  <a:srgbClr val="34B76F"/>
-                </a:solidFill>
-                <a:latin typeface="Calibri" pitchFamily="34" charset="0"/>
-                <a:ea typeface="Calibri" pitchFamily="34" charset="-122"/>
-                <a:cs typeface="Calibri" pitchFamily="34" charset="-120"/>
-              </a:rPr>
-              <a:t>Garlic,</a:t>
-            </a:r>
-            <a:pPr indent="0" marL="0">
-              <a:buNone/>
-            </a:pPr>
-            <a:r>
-              <a:rPr lang="en-US" sz="1600" dirty="0">
-                <a:solidFill>
-                  <a:srgbClr val="1E293B"/>
-                </a:solidFill>
-                <a:latin typeface="Calibri" pitchFamily="34" charset="0"/>
-                <a:ea typeface="Calibri" pitchFamily="34" charset="-122"/>
-                <a:cs typeface="Calibri" pitchFamily="34" charset="-120"/>
-              </a:rPr>
-              <a:t> chicken, and watercress went into the pot.</a:t>
-            </a:r>
-            <a:endParaRPr lang="en-US" sz="1600" dirty="0"/>
+              <a:rPr lang="en-US" sz="1100" b="1" spc="100" kern="0" dirty="0">
+                <a:solidFill>
+                  <a:srgbClr val="C7922C"/>
+                </a:solidFill>
+                <a:latin typeface="Calibri" pitchFamily="34" charset="0"/>
+                <a:ea typeface="Calibri" pitchFamily="34" charset="-122"/>
+                <a:cs typeface="Calibri" pitchFamily="34" charset="-120"/>
+              </a:rPr>
+              <a:t>THINK IT THROUGH</a:t>
+            </a:r>
+            <a:endParaRPr lang="en-US" sz="1100" dirty="0"/>
           </a:p>
         </p:txBody>
       </p:sp>
@@ -3772,8 +4784,8 @@
         </p:nvSpPr>
         <p:spPr>
           <a:xfrm>
-            <a:off x="365760" y="4050792"/>
-            <a:ext cx="8412480" cy="365760"/>
+            <a:off x="365760" y="3255264"/>
+            <a:ext cx="8412480" cy="1563624"/>
           </a:xfrm>
           <a:prstGeom prst="rect">
             <a:avLst/>
@@ -3782,24 +4794,58 @@
           <a:ln/>
         </p:spPr>
         <p:txBody>
-          <a:bodyPr wrap="square" lIns="0" tIns="0" rIns="0" bIns="0" rtlCol="0" anchor="ctr"/>
-          <a:lstStyle/>
-          <a:p>
-            <a:pPr indent="0" marL="0">
-              <a:buNone/>
-            </a:pPr>
-            <a:r>
-              <a:rPr lang="en-US" sz="1500" b="1" dirty="0">
-                <a:solidFill>
-                  <a:srgbClr val="34B76F"/>
-                </a:solidFill>
-                <a:latin typeface="Calibri" pitchFamily="34" charset="0"/>
-                <a:ea typeface="Calibri" pitchFamily="34" charset="-122"/>
-                <a:cs typeface="Calibri" pitchFamily="34" charset="-120"/>
-              </a:rPr>
-              <a:t>✅  Answers revealed</a:t>
-            </a:r>
-            <a:endParaRPr lang="en-US" sz="1500" dirty="0"/>
+          <a:bodyPr wrap="square" lIns="0" tIns="0" rIns="0" bIns="0" rtlCol="0" anchor="t"/>
+          <a:lstStyle/>
+          <a:p>
+            <a:pPr indent="0" marL="0">
+              <a:buNone/>
+            </a:pPr>
+            <a:r>
+              <a:rPr lang="en-US" sz="1400" dirty="0">
+                <a:solidFill>
+                  <a:srgbClr val="1E293B"/>
+                </a:solidFill>
+                <a:latin typeface="Calibri" pitchFamily="34" charset="0"/>
+                <a:ea typeface="Calibri" pitchFamily="34" charset="-122"/>
+                <a:cs typeface="Calibri" pitchFamily="34" charset="-120"/>
+              </a:rPr>
+              <a:t>1.  How many items are in each list?</a:t>
+            </a:r>
+            <a:endParaRPr lang="en-US" sz="1400" dirty="0"/>
+          </a:p>
+          <a:p>
+            <a:pPr indent="0" marL="0">
+              <a:buNone/>
+            </a:pPr>
+            <a:r>
+              <a:rPr lang="en-US" sz="1400" dirty="0">
+                <a:solidFill>
+                  <a:srgbClr val="1E293B"/>
+                </a:solidFill>
+                <a:latin typeface="Calibri" pitchFamily="34" charset="0"/>
+                <a:ea typeface="Calibri" pitchFamily="34" charset="-122"/>
+                <a:cs typeface="Calibri" pitchFamily="34" charset="-120"/>
+              </a:rPr>
+              <a:t>2.  How many commas are there — the same number, or one fewer?</a:t>
+            </a:r>
+            <a:endParaRPr lang="en-US" sz="1400" dirty="0"/>
+          </a:p>
+          <a:p>
+            <a:pPr indent="0" marL="0">
+              <a:buNone/>
+            </a:pPr>
+            <a:r>
+              <a:rPr lang="en-US" sz="1400" dirty="0">
+                <a:solidFill>
+                  <a:srgbClr val="1E293B"/>
+                </a:solidFill>
+                <a:latin typeface="Calibri" pitchFamily="34" charset="0"/>
+                <a:ea typeface="Calibri" pitchFamily="34" charset="-122"/>
+                <a:cs typeface="Calibri" pitchFamily="34" charset="-120"/>
+              </a:rPr>
+              <a:t>3.  What word shows up right before the last item?</a:t>
+            </a:r>
+            <a:endParaRPr lang="en-US" sz="1400" dirty="0"/>
           </a:p>
         </p:txBody>
       </p:sp>
@@ -3850,7 +4896,7 @@
             <a:avLst/>
           </a:prstGeom>
           <a:solidFill>
-            <a:srgbClr val="0E1C42"/>
+            <a:srgbClr val="C7922C"/>
           </a:solidFill>
           <a:ln/>
         </p:spPr>
@@ -3888,7 +4934,7 @@
                 <a:ea typeface="Calibri" pitchFamily="34" charset="-122"/>
                 <a:cs typeface="Calibri" pitchFamily="34" charset="-120"/>
               </a:rPr>
-              <a:t>🔠  Spelling</a:t>
+              <a:t>✏️  Grammar — What do you notice?</a:t>
             </a:r>
             <a:endParaRPr lang="en-US" sz="2200" dirty="0"/>
           </a:p>
@@ -3902,7 +4948,7 @@
         </p:nvSpPr>
         <p:spPr>
           <a:xfrm>
-            <a:off x="365760" y="777240"/>
+            <a:off x="365760" y="749808"/>
             <a:ext cx="8229600" cy="237744"/>
           </a:xfrm>
           <a:prstGeom prst="rect">
@@ -3921,13 +4967,13 @@
             <a:r>
               <a:rPr lang="en-US" sz="1100" b="1" spc="100" kern="0" dirty="0">
                 <a:solidFill>
-                  <a:srgbClr val="0E1C42"/>
-                </a:solidFill>
-                <a:latin typeface="Calibri" pitchFamily="34" charset="0"/>
-                <a:ea typeface="Calibri" pitchFamily="34" charset="-122"/>
-                <a:cs typeface="Calibri" pitchFamily="34" charset="-120"/>
-              </a:rPr>
-              <a:t>LONGER WORDS WITH FAMILIAR SUFFIXES</a:t>
+                  <a:srgbClr val="C7922C"/>
+                </a:solidFill>
+                <a:latin typeface="Calibri" pitchFamily="34" charset="0"/>
+                <a:ea typeface="Calibri" pitchFamily="34" charset="-122"/>
+                <a:cs typeface="Calibri" pitchFamily="34" charset="-120"/>
+              </a:rPr>
+              <a:t>COMMAS IN A SERIES</a:t>
             </a:r>
             <a:endParaRPr lang="en-US" sz="1100" dirty="0"/>
           </a:p>
@@ -3941,8 +4987,8 @@
         </p:nvSpPr>
         <p:spPr>
           <a:xfrm>
-            <a:off x="365760" y="1078992"/>
-            <a:ext cx="8229600" cy="237744"/>
+            <a:off x="365760" y="987552"/>
+            <a:ext cx="8412480" cy="411480"/>
           </a:xfrm>
           <a:prstGeom prst="rect">
             <a:avLst/>
@@ -3958,7 +5004,7 @@
               <a:buNone/>
             </a:pPr>
             <a:r>
-              <a:rPr lang="en-US" sz="1100" b="1" spc="100" kern="0" dirty="0">
+              <a:rPr lang="en-US" sz="1500" i="1" dirty="0">
                 <a:solidFill>
                   <a:srgbClr val="64748B"/>
                 </a:solidFill>
@@ -3966,9 +5012,9 @@
                 <a:ea typeface="Calibri" pitchFamily="34" charset="-122"/>
                 <a:cs typeface="Calibri" pitchFamily="34" charset="-120"/>
               </a:rPr>
-              <a:t>WORD BANK</a:t>
-            </a:r>
-            <a:endParaRPr lang="en-US" sz="1100" dirty="0"/>
+              <a:t>Count the commas in each sentence, then count the things being listed.</a:t>
+            </a:r>
+            <a:endParaRPr lang="en-US" sz="1500" dirty="0"/>
           </a:p>
         </p:txBody>
       </p:sp>
@@ -3980,20 +5026,20 @@
         </p:nvSpPr>
         <p:spPr>
           <a:xfrm>
-            <a:off x="365760" y="1353312"/>
-            <a:ext cx="8412480" cy="1005840"/>
+            <a:off x="365760" y="1463040"/>
+            <a:ext cx="8412480" cy="658368"/>
           </a:xfrm>
           <a:prstGeom prst="roundRect">
             <a:avLst>
-              <a:gd name="adj" fmla="val 9091"/>
+              <a:gd name="adj" fmla="val 13889"/>
             </a:avLst>
           </a:prstGeom>
           <a:solidFill>
-            <a:srgbClr val="FFFFFF"/>
+            <a:srgbClr val="FEF6E8"/>
           </a:solidFill>
           <a:ln w="19050">
             <a:solidFill>
-              <a:srgbClr val="0E1C42"/>
+              <a:srgbClr val="C7922C"/>
             </a:solidFill>
             <a:prstDash val="solid"/>
           </a:ln>
@@ -4014,8 +5060,8 @@
         </p:nvSpPr>
         <p:spPr>
           <a:xfrm>
-            <a:off x="594360" y="1481328"/>
-            <a:ext cx="7955280" cy="749808"/>
+            <a:off x="594360" y="1591056"/>
+            <a:ext cx="7955280" cy="402336"/>
           </a:xfrm>
           <a:prstGeom prst="rect">
             <a:avLst/>
@@ -4030,17 +5076,6 @@
             <a:pPr indent="0" marL="0">
               <a:buNone/>
             </a:pPr>
-            <a:r>
-              <a:rPr lang="en-US" sz="1700" dirty="0">
-                <a:solidFill>
-                  <a:srgbClr val="0E1C42"/>
-                </a:solidFill>
-                <a:latin typeface="Calibri" pitchFamily="34" charset="0"/>
-                <a:ea typeface="Calibri" pitchFamily="34" charset="-122"/>
-                <a:cs typeface="Calibri" pitchFamily="34" charset="-120"/>
-              </a:rPr>
-              <a:t>hopelessness   ·   thoughtfulness   ·   fearlessly   ·   impatiently   ·   darkness   ·   hopeful   ·   quickly   ·   disagree</a:t>
-            </a:r>
             <a:endParaRPr lang="en-US" sz="1700" dirty="0"/>
           </a:p>
         </p:txBody>
@@ -4053,8 +5088,8 @@
         </p:nvSpPr>
         <p:spPr>
           <a:xfrm>
-            <a:off x="365760" y="2514600"/>
-            <a:ext cx="8412480" cy="457200"/>
+            <a:off x="594360" y="1591056"/>
+            <a:ext cx="7955280" cy="402336"/>
           </a:xfrm>
           <a:prstGeom prst="rect">
             <a:avLst/>
@@ -4070,17 +5105,1129 @@
               <a:buNone/>
             </a:pPr>
             <a:r>
-              <a:rPr lang="en-US" sz="1500" i="1" dirty="0">
-                <a:solidFill>
-                  <a:srgbClr val="64748B"/>
-                </a:solidFill>
-                <a:latin typeface="Calibri" pitchFamily="34" charset="0"/>
-                <a:ea typeface="Calibri" pitchFamily="34" charset="-122"/>
-                <a:cs typeface="Calibri" pitchFamily="34" charset="-120"/>
-              </a:rPr>
-              <a:t>Which column does each word belong in?  Columns: Base + two endings  |  Base + one ending</a:t>
-            </a:r>
-            <a:endParaRPr lang="en-US" sz="1500" dirty="0"/>
+              <a:rPr lang="en-US" sz="1700" dirty="0">
+                <a:solidFill>
+                  <a:srgbClr val="1E293B"/>
+                </a:solidFill>
+                <a:latin typeface="Calibri" pitchFamily="34" charset="0"/>
+                <a:ea typeface="Calibri" pitchFamily="34" charset="-122"/>
+                <a:cs typeface="Calibri" pitchFamily="34" charset="-120"/>
+              </a:rPr>
+              <a:t>Please</a:t>
+            </a:r>
+            <a:pPr indent="0" marL="0">
+              <a:buNone/>
+            </a:pPr>
+            <a:r>
+              <a:rPr lang="en-US" sz="1700" dirty="0">
+                <a:solidFill>
+                  <a:srgbClr val="1E293B"/>
+                </a:solidFill>
+                <a:latin typeface="Calibri" pitchFamily="34" charset="0"/>
+                <a:ea typeface="Calibri" pitchFamily="34" charset="-122"/>
+                <a:cs typeface="Calibri" pitchFamily="34" charset="-120"/>
+              </a:rPr>
+              <a:t> </a:t>
+            </a:r>
+            <a:pPr indent="0" marL="0">
+              <a:buNone/>
+            </a:pPr>
+            <a:r>
+              <a:rPr lang="en-US" sz="1700" dirty="0">
+                <a:solidFill>
+                  <a:srgbClr val="1E293B"/>
+                </a:solidFill>
+                <a:latin typeface="Calibri" pitchFamily="34" charset="0"/>
+                <a:ea typeface="Calibri" pitchFamily="34" charset="-122"/>
+                <a:cs typeface="Calibri" pitchFamily="34" charset="-120"/>
+              </a:rPr>
+              <a:t>hand</a:t>
+            </a:r>
+            <a:pPr indent="0" marL="0">
+              <a:buNone/>
+            </a:pPr>
+            <a:r>
+              <a:rPr lang="en-US" sz="1700" dirty="0">
+                <a:solidFill>
+                  <a:srgbClr val="1E293B"/>
+                </a:solidFill>
+                <a:latin typeface="Calibri" pitchFamily="34" charset="0"/>
+                <a:ea typeface="Calibri" pitchFamily="34" charset="-122"/>
+                <a:cs typeface="Calibri" pitchFamily="34" charset="-120"/>
+              </a:rPr>
+              <a:t> </a:t>
+            </a:r>
+            <a:pPr indent="0" marL="0">
+              <a:buNone/>
+            </a:pPr>
+            <a:r>
+              <a:rPr lang="en-US" sz="1700" dirty="0">
+                <a:solidFill>
+                  <a:srgbClr val="1E293B"/>
+                </a:solidFill>
+                <a:latin typeface="Calibri" pitchFamily="34" charset="0"/>
+                <a:ea typeface="Calibri" pitchFamily="34" charset="-122"/>
+                <a:cs typeface="Calibri" pitchFamily="34" charset="-120"/>
+              </a:rPr>
+              <a:t>over</a:t>
+            </a:r>
+            <a:pPr indent="0" marL="0">
+              <a:buNone/>
+            </a:pPr>
+            <a:r>
+              <a:rPr lang="en-US" sz="1700" dirty="0">
+                <a:solidFill>
+                  <a:srgbClr val="1E293B"/>
+                </a:solidFill>
+                <a:latin typeface="Calibri" pitchFamily="34" charset="0"/>
+                <a:ea typeface="Calibri" pitchFamily="34" charset="-122"/>
+                <a:cs typeface="Calibri" pitchFamily="34" charset="-120"/>
+              </a:rPr>
+              <a:t> </a:t>
+            </a:r>
+            <a:pPr indent="0" marL="0">
+              <a:buNone/>
+            </a:pPr>
+            <a:r>
+              <a:rPr lang="en-US" sz="1700" dirty="0">
+                <a:solidFill>
+                  <a:srgbClr val="1E293B"/>
+                </a:solidFill>
+                <a:latin typeface="Calibri" pitchFamily="34" charset="0"/>
+                <a:ea typeface="Calibri" pitchFamily="34" charset="-122"/>
+                <a:cs typeface="Calibri" pitchFamily="34" charset="-120"/>
+              </a:rPr>
+              <a:t>your</a:t>
+            </a:r>
+            <a:pPr indent="0" marL="0">
+              <a:buNone/>
+            </a:pPr>
+            <a:r>
+              <a:rPr lang="en-US" sz="1700" dirty="0">
+                <a:solidFill>
+                  <a:srgbClr val="1E293B"/>
+                </a:solidFill>
+                <a:latin typeface="Calibri" pitchFamily="34" charset="0"/>
+                <a:ea typeface="Calibri" pitchFamily="34" charset="-122"/>
+                <a:cs typeface="Calibri" pitchFamily="34" charset="-120"/>
+              </a:rPr>
+              <a:t> </a:t>
+            </a:r>
+            <a:pPr indent="0" marL="0">
+              <a:buNone/>
+            </a:pPr>
+            <a:r>
+              <a:rPr lang="en-US" sz="1700" dirty="0">
+                <a:solidFill>
+                  <a:srgbClr val="1E293B"/>
+                </a:solidFill>
+                <a:latin typeface="Calibri" pitchFamily="34" charset="0"/>
+                <a:ea typeface="Calibri" pitchFamily="34" charset="-122"/>
+                <a:cs typeface="Calibri" pitchFamily="34" charset="-120"/>
+              </a:rPr>
+              <a:t>spoons,</a:t>
+            </a:r>
+            <a:pPr indent="0" marL="0">
+              <a:buNone/>
+            </a:pPr>
+            <a:r>
+              <a:rPr lang="en-US" sz="1700" dirty="0">
+                <a:solidFill>
+                  <a:srgbClr val="1E293B"/>
+                </a:solidFill>
+                <a:latin typeface="Calibri" pitchFamily="34" charset="0"/>
+                <a:ea typeface="Calibri" pitchFamily="34" charset="-122"/>
+                <a:cs typeface="Calibri" pitchFamily="34" charset="-120"/>
+              </a:rPr>
+              <a:t> </a:t>
+            </a:r>
+            <a:pPr indent="0" marL="0">
+              <a:buNone/>
+            </a:pPr>
+            <a:r>
+              <a:rPr lang="en-US" sz="1700" dirty="0">
+                <a:solidFill>
+                  <a:srgbClr val="1E293B"/>
+                </a:solidFill>
+                <a:latin typeface="Calibri" pitchFamily="34" charset="0"/>
+                <a:ea typeface="Calibri" pitchFamily="34" charset="-122"/>
+                <a:cs typeface="Calibri" pitchFamily="34" charset="-120"/>
+              </a:rPr>
+              <a:t>your</a:t>
+            </a:r>
+            <a:pPr indent="0" marL="0">
+              <a:buNone/>
+            </a:pPr>
+            <a:r>
+              <a:rPr lang="en-US" sz="1700" dirty="0">
+                <a:solidFill>
+                  <a:srgbClr val="1E293B"/>
+                </a:solidFill>
+                <a:latin typeface="Calibri" pitchFamily="34" charset="0"/>
+                <a:ea typeface="Calibri" pitchFamily="34" charset="-122"/>
+                <a:cs typeface="Calibri" pitchFamily="34" charset="-120"/>
+              </a:rPr>
+              <a:t> </a:t>
+            </a:r>
+            <a:pPr indent="0" marL="0">
+              <a:buNone/>
+            </a:pPr>
+            <a:r>
+              <a:rPr lang="en-US" sz="1700" dirty="0">
+                <a:solidFill>
+                  <a:srgbClr val="1E293B"/>
+                </a:solidFill>
+                <a:latin typeface="Calibri" pitchFamily="34" charset="0"/>
+                <a:ea typeface="Calibri" pitchFamily="34" charset="-122"/>
+                <a:cs typeface="Calibri" pitchFamily="34" charset="-120"/>
+              </a:rPr>
+              <a:t>bowls,</a:t>
+            </a:r>
+            <a:pPr indent="0" marL="0">
+              <a:buNone/>
+            </a:pPr>
+            <a:r>
+              <a:rPr lang="en-US" sz="1700" dirty="0">
+                <a:solidFill>
+                  <a:srgbClr val="1E293B"/>
+                </a:solidFill>
+                <a:latin typeface="Calibri" pitchFamily="34" charset="0"/>
+                <a:ea typeface="Calibri" pitchFamily="34" charset="-122"/>
+                <a:cs typeface="Calibri" pitchFamily="34" charset="-120"/>
+              </a:rPr>
+              <a:t> </a:t>
+            </a:r>
+            <a:pPr indent="0" marL="0">
+              <a:buNone/>
+            </a:pPr>
+            <a:r>
+              <a:rPr lang="en-US" sz="1700" dirty="0">
+                <a:solidFill>
+                  <a:srgbClr val="1E293B"/>
+                </a:solidFill>
+                <a:latin typeface="Calibri" pitchFamily="34" charset="0"/>
+                <a:ea typeface="Calibri" pitchFamily="34" charset="-122"/>
+                <a:cs typeface="Calibri" pitchFamily="34" charset="-120"/>
+              </a:rPr>
+              <a:t>and</a:t>
+            </a:r>
+            <a:pPr indent="0" marL="0">
+              <a:buNone/>
+            </a:pPr>
+            <a:r>
+              <a:rPr lang="en-US" sz="1700" dirty="0">
+                <a:solidFill>
+                  <a:srgbClr val="1E293B"/>
+                </a:solidFill>
+                <a:latin typeface="Calibri" pitchFamily="34" charset="0"/>
+                <a:ea typeface="Calibri" pitchFamily="34" charset="-122"/>
+                <a:cs typeface="Calibri" pitchFamily="34" charset="-120"/>
+              </a:rPr>
+              <a:t> </a:t>
+            </a:r>
+            <a:pPr indent="0" marL="0">
+              <a:buNone/>
+            </a:pPr>
+            <a:r>
+              <a:rPr lang="en-US" sz="1700" dirty="0">
+                <a:solidFill>
+                  <a:srgbClr val="1E293B"/>
+                </a:solidFill>
+                <a:latin typeface="Calibri" pitchFamily="34" charset="0"/>
+                <a:ea typeface="Calibri" pitchFamily="34" charset="-122"/>
+                <a:cs typeface="Calibri" pitchFamily="34" charset="-120"/>
+              </a:rPr>
+              <a:t>your</a:t>
+            </a:r>
+            <a:pPr indent="0" marL="0">
+              <a:buNone/>
+            </a:pPr>
+            <a:r>
+              <a:rPr lang="en-US" sz="1700" dirty="0">
+                <a:solidFill>
+                  <a:srgbClr val="1E293B"/>
+                </a:solidFill>
+                <a:latin typeface="Calibri" pitchFamily="34" charset="0"/>
+                <a:ea typeface="Calibri" pitchFamily="34" charset="-122"/>
+                <a:cs typeface="Calibri" pitchFamily="34" charset="-120"/>
+              </a:rPr>
+              <a:t> </a:t>
+            </a:r>
+            <a:pPr indent="0" marL="0">
+              <a:buNone/>
+            </a:pPr>
+            <a:r>
+              <a:rPr lang="en-US" sz="1700" dirty="0">
+                <a:solidFill>
+                  <a:srgbClr val="1E293B"/>
+                </a:solidFill>
+                <a:latin typeface="Calibri" pitchFamily="34" charset="0"/>
+                <a:ea typeface="Calibri" pitchFamily="34" charset="-122"/>
+                <a:cs typeface="Calibri" pitchFamily="34" charset="-120"/>
+              </a:rPr>
+              <a:t>kettle.</a:t>
+            </a:r>
+            <a:endParaRPr lang="en-US" sz="1700" dirty="0"/>
+          </a:p>
+        </p:txBody>
+      </p:sp>
+      <p:sp>
+        <p:nvSpPr>
+          <p:cNvPr id="9" name="Shape 7"/>
+          <p:cNvSpPr/>
+          <p:nvPr/>
+        </p:nvSpPr>
+        <p:spPr>
+          <a:xfrm>
+            <a:off x="365760" y="2212848"/>
+            <a:ext cx="8412480" cy="658368"/>
+          </a:xfrm>
+          <a:prstGeom prst="roundRect">
+            <a:avLst>
+              <a:gd name="adj" fmla="val 13889"/>
+            </a:avLst>
+          </a:prstGeom>
+          <a:solidFill>
+            <a:srgbClr val="FFFFFF"/>
+          </a:solidFill>
+          <a:ln w="19050">
+            <a:solidFill>
+              <a:srgbClr val="C7922C"/>
+            </a:solidFill>
+            <a:prstDash val="solid"/>
+          </a:ln>
+          <a:effectLst>
+            <a:outerShdw sx="100000" sy="100000" kx="0" ky="0" algn="bl" rotWithShape="0" blurRad="101600" dist="38100" dir="2700000">
+              <a:srgbClr val="000000">
+                <a:alpha val="12000"/>
+              </a:srgbClr>
+            </a:outerShdw>
+          </a:effectLst>
+        </p:spPr>
+      </p:sp>
+      <p:sp>
+        <p:nvSpPr>
+          <p:cNvPr id="10" name="Text 8"/>
+          <p:cNvSpPr/>
+          <p:nvPr/>
+        </p:nvSpPr>
+        <p:spPr>
+          <a:xfrm>
+            <a:off x="594360" y="2340864"/>
+            <a:ext cx="7955280" cy="402336"/>
+          </a:xfrm>
+          <a:prstGeom prst="rect">
+            <a:avLst/>
+          </a:prstGeom>
+          <a:noFill/>
+          <a:ln/>
+        </p:spPr>
+        <p:txBody>
+          <a:bodyPr wrap="square" lIns="0" tIns="0" rIns="0" bIns="0" rtlCol="0" anchor="ctr"/>
+          <a:lstStyle/>
+          <a:p>
+            <a:pPr indent="0" marL="0">
+              <a:buNone/>
+            </a:pPr>
+            <a:endParaRPr lang="en-US" sz="1700" dirty="0"/>
+          </a:p>
+        </p:txBody>
+      </p:sp>
+      <p:sp>
+        <p:nvSpPr>
+          <p:cNvPr id="11" name="Text 9"/>
+          <p:cNvSpPr/>
+          <p:nvPr/>
+        </p:nvSpPr>
+        <p:spPr>
+          <a:xfrm>
+            <a:off x="594360" y="2340864"/>
+            <a:ext cx="7955280" cy="402336"/>
+          </a:xfrm>
+          <a:prstGeom prst="rect">
+            <a:avLst/>
+          </a:prstGeom>
+          <a:noFill/>
+          <a:ln/>
+        </p:spPr>
+        <p:txBody>
+          <a:bodyPr wrap="square" lIns="0" tIns="0" rIns="0" bIns="0" rtlCol="0" anchor="ctr"/>
+          <a:lstStyle/>
+          <a:p>
+            <a:pPr indent="0" marL="0">
+              <a:buNone/>
+            </a:pPr>
+            <a:r>
+              <a:rPr lang="en-US" sz="1700" dirty="0">
+                <a:solidFill>
+                  <a:srgbClr val="1E293B"/>
+                </a:solidFill>
+                <a:latin typeface="Calibri" pitchFamily="34" charset="0"/>
+                <a:ea typeface="Calibri" pitchFamily="34" charset="-122"/>
+                <a:cs typeface="Calibri" pitchFamily="34" charset="-120"/>
+              </a:rPr>
+              <a:t>He</a:t>
+            </a:r>
+            <a:pPr indent="0" marL="0">
+              <a:buNone/>
+            </a:pPr>
+            <a:r>
+              <a:rPr lang="en-US" sz="1700" dirty="0">
+                <a:solidFill>
+                  <a:srgbClr val="1E293B"/>
+                </a:solidFill>
+                <a:latin typeface="Calibri" pitchFamily="34" charset="0"/>
+                <a:ea typeface="Calibri" pitchFamily="34" charset="-122"/>
+                <a:cs typeface="Calibri" pitchFamily="34" charset="-120"/>
+              </a:rPr>
+              <a:t> </a:t>
+            </a:r>
+            <a:pPr indent="0" marL="0">
+              <a:buNone/>
+            </a:pPr>
+            <a:r>
+              <a:rPr lang="en-US" sz="1700" dirty="0">
+                <a:solidFill>
+                  <a:srgbClr val="1E293B"/>
+                </a:solidFill>
+                <a:latin typeface="Calibri" pitchFamily="34" charset="0"/>
+                <a:ea typeface="Calibri" pitchFamily="34" charset="-122"/>
+                <a:cs typeface="Calibri" pitchFamily="34" charset="-120"/>
+              </a:rPr>
+              <a:t>saw</a:t>
+            </a:r>
+            <a:pPr indent="0" marL="0">
+              <a:buNone/>
+            </a:pPr>
+            <a:r>
+              <a:rPr lang="en-US" sz="1700" dirty="0">
+                <a:solidFill>
+                  <a:srgbClr val="1E293B"/>
+                </a:solidFill>
+                <a:latin typeface="Calibri" pitchFamily="34" charset="0"/>
+                <a:ea typeface="Calibri" pitchFamily="34" charset="-122"/>
+                <a:cs typeface="Calibri" pitchFamily="34" charset="-120"/>
+              </a:rPr>
+              <a:t> </a:t>
+            </a:r>
+            <a:pPr indent="0" marL="0">
+              <a:buNone/>
+            </a:pPr>
+            <a:r>
+              <a:rPr lang="en-US" sz="1700" dirty="0">
+                <a:solidFill>
+                  <a:srgbClr val="1E293B"/>
+                </a:solidFill>
+                <a:latin typeface="Calibri" pitchFamily="34" charset="0"/>
+                <a:ea typeface="Calibri" pitchFamily="34" charset="-122"/>
+                <a:cs typeface="Calibri" pitchFamily="34" charset="-120"/>
+              </a:rPr>
+              <a:t>that</a:t>
+            </a:r>
+            <a:pPr indent="0" marL="0">
+              <a:buNone/>
+            </a:pPr>
+            <a:r>
+              <a:rPr lang="en-US" sz="1700" dirty="0">
+                <a:solidFill>
+                  <a:srgbClr val="1E293B"/>
+                </a:solidFill>
+                <a:latin typeface="Calibri" pitchFamily="34" charset="0"/>
+                <a:ea typeface="Calibri" pitchFamily="34" charset="-122"/>
+                <a:cs typeface="Calibri" pitchFamily="34" charset="-120"/>
+              </a:rPr>
+              <a:t> </a:t>
+            </a:r>
+            <a:pPr indent="0" marL="0">
+              <a:buNone/>
+            </a:pPr>
+            <a:r>
+              <a:rPr lang="en-US" sz="1700" dirty="0">
+                <a:solidFill>
+                  <a:srgbClr val="1E293B"/>
+                </a:solidFill>
+                <a:latin typeface="Calibri" pitchFamily="34" charset="0"/>
+                <a:ea typeface="Calibri" pitchFamily="34" charset="-122"/>
+                <a:cs typeface="Calibri" pitchFamily="34" charset="-120"/>
+              </a:rPr>
+              <a:t>the</a:t>
+            </a:r>
+            <a:pPr indent="0" marL="0">
+              <a:buNone/>
+            </a:pPr>
+            <a:r>
+              <a:rPr lang="en-US" sz="1700" dirty="0">
+                <a:solidFill>
+                  <a:srgbClr val="1E293B"/>
+                </a:solidFill>
+                <a:latin typeface="Calibri" pitchFamily="34" charset="0"/>
+                <a:ea typeface="Calibri" pitchFamily="34" charset="-122"/>
+                <a:cs typeface="Calibri" pitchFamily="34" charset="-120"/>
+              </a:rPr>
+              <a:t> </a:t>
+            </a:r>
+            <a:pPr indent="0" marL="0">
+              <a:buNone/>
+            </a:pPr>
+            <a:r>
+              <a:rPr lang="en-US" sz="1700" dirty="0">
+                <a:solidFill>
+                  <a:srgbClr val="1E293B"/>
+                </a:solidFill>
+                <a:latin typeface="Calibri" pitchFamily="34" charset="0"/>
+                <a:ea typeface="Calibri" pitchFamily="34" charset="-122"/>
+                <a:cs typeface="Calibri" pitchFamily="34" charset="-120"/>
+              </a:rPr>
+              <a:t>floor</a:t>
+            </a:r>
+            <a:pPr indent="0" marL="0">
+              <a:buNone/>
+            </a:pPr>
+            <a:r>
+              <a:rPr lang="en-US" sz="1700" dirty="0">
+                <a:solidFill>
+                  <a:srgbClr val="1E293B"/>
+                </a:solidFill>
+                <a:latin typeface="Calibri" pitchFamily="34" charset="0"/>
+                <a:ea typeface="Calibri" pitchFamily="34" charset="-122"/>
+                <a:cs typeface="Calibri" pitchFamily="34" charset="-120"/>
+              </a:rPr>
+              <a:t> </a:t>
+            </a:r>
+            <a:pPr indent="0" marL="0">
+              <a:buNone/>
+            </a:pPr>
+            <a:r>
+              <a:rPr lang="en-US" sz="1700" dirty="0">
+                <a:solidFill>
+                  <a:srgbClr val="1E293B"/>
+                </a:solidFill>
+                <a:latin typeface="Calibri" pitchFamily="34" charset="0"/>
+                <a:ea typeface="Calibri" pitchFamily="34" charset="-122"/>
+                <a:cs typeface="Calibri" pitchFamily="34" charset="-120"/>
+              </a:rPr>
+              <a:t>of</a:t>
+            </a:r>
+            <a:pPr indent="0" marL="0">
+              <a:buNone/>
+            </a:pPr>
+            <a:r>
+              <a:rPr lang="en-US" sz="1700" dirty="0">
+                <a:solidFill>
+                  <a:srgbClr val="1E293B"/>
+                </a:solidFill>
+                <a:latin typeface="Calibri" pitchFamily="34" charset="0"/>
+                <a:ea typeface="Calibri" pitchFamily="34" charset="-122"/>
+                <a:cs typeface="Calibri" pitchFamily="34" charset="-120"/>
+              </a:rPr>
+              <a:t> </a:t>
+            </a:r>
+            <a:pPr indent="0" marL="0">
+              <a:buNone/>
+            </a:pPr>
+            <a:r>
+              <a:rPr lang="en-US" sz="1700" dirty="0">
+                <a:solidFill>
+                  <a:srgbClr val="1E293B"/>
+                </a:solidFill>
+                <a:latin typeface="Calibri" pitchFamily="34" charset="0"/>
+                <a:ea typeface="Calibri" pitchFamily="34" charset="-122"/>
+                <a:cs typeface="Calibri" pitchFamily="34" charset="-120"/>
+              </a:rPr>
+              <a:t>the</a:t>
+            </a:r>
+            <a:pPr indent="0" marL="0">
+              <a:buNone/>
+            </a:pPr>
+            <a:r>
+              <a:rPr lang="en-US" sz="1700" dirty="0">
+                <a:solidFill>
+                  <a:srgbClr val="1E293B"/>
+                </a:solidFill>
+                <a:latin typeface="Calibri" pitchFamily="34" charset="0"/>
+                <a:ea typeface="Calibri" pitchFamily="34" charset="-122"/>
+                <a:cs typeface="Calibri" pitchFamily="34" charset="-120"/>
+              </a:rPr>
+              <a:t> </a:t>
+            </a:r>
+            <a:pPr indent="0" marL="0">
+              <a:buNone/>
+            </a:pPr>
+            <a:r>
+              <a:rPr lang="en-US" sz="1700" dirty="0">
+                <a:solidFill>
+                  <a:srgbClr val="1E293B"/>
+                </a:solidFill>
+                <a:latin typeface="Calibri" pitchFamily="34" charset="0"/>
+                <a:ea typeface="Calibri" pitchFamily="34" charset="-122"/>
+                <a:cs typeface="Calibri" pitchFamily="34" charset="-120"/>
+              </a:rPr>
+              <a:t>dungeon</a:t>
+            </a:r>
+            <a:pPr indent="0" marL="0">
+              <a:buNone/>
+            </a:pPr>
+            <a:r>
+              <a:rPr lang="en-US" sz="1700" dirty="0">
+                <a:solidFill>
+                  <a:srgbClr val="1E293B"/>
+                </a:solidFill>
+                <a:latin typeface="Calibri" pitchFamily="34" charset="0"/>
+                <a:ea typeface="Calibri" pitchFamily="34" charset="-122"/>
+                <a:cs typeface="Calibri" pitchFamily="34" charset="-120"/>
+              </a:rPr>
+              <a:t> </a:t>
+            </a:r>
+            <a:pPr indent="0" marL="0">
+              <a:buNone/>
+            </a:pPr>
+            <a:r>
+              <a:rPr lang="en-US" sz="1700" dirty="0">
+                <a:solidFill>
+                  <a:srgbClr val="1E293B"/>
+                </a:solidFill>
+                <a:latin typeface="Calibri" pitchFamily="34" charset="0"/>
+                <a:ea typeface="Calibri" pitchFamily="34" charset="-122"/>
+                <a:cs typeface="Calibri" pitchFamily="34" charset="-120"/>
+              </a:rPr>
+              <a:t>was</a:t>
+            </a:r>
+            <a:pPr indent="0" marL="0">
+              <a:buNone/>
+            </a:pPr>
+            <a:r>
+              <a:rPr lang="en-US" sz="1700" dirty="0">
+                <a:solidFill>
+                  <a:srgbClr val="1E293B"/>
+                </a:solidFill>
+                <a:latin typeface="Calibri" pitchFamily="34" charset="0"/>
+                <a:ea typeface="Calibri" pitchFamily="34" charset="-122"/>
+                <a:cs typeface="Calibri" pitchFamily="34" charset="-120"/>
+              </a:rPr>
+              <a:t> </a:t>
+            </a:r>
+            <a:pPr indent="0" marL="0">
+              <a:buNone/>
+            </a:pPr>
+            <a:r>
+              <a:rPr lang="en-US" sz="1700" dirty="0">
+                <a:solidFill>
+                  <a:srgbClr val="1E293B"/>
+                </a:solidFill>
+                <a:latin typeface="Calibri" pitchFamily="34" charset="0"/>
+                <a:ea typeface="Calibri" pitchFamily="34" charset="-122"/>
+                <a:cs typeface="Calibri" pitchFamily="34" charset="-120"/>
+              </a:rPr>
+              <a:t>littered</a:t>
+            </a:r>
+            <a:pPr indent="0" marL="0">
+              <a:buNone/>
+            </a:pPr>
+            <a:r>
+              <a:rPr lang="en-US" sz="1700" dirty="0">
+                <a:solidFill>
+                  <a:srgbClr val="1E293B"/>
+                </a:solidFill>
+                <a:latin typeface="Calibri" pitchFamily="34" charset="0"/>
+                <a:ea typeface="Calibri" pitchFamily="34" charset="-122"/>
+                <a:cs typeface="Calibri" pitchFamily="34" charset="-120"/>
+              </a:rPr>
+              <a:t> </a:t>
+            </a:r>
+            <a:pPr indent="0" marL="0">
+              <a:buNone/>
+            </a:pPr>
+            <a:r>
+              <a:rPr lang="en-US" sz="1700" dirty="0">
+                <a:solidFill>
+                  <a:srgbClr val="1E293B"/>
+                </a:solidFill>
+                <a:latin typeface="Calibri" pitchFamily="34" charset="0"/>
+                <a:ea typeface="Calibri" pitchFamily="34" charset="-122"/>
+                <a:cs typeface="Calibri" pitchFamily="34" charset="-120"/>
+              </a:rPr>
+              <a:t>with</a:t>
+            </a:r>
+            <a:pPr indent="0" marL="0">
+              <a:buNone/>
+            </a:pPr>
+            <a:r>
+              <a:rPr lang="en-US" sz="1700" dirty="0">
+                <a:solidFill>
+                  <a:srgbClr val="1E293B"/>
+                </a:solidFill>
+                <a:latin typeface="Calibri" pitchFamily="34" charset="0"/>
+                <a:ea typeface="Calibri" pitchFamily="34" charset="-122"/>
+                <a:cs typeface="Calibri" pitchFamily="34" charset="-120"/>
+              </a:rPr>
+              <a:t> </a:t>
+            </a:r>
+            <a:pPr indent="0" marL="0">
+              <a:buNone/>
+            </a:pPr>
+            <a:r>
+              <a:rPr lang="en-US" sz="1700" dirty="0">
+                <a:solidFill>
+                  <a:srgbClr val="1E293B"/>
+                </a:solidFill>
+                <a:latin typeface="Calibri" pitchFamily="34" charset="0"/>
+                <a:ea typeface="Calibri" pitchFamily="34" charset="-122"/>
+                <a:cs typeface="Calibri" pitchFamily="34" charset="-120"/>
+              </a:rPr>
+              <a:t>tufts</a:t>
+            </a:r>
+            <a:pPr indent="0" marL="0">
+              <a:buNone/>
+            </a:pPr>
+            <a:r>
+              <a:rPr lang="en-US" sz="1700" dirty="0">
+                <a:solidFill>
+                  <a:srgbClr val="1E293B"/>
+                </a:solidFill>
+                <a:latin typeface="Calibri" pitchFamily="34" charset="0"/>
+                <a:ea typeface="Calibri" pitchFamily="34" charset="-122"/>
+                <a:cs typeface="Calibri" pitchFamily="34" charset="-120"/>
+              </a:rPr>
+              <a:t> </a:t>
+            </a:r>
+            <a:pPr indent="0" marL="0">
+              <a:buNone/>
+            </a:pPr>
+            <a:r>
+              <a:rPr lang="en-US" sz="1700" dirty="0">
+                <a:solidFill>
+                  <a:srgbClr val="1E293B"/>
+                </a:solidFill>
+                <a:latin typeface="Calibri" pitchFamily="34" charset="0"/>
+                <a:ea typeface="Calibri" pitchFamily="34" charset="-122"/>
+                <a:cs typeface="Calibri" pitchFamily="34" charset="-120"/>
+              </a:rPr>
+              <a:t>of</a:t>
+            </a:r>
+            <a:pPr indent="0" marL="0">
+              <a:buNone/>
+            </a:pPr>
+            <a:r>
+              <a:rPr lang="en-US" sz="1700" dirty="0">
+                <a:solidFill>
+                  <a:srgbClr val="1E293B"/>
+                </a:solidFill>
+                <a:latin typeface="Calibri" pitchFamily="34" charset="0"/>
+                <a:ea typeface="Calibri" pitchFamily="34" charset="-122"/>
+                <a:cs typeface="Calibri" pitchFamily="34" charset="-120"/>
+              </a:rPr>
+              <a:t> </a:t>
+            </a:r>
+            <a:pPr indent="0" marL="0">
+              <a:buNone/>
+            </a:pPr>
+            <a:r>
+              <a:rPr lang="en-US" sz="1700" dirty="0">
+                <a:solidFill>
+                  <a:srgbClr val="1E293B"/>
+                </a:solidFill>
+                <a:latin typeface="Calibri" pitchFamily="34" charset="0"/>
+                <a:ea typeface="Calibri" pitchFamily="34" charset="-122"/>
+                <a:cs typeface="Calibri" pitchFamily="34" charset="-120"/>
+              </a:rPr>
+              <a:t>fur,</a:t>
+            </a:r>
+            <a:pPr indent="0" marL="0">
+              <a:buNone/>
+            </a:pPr>
+            <a:r>
+              <a:rPr lang="en-US" sz="1700" dirty="0">
+                <a:solidFill>
+                  <a:srgbClr val="1E293B"/>
+                </a:solidFill>
+                <a:latin typeface="Calibri" pitchFamily="34" charset="0"/>
+                <a:ea typeface="Calibri" pitchFamily="34" charset="-122"/>
+                <a:cs typeface="Calibri" pitchFamily="34" charset="-120"/>
+              </a:rPr>
+              <a:t> </a:t>
+            </a:r>
+            <a:pPr indent="0" marL="0">
+              <a:buNone/>
+            </a:pPr>
+            <a:r>
+              <a:rPr lang="en-US" sz="1700" dirty="0">
+                <a:solidFill>
+                  <a:srgbClr val="1E293B"/>
+                </a:solidFill>
+                <a:latin typeface="Calibri" pitchFamily="34" charset="0"/>
+                <a:ea typeface="Calibri" pitchFamily="34" charset="-122"/>
+                <a:cs typeface="Calibri" pitchFamily="34" charset="-120"/>
+              </a:rPr>
+              <a:t>knots</a:t>
+            </a:r>
+            <a:pPr indent="0" marL="0">
+              <a:buNone/>
+            </a:pPr>
+            <a:r>
+              <a:rPr lang="en-US" sz="1700" dirty="0">
+                <a:solidFill>
+                  <a:srgbClr val="1E293B"/>
+                </a:solidFill>
+                <a:latin typeface="Calibri" pitchFamily="34" charset="0"/>
+                <a:ea typeface="Calibri" pitchFamily="34" charset="-122"/>
+                <a:cs typeface="Calibri" pitchFamily="34" charset="-120"/>
+              </a:rPr>
+              <a:t> </a:t>
+            </a:r>
+            <a:pPr indent="0" marL="0">
+              <a:buNone/>
+            </a:pPr>
+            <a:r>
+              <a:rPr lang="en-US" sz="1700" dirty="0">
+                <a:solidFill>
+                  <a:srgbClr val="1E293B"/>
+                </a:solidFill>
+                <a:latin typeface="Calibri" pitchFamily="34" charset="0"/>
+                <a:ea typeface="Calibri" pitchFamily="34" charset="-122"/>
+                <a:cs typeface="Calibri" pitchFamily="34" charset="-120"/>
+              </a:rPr>
+              <a:t>of</a:t>
+            </a:r>
+            <a:pPr indent="0" marL="0">
+              <a:buNone/>
+            </a:pPr>
+            <a:r>
+              <a:rPr lang="en-US" sz="1700" dirty="0">
+                <a:solidFill>
+                  <a:srgbClr val="1E293B"/>
+                </a:solidFill>
+                <a:latin typeface="Calibri" pitchFamily="34" charset="0"/>
+                <a:ea typeface="Calibri" pitchFamily="34" charset="-122"/>
+                <a:cs typeface="Calibri" pitchFamily="34" charset="-120"/>
+              </a:rPr>
+              <a:t> </a:t>
+            </a:r>
+            <a:pPr indent="0" marL="0">
+              <a:buNone/>
+            </a:pPr>
+            <a:r>
+              <a:rPr lang="en-US" sz="1700" dirty="0">
+                <a:solidFill>
+                  <a:srgbClr val="1E293B"/>
+                </a:solidFill>
+                <a:latin typeface="Calibri" pitchFamily="34" charset="0"/>
+                <a:ea typeface="Calibri" pitchFamily="34" charset="-122"/>
+                <a:cs typeface="Calibri" pitchFamily="34" charset="-120"/>
+              </a:rPr>
+              <a:t>red</a:t>
+            </a:r>
+            <a:pPr indent="0" marL="0">
+              <a:buNone/>
+            </a:pPr>
+            <a:r>
+              <a:rPr lang="en-US" sz="1700" dirty="0">
+                <a:solidFill>
+                  <a:srgbClr val="1E293B"/>
+                </a:solidFill>
+                <a:latin typeface="Calibri" pitchFamily="34" charset="0"/>
+                <a:ea typeface="Calibri" pitchFamily="34" charset="-122"/>
+                <a:cs typeface="Calibri" pitchFamily="34" charset="-120"/>
+              </a:rPr>
+              <a:t> </a:t>
+            </a:r>
+            <a:pPr indent="0" marL="0">
+              <a:buNone/>
+            </a:pPr>
+            <a:r>
+              <a:rPr lang="en-US" sz="1700" dirty="0">
+                <a:solidFill>
+                  <a:srgbClr val="1E293B"/>
+                </a:solidFill>
+                <a:latin typeface="Calibri" pitchFamily="34" charset="0"/>
+                <a:ea typeface="Calibri" pitchFamily="34" charset="-122"/>
+                <a:cs typeface="Calibri" pitchFamily="34" charset="-120"/>
+              </a:rPr>
+              <a:t>thread,</a:t>
+            </a:r>
+            <a:pPr indent="0" marL="0">
+              <a:buNone/>
+            </a:pPr>
+            <a:r>
+              <a:rPr lang="en-US" sz="1700" dirty="0">
+                <a:solidFill>
+                  <a:srgbClr val="1E293B"/>
+                </a:solidFill>
+                <a:latin typeface="Calibri" pitchFamily="34" charset="0"/>
+                <a:ea typeface="Calibri" pitchFamily="34" charset="-122"/>
+                <a:cs typeface="Calibri" pitchFamily="34" charset="-120"/>
+              </a:rPr>
+              <a:t> </a:t>
+            </a:r>
+            <a:pPr indent="0" marL="0">
+              <a:buNone/>
+            </a:pPr>
+            <a:r>
+              <a:rPr lang="en-US" sz="1700" dirty="0">
+                <a:solidFill>
+                  <a:srgbClr val="1E293B"/>
+                </a:solidFill>
+                <a:latin typeface="Calibri" pitchFamily="34" charset="0"/>
+                <a:ea typeface="Calibri" pitchFamily="34" charset="-122"/>
+                <a:cs typeface="Calibri" pitchFamily="34" charset="-120"/>
+              </a:rPr>
+              <a:t>and</a:t>
+            </a:r>
+            <a:pPr indent="0" marL="0">
+              <a:buNone/>
+            </a:pPr>
+            <a:r>
+              <a:rPr lang="en-US" sz="1700" dirty="0">
+                <a:solidFill>
+                  <a:srgbClr val="1E293B"/>
+                </a:solidFill>
+                <a:latin typeface="Calibri" pitchFamily="34" charset="0"/>
+                <a:ea typeface="Calibri" pitchFamily="34" charset="-122"/>
+                <a:cs typeface="Calibri" pitchFamily="34" charset="-120"/>
+              </a:rPr>
+              <a:t> </a:t>
+            </a:r>
+            <a:pPr indent="0" marL="0">
+              <a:buNone/>
+            </a:pPr>
+            <a:r>
+              <a:rPr lang="en-US" sz="1700" dirty="0">
+                <a:solidFill>
+                  <a:srgbClr val="1E293B"/>
+                </a:solidFill>
+                <a:latin typeface="Calibri" pitchFamily="34" charset="0"/>
+                <a:ea typeface="Calibri" pitchFamily="34" charset="-122"/>
+                <a:cs typeface="Calibri" pitchFamily="34" charset="-120"/>
+              </a:rPr>
+              <a:t>the</a:t>
+            </a:r>
+            <a:pPr indent="0" marL="0">
+              <a:buNone/>
+            </a:pPr>
+            <a:r>
+              <a:rPr lang="en-US" sz="1700" dirty="0">
+                <a:solidFill>
+                  <a:srgbClr val="1E293B"/>
+                </a:solidFill>
+                <a:latin typeface="Calibri" pitchFamily="34" charset="0"/>
+                <a:ea typeface="Calibri" pitchFamily="34" charset="-122"/>
+                <a:cs typeface="Calibri" pitchFamily="34" charset="-120"/>
+              </a:rPr>
+              <a:t> </a:t>
+            </a:r>
+            <a:pPr indent="0" marL="0">
+              <a:buNone/>
+            </a:pPr>
+            <a:r>
+              <a:rPr lang="en-US" sz="1700" dirty="0">
+                <a:solidFill>
+                  <a:srgbClr val="1E293B"/>
+                </a:solidFill>
+                <a:latin typeface="Calibri" pitchFamily="34" charset="0"/>
+                <a:ea typeface="Calibri" pitchFamily="34" charset="-122"/>
+                <a:cs typeface="Calibri" pitchFamily="34" charset="-120"/>
+              </a:rPr>
+              <a:t>skeletons</a:t>
+            </a:r>
+            <a:pPr indent="0" marL="0">
+              <a:buNone/>
+            </a:pPr>
+            <a:r>
+              <a:rPr lang="en-US" sz="1700" dirty="0">
+                <a:solidFill>
+                  <a:srgbClr val="1E293B"/>
+                </a:solidFill>
+                <a:latin typeface="Calibri" pitchFamily="34" charset="0"/>
+                <a:ea typeface="Calibri" pitchFamily="34" charset="-122"/>
+                <a:cs typeface="Calibri" pitchFamily="34" charset="-120"/>
+              </a:rPr>
+              <a:t> </a:t>
+            </a:r>
+            <a:pPr indent="0" marL="0">
+              <a:buNone/>
+            </a:pPr>
+            <a:r>
+              <a:rPr lang="en-US" sz="1700" dirty="0">
+                <a:solidFill>
+                  <a:srgbClr val="1E293B"/>
+                </a:solidFill>
+                <a:latin typeface="Calibri" pitchFamily="34" charset="0"/>
+                <a:ea typeface="Calibri" pitchFamily="34" charset="-122"/>
+                <a:cs typeface="Calibri" pitchFamily="34" charset="-120"/>
+              </a:rPr>
+              <a:t>of</a:t>
+            </a:r>
+            <a:pPr indent="0" marL="0">
+              <a:buNone/>
+            </a:pPr>
+            <a:r>
+              <a:rPr lang="en-US" sz="1700" dirty="0">
+                <a:solidFill>
+                  <a:srgbClr val="1E293B"/>
+                </a:solidFill>
+                <a:latin typeface="Calibri" pitchFamily="34" charset="0"/>
+                <a:ea typeface="Calibri" pitchFamily="34" charset="-122"/>
+                <a:cs typeface="Calibri" pitchFamily="34" charset="-120"/>
+              </a:rPr>
+              <a:t> </a:t>
+            </a:r>
+            <a:pPr indent="0" marL="0">
+              <a:buNone/>
+            </a:pPr>
+            <a:r>
+              <a:rPr lang="en-US" sz="1700" dirty="0">
+                <a:solidFill>
+                  <a:srgbClr val="1E293B"/>
+                </a:solidFill>
+                <a:latin typeface="Calibri" pitchFamily="34" charset="0"/>
+                <a:ea typeface="Calibri" pitchFamily="34" charset="-122"/>
+                <a:cs typeface="Calibri" pitchFamily="34" charset="-120"/>
+              </a:rPr>
+              <a:t>mice.</a:t>
+            </a:r>
+            <a:endParaRPr lang="en-US" sz="1700" dirty="0"/>
+          </a:p>
+        </p:txBody>
+      </p:sp>
+      <p:sp>
+        <p:nvSpPr>
+          <p:cNvPr id="12" name="Shape 10"/>
+          <p:cNvSpPr/>
+          <p:nvPr/>
+        </p:nvSpPr>
+        <p:spPr>
+          <a:xfrm>
+            <a:off x="365760" y="3008376"/>
+            <a:ext cx="8412480" cy="1837944"/>
+          </a:xfrm>
+          <a:prstGeom prst="roundRect">
+            <a:avLst>
+              <a:gd name="adj" fmla="val 4975"/>
+            </a:avLst>
+          </a:prstGeom>
+          <a:solidFill>
+            <a:srgbClr val="E8F8EF"/>
+          </a:solidFill>
+          <a:ln/>
+          <a:effectLst>
+            <a:outerShdw sx="100000" sy="100000" kx="0" ky="0" algn="bl" rotWithShape="0" blurRad="101600" dist="38100" dir="2700000">
+              <a:srgbClr val="000000">
+                <a:alpha val="12000"/>
+              </a:srgbClr>
+            </a:outerShdw>
+          </a:effectLst>
+        </p:spPr>
+      </p:sp>
+      <p:sp>
+        <p:nvSpPr>
+          <p:cNvPr id="13" name="Text 11"/>
+          <p:cNvSpPr/>
+          <p:nvPr/>
+        </p:nvSpPr>
+        <p:spPr>
+          <a:xfrm>
+            <a:off x="566928" y="3072384"/>
+            <a:ext cx="8229600" cy="237744"/>
+          </a:xfrm>
+          <a:prstGeom prst="rect">
+            <a:avLst/>
+          </a:prstGeom>
+          <a:noFill/>
+          <a:ln/>
+        </p:spPr>
+        <p:txBody>
+          <a:bodyPr wrap="square" lIns="0" tIns="0" rIns="0" bIns="0" rtlCol="0" anchor="ctr"/>
+          <a:lstStyle/>
+          <a:p>
+            <a:pPr indent="0" marL="0">
+              <a:buNone/>
+            </a:pPr>
+            <a:r>
+              <a:rPr lang="en-US" sz="1100" b="1" spc="100" kern="0" dirty="0">
+                <a:solidFill>
+                  <a:srgbClr val="34B76F"/>
+                </a:solidFill>
+                <a:latin typeface="Calibri" pitchFamily="34" charset="0"/>
+                <a:ea typeface="Calibri" pitchFamily="34" charset="-122"/>
+                <a:cs typeface="Calibri" pitchFamily="34" charset="-120"/>
+              </a:rPr>
+              <a:t>✅  THE PATTERN</a:t>
+            </a:r>
+            <a:endParaRPr lang="en-US" sz="1100" dirty="0"/>
+          </a:p>
+        </p:txBody>
+      </p:sp>
+      <p:sp>
+        <p:nvSpPr>
+          <p:cNvPr id="14" name="Text 12"/>
+          <p:cNvSpPr/>
+          <p:nvPr/>
+        </p:nvSpPr>
+        <p:spPr>
+          <a:xfrm>
+            <a:off x="566928" y="3328416"/>
+            <a:ext cx="8010144" cy="1380744"/>
+          </a:xfrm>
+          <a:prstGeom prst="rect">
+            <a:avLst/>
+          </a:prstGeom>
+          <a:noFill/>
+          <a:ln/>
+        </p:spPr>
+        <p:txBody>
+          <a:bodyPr wrap="square" lIns="0" tIns="0" rIns="0" bIns="0" rtlCol="0" anchor="t">
+            <a:normAutofit/>
+          </a:bodyPr>
+          <a:lstStyle/>
+          <a:p>
+            <a:pPr indent="0" marL="0">
+              <a:buNone/>
+            </a:pPr>
+            <a:r>
+              <a:rPr lang="en-US" sz="1300" dirty="0">
+                <a:solidFill>
+                  <a:srgbClr val="1E293B"/>
+                </a:solidFill>
+                <a:latin typeface="Calibri" pitchFamily="34" charset="0"/>
+                <a:ea typeface="Calibri" pitchFamily="34" charset="-122"/>
+                <a:cs typeface="Calibri" pitchFamily="34" charset="-120"/>
+              </a:rPr>
+              <a:t>When you list three or more things, separate them with commas, and put and before the last one. The comma before and is optional in some styles — but be consistent.</a:t>
+            </a:r>
+            <a:endParaRPr lang="en-US" sz="1300" dirty="0"/>
+          </a:p>
+          <a:p>
+            <a:pPr indent="0" marL="0">
+              <a:buNone/>
+            </a:pPr>
+            <a:r>
+              <a:rPr lang="en-US" sz="1300" dirty="0">
+                <a:solidFill>
+                  <a:srgbClr val="1E293B"/>
+                </a:solidFill>
+                <a:latin typeface="Calibri" pitchFamily="34" charset="0"/>
+                <a:ea typeface="Calibri" pitchFamily="34" charset="-122"/>
+                <a:cs typeface="Calibri" pitchFamily="34" charset="-120"/>
+              </a:rPr>
+              <a:t>Three items, two commas, and and before the last.</a:t>
+            </a:r>
+            <a:endParaRPr lang="en-US" sz="1300" dirty="0"/>
+          </a:p>
+          <a:p>
+            <a:pPr indent="0" marL="0">
+              <a:buNone/>
+            </a:pPr>
+            <a:r>
+              <a:rPr lang="en-US" sz="1300" dirty="0">
+                <a:solidFill>
+                  <a:srgbClr val="1E293B"/>
+                </a:solidFill>
+                <a:latin typeface="Calibri" pitchFamily="34" charset="0"/>
+                <a:ea typeface="Calibri" pitchFamily="34" charset="-122"/>
+                <a:cs typeface="Calibri" pitchFamily="34" charset="-120"/>
+              </a:rPr>
+              <a:t>The same pattern, with longer items.</a:t>
+            </a:r>
+            <a:endParaRPr lang="en-US" sz="1300" dirty="0"/>
           </a:p>
         </p:txBody>
       </p:sp>
@@ -4131,7 +6278,7 @@
             <a:avLst/>
           </a:prstGeom>
           <a:solidFill>
-            <a:srgbClr val="0E1C42"/>
+            <a:srgbClr val="C7922C"/>
           </a:solidFill>
           <a:ln/>
         </p:spPr>
@@ -4169,7 +6316,7 @@
                 <a:ea typeface="Calibri" pitchFamily="34" charset="-122"/>
                 <a:cs typeface="Calibri" pitchFamily="34" charset="-120"/>
               </a:rPr>
-              <a:t>🔠  Spelling</a:t>
+              <a:t>✏️  Grammar — Your turn</a:t>
             </a:r>
             <a:endParaRPr lang="en-US" sz="2200" dirty="0"/>
           </a:p>
@@ -4183,7 +6330,7 @@
         </p:nvSpPr>
         <p:spPr>
           <a:xfrm>
-            <a:off x="365760" y="777240"/>
+            <a:off x="365760" y="749808"/>
             <a:ext cx="8229600" cy="237744"/>
           </a:xfrm>
           <a:prstGeom prst="rect">
@@ -4202,13 +6349,13 @@
             <a:r>
               <a:rPr lang="en-US" sz="1100" b="1" spc="100" kern="0" dirty="0">
                 <a:solidFill>
-                  <a:srgbClr val="0E1C42"/>
-                </a:solidFill>
-                <a:latin typeface="Calibri" pitchFamily="34" charset="0"/>
-                <a:ea typeface="Calibri" pitchFamily="34" charset="-122"/>
-                <a:cs typeface="Calibri" pitchFamily="34" charset="-120"/>
-              </a:rPr>
-              <a:t>LONGER WORDS WITH FAMILIAR SUFFIXES</a:t>
+                  <a:srgbClr val="C7922C"/>
+                </a:solidFill>
+                <a:latin typeface="Calibri" pitchFamily="34" charset="0"/>
+                <a:ea typeface="Calibri" pitchFamily="34" charset="-122"/>
+                <a:cs typeface="Calibri" pitchFamily="34" charset="-120"/>
+              </a:rPr>
+              <a:t>COMMAS IN A SERIES</a:t>
             </a:r>
             <a:endParaRPr lang="en-US" sz="1100" dirty="0"/>
           </a:p>
@@ -4222,79 +6369,23 @@
         </p:nvSpPr>
         <p:spPr>
           <a:xfrm>
-            <a:off x="411480" y="1078992"/>
-            <a:ext cx="4114800" cy="457200"/>
+            <a:off x="365760" y="1051560"/>
+            <a:ext cx="8412480" cy="914400"/>
           </a:xfrm>
           <a:prstGeom prst="roundRect">
             <a:avLst>
-              <a:gd name="adj" fmla="val 16000"/>
-            </a:avLst>
-          </a:prstGeom>
-          <a:solidFill>
-            <a:srgbClr val="0E1C42"/>
-          </a:solidFill>
-          <a:ln/>
-        </p:spPr>
-      </p:sp>
-      <p:sp>
-        <p:nvSpPr>
-          <p:cNvPr id="6" name="Text 4"/>
-          <p:cNvSpPr/>
-          <p:nvPr/>
-        </p:nvSpPr>
-        <p:spPr>
-          <a:xfrm>
-            <a:off x="457200" y="1133856"/>
-            <a:ext cx="4023360" cy="347472"/>
-          </a:xfrm>
-          <a:prstGeom prst="rect">
-            <a:avLst/>
-          </a:prstGeom>
-          <a:noFill/>
-          <a:ln/>
-        </p:spPr>
-        <p:txBody>
-          <a:bodyPr wrap="square" lIns="0" tIns="0" rIns="0" bIns="0" rtlCol="0" anchor="ctr"/>
-          <a:lstStyle/>
-          <a:p>
-            <a:pPr algn="ctr" indent="0" marL="0">
-              <a:buNone/>
-            </a:pPr>
-            <a:r>
-              <a:rPr lang="en-US" sz="1300" b="1" dirty="0">
-                <a:solidFill>
-                  <a:srgbClr val="FFFFFF"/>
-                </a:solidFill>
-                <a:latin typeface="Calibri" pitchFamily="34" charset="0"/>
-                <a:ea typeface="Calibri" pitchFamily="34" charset="-122"/>
-                <a:cs typeface="Calibri" pitchFamily="34" charset="-120"/>
-              </a:rPr>
-              <a:t>Base + two endings</a:t>
-            </a:r>
-            <a:endParaRPr lang="en-US" sz="1300" dirty="0"/>
-          </a:p>
-        </p:txBody>
-      </p:sp>
-      <p:sp>
-        <p:nvSpPr>
-          <p:cNvPr id="7" name="Shape 5"/>
-          <p:cNvSpPr/>
-          <p:nvPr/>
-        </p:nvSpPr>
-        <p:spPr>
-          <a:xfrm>
-            <a:off x="411480" y="1591056"/>
-            <a:ext cx="4114800" cy="2103120"/>
-          </a:xfrm>
-          <a:prstGeom prst="roundRect">
-            <a:avLst>
-              <a:gd name="adj" fmla="val 4348"/>
+              <a:gd name="adj" fmla="val 10000"/>
             </a:avLst>
           </a:prstGeom>
           <a:solidFill>
             <a:srgbClr val="FFFFFF"/>
           </a:solidFill>
-          <a:ln/>
+          <a:ln w="19050">
+            <a:solidFill>
+              <a:srgbClr val="C7922C"/>
+            </a:solidFill>
+            <a:prstDash val="solid"/>
+          </a:ln>
           <a:effectLst>
             <a:outerShdw sx="100000" sy="100000" kx="0" ky="0" algn="bl" rotWithShape="0" blurRad="101600" dist="38100" dir="2700000">
               <a:srgbClr val="000000">
@@ -4306,14 +6397,14 @@
       </p:sp>
       <p:sp>
         <p:nvSpPr>
-          <p:cNvPr id="8" name="Text 6"/>
-          <p:cNvSpPr/>
-          <p:nvPr/>
-        </p:nvSpPr>
-        <p:spPr>
-          <a:xfrm>
-            <a:off x="502920" y="1700784"/>
-            <a:ext cx="3931920" cy="1883664"/>
+          <p:cNvPr id="6" name="Text 4"/>
+          <p:cNvSpPr/>
+          <p:nvPr/>
+        </p:nvSpPr>
+        <p:spPr>
+          <a:xfrm>
+            <a:off x="594360" y="1179576"/>
+            <a:ext cx="7955280" cy="658368"/>
           </a:xfrm>
           <a:prstGeom prst="rect">
             <a:avLst/>
@@ -4325,107 +6416,34 @@
           <a:bodyPr wrap="square" lIns="0" tIns="0" rIns="0" bIns="0" rtlCol="0" anchor="ctr"/>
           <a:lstStyle/>
           <a:p>
-            <a:pPr algn="ctr" indent="0" marL="0">
-              <a:buNone/>
-            </a:pPr>
-            <a:r>
-              <a:rPr lang="en-US" sz="1400" dirty="0">
-                <a:solidFill>
-                  <a:srgbClr val="1E293B"/>
-                </a:solidFill>
-                <a:latin typeface="Calibri" pitchFamily="34" charset="0"/>
-                <a:ea typeface="Calibri" pitchFamily="34" charset="-122"/>
-                <a:cs typeface="Calibri" pitchFamily="34" charset="-120"/>
-              </a:rPr>
-              <a:t>hopelessness</a:t>
-            </a:r>
-            <a:endParaRPr lang="en-US" sz="1400" dirty="0"/>
-          </a:p>
-          <a:p>
-            <a:pPr algn="ctr" indent="0" marL="0">
-              <a:buNone/>
-            </a:pPr>
-            <a:r>
-              <a:rPr lang="en-US" sz="1400" dirty="0">
-                <a:solidFill>
-                  <a:srgbClr val="1E293B"/>
-                </a:solidFill>
-                <a:latin typeface="Calibri" pitchFamily="34" charset="0"/>
-                <a:ea typeface="Calibri" pitchFamily="34" charset="-122"/>
-                <a:cs typeface="Calibri" pitchFamily="34" charset="-120"/>
-              </a:rPr>
-              <a:t>thoughtfulness</a:t>
-            </a:r>
-            <a:endParaRPr lang="en-US" sz="1400" dirty="0"/>
-          </a:p>
-          <a:p>
-            <a:pPr algn="ctr" indent="0" marL="0">
-              <a:buNone/>
-            </a:pPr>
-            <a:r>
-              <a:rPr lang="en-US" sz="1400" dirty="0">
-                <a:solidFill>
-                  <a:srgbClr val="1E293B"/>
-                </a:solidFill>
-                <a:latin typeface="Calibri" pitchFamily="34" charset="0"/>
-                <a:ea typeface="Calibri" pitchFamily="34" charset="-122"/>
-                <a:cs typeface="Calibri" pitchFamily="34" charset="-120"/>
-              </a:rPr>
-              <a:t>fearlessly</a:t>
-            </a:r>
-            <a:endParaRPr lang="en-US" sz="1400" dirty="0"/>
-          </a:p>
-          <a:p>
-            <a:pPr algn="ctr" indent="0" marL="0">
-              <a:buNone/>
-            </a:pPr>
-            <a:r>
-              <a:rPr lang="en-US" sz="1400" dirty="0">
-                <a:solidFill>
-                  <a:srgbClr val="1E293B"/>
-                </a:solidFill>
-                <a:latin typeface="Calibri" pitchFamily="34" charset="0"/>
-                <a:ea typeface="Calibri" pitchFamily="34" charset="-122"/>
-                <a:cs typeface="Calibri" pitchFamily="34" charset="-120"/>
-              </a:rPr>
-              <a:t>impatiently</a:t>
-            </a:r>
-            <a:endParaRPr lang="en-US" sz="1400" dirty="0"/>
-          </a:p>
-        </p:txBody>
-      </p:sp>
-      <p:sp>
-        <p:nvSpPr>
-          <p:cNvPr id="9" name="Shape 7"/>
-          <p:cNvSpPr/>
-          <p:nvPr/>
-        </p:nvSpPr>
-        <p:spPr>
-          <a:xfrm>
-            <a:off x="4617720" y="1078992"/>
-            <a:ext cx="4114800" cy="457200"/>
-          </a:xfrm>
-          <a:prstGeom prst="roundRect">
-            <a:avLst>
-              <a:gd name="adj" fmla="val 16000"/>
-            </a:avLst>
-          </a:prstGeom>
-          <a:solidFill>
-            <a:srgbClr val="0E1C42"/>
-          </a:solidFill>
-          <a:ln/>
-        </p:spPr>
-      </p:sp>
-      <p:sp>
-        <p:nvSpPr>
-          <p:cNvPr id="10" name="Text 8"/>
-          <p:cNvSpPr/>
-          <p:nvPr/>
-        </p:nvSpPr>
-        <p:spPr>
-          <a:xfrm>
-            <a:off x="4663440" y="1133856"/>
-            <a:ext cx="4023360" cy="347472"/>
+            <a:pPr indent="0" marL="0">
+              <a:buNone/>
+            </a:pPr>
+            <a:r>
+              <a:rPr lang="en-US" sz="1700" dirty="0">
+                <a:solidFill>
+                  <a:srgbClr val="0E1C42"/>
+                </a:solidFill>
+                <a:latin typeface="Calibri" pitchFamily="34" charset="0"/>
+                <a:ea typeface="Calibri" pitchFamily="34" charset="-122"/>
+                <a:cs typeface="Calibri" pitchFamily="34" charset="-120"/>
+              </a:rPr>
+              <a:t>soup, spoons, and thread    ·    ran, jumped, and hid    ·    Mig Roscuro and Despereaux    ·    red, gold, and green    ·    soup spoons and thread    ·    ran jumped and hid    ·    Mig, Roscuro, and Despereaux    ·    red gold and green</a:t>
+            </a:r>
+            <a:endParaRPr lang="en-US" sz="1700" dirty="0"/>
+          </a:p>
+        </p:txBody>
+      </p:sp>
+      <p:sp>
+        <p:nvSpPr>
+          <p:cNvPr id="7" name="Text 5"/>
+          <p:cNvSpPr/>
+          <p:nvPr/>
+        </p:nvSpPr>
+        <p:spPr>
+          <a:xfrm>
+            <a:off x="365760" y="2148840"/>
+            <a:ext cx="8412480" cy="731520"/>
           </a:xfrm>
           <a:prstGeom prst="rect">
             <a:avLst/>
@@ -4437,140 +6455,21 @@
           <a:bodyPr wrap="square" lIns="0" tIns="0" rIns="0" bIns="0" rtlCol="0" anchor="ctr"/>
           <a:lstStyle/>
           <a:p>
-            <a:pPr algn="ctr" indent="0" marL="0">
-              <a:buNone/>
-            </a:pPr>
-            <a:r>
-              <a:rPr lang="en-US" sz="1300" b="1" dirty="0">
-                <a:solidFill>
-                  <a:srgbClr val="FFFFFF"/>
-                </a:solidFill>
-                <a:latin typeface="Calibri" pitchFamily="34" charset="0"/>
-                <a:ea typeface="Calibri" pitchFamily="34" charset="-122"/>
-                <a:cs typeface="Calibri" pitchFamily="34" charset="-120"/>
-              </a:rPr>
-              <a:t>Base + one ending</a:t>
-            </a:r>
-            <a:endParaRPr lang="en-US" sz="1300" dirty="0"/>
-          </a:p>
-        </p:txBody>
-      </p:sp>
-      <p:sp>
-        <p:nvSpPr>
-          <p:cNvPr id="11" name="Shape 9"/>
-          <p:cNvSpPr/>
-          <p:nvPr/>
-        </p:nvSpPr>
-        <p:spPr>
-          <a:xfrm>
-            <a:off x="4617720" y="1591056"/>
-            <a:ext cx="4114800" cy="2103120"/>
-          </a:xfrm>
-          <a:prstGeom prst="roundRect">
-            <a:avLst>
-              <a:gd name="adj" fmla="val 4348"/>
-            </a:avLst>
-          </a:prstGeom>
-          <a:solidFill>
-            <a:srgbClr val="FFFFFF"/>
-          </a:solidFill>
-          <a:ln/>
-          <a:effectLst>
-            <a:outerShdw sx="100000" sy="100000" kx="0" ky="0" algn="bl" rotWithShape="0" blurRad="101600" dist="38100" dir="2700000">
-              <a:srgbClr val="000000">
-                <a:alpha val="12000"/>
-              </a:srgbClr>
-            </a:outerShdw>
-          </a:effectLst>
-        </p:spPr>
-      </p:sp>
-      <p:sp>
-        <p:nvSpPr>
-          <p:cNvPr id="12" name="Text 10"/>
-          <p:cNvSpPr/>
-          <p:nvPr/>
-        </p:nvSpPr>
-        <p:spPr>
-          <a:xfrm>
-            <a:off x="4709160" y="1700784"/>
-            <a:ext cx="3931920" cy="1883664"/>
-          </a:xfrm>
-          <a:prstGeom prst="rect">
-            <a:avLst/>
-          </a:prstGeom>
-          <a:noFill/>
-          <a:ln/>
-        </p:spPr>
-        <p:txBody>
-          <a:bodyPr wrap="square" lIns="0" tIns="0" rIns="0" bIns="0" rtlCol="0" anchor="ctr"/>
-          <a:lstStyle/>
-          <a:p>
-            <a:pPr algn="ctr" indent="0" marL="0">
-              <a:buNone/>
-            </a:pPr>
-            <a:r>
-              <a:rPr lang="en-US" sz="1400" dirty="0">
-                <a:solidFill>
-                  <a:srgbClr val="1E293B"/>
-                </a:solidFill>
-                <a:latin typeface="Calibri" pitchFamily="34" charset="0"/>
-                <a:ea typeface="Calibri" pitchFamily="34" charset="-122"/>
-                <a:cs typeface="Calibri" pitchFamily="34" charset="-120"/>
-              </a:rPr>
-              <a:t>darkness</a:t>
-            </a:r>
-            <a:endParaRPr lang="en-US" sz="1400" dirty="0"/>
-          </a:p>
-          <a:p>
-            <a:pPr algn="ctr" indent="0" marL="0">
-              <a:buNone/>
-            </a:pPr>
-            <a:r>
-              <a:rPr lang="en-US" sz="1400" dirty="0">
-                <a:solidFill>
-                  <a:srgbClr val="1E293B"/>
-                </a:solidFill>
-                <a:latin typeface="Calibri" pitchFamily="34" charset="0"/>
-                <a:ea typeface="Calibri" pitchFamily="34" charset="-122"/>
-                <a:cs typeface="Calibri" pitchFamily="34" charset="-120"/>
-              </a:rPr>
-              <a:t>hopeful</a:t>
-            </a:r>
-            <a:endParaRPr lang="en-US" sz="1400" dirty="0"/>
-          </a:p>
-          <a:p>
-            <a:pPr algn="ctr" indent="0" marL="0">
-              <a:buNone/>
-            </a:pPr>
-            <a:r>
-              <a:rPr lang="en-US" sz="1400" dirty="0">
-                <a:solidFill>
-                  <a:srgbClr val="1E293B"/>
-                </a:solidFill>
-                <a:latin typeface="Calibri" pitchFamily="34" charset="0"/>
-                <a:ea typeface="Calibri" pitchFamily="34" charset="-122"/>
-                <a:cs typeface="Calibri" pitchFamily="34" charset="-120"/>
-              </a:rPr>
-              <a:t>quickly</a:t>
-            </a:r>
-            <a:endParaRPr lang="en-US" sz="1400" dirty="0"/>
-          </a:p>
-          <a:p>
-            <a:pPr algn="ctr" indent="0" marL="0">
-              <a:buNone/>
-            </a:pPr>
-            <a:r>
-              <a:rPr lang="en-US" sz="1400" dirty="0">
-                <a:solidFill>
-                  <a:srgbClr val="1E293B"/>
-                </a:solidFill>
-                <a:latin typeface="Calibri" pitchFamily="34" charset="0"/>
-                <a:ea typeface="Calibri" pitchFamily="34" charset="-122"/>
-                <a:cs typeface="Calibri" pitchFamily="34" charset="-120"/>
-              </a:rPr>
-              <a:t>disagree</a:t>
-            </a:r>
-            <a:endParaRPr lang="en-US" sz="1400" dirty="0"/>
+            <a:pPr indent="0" marL="0">
+              <a:buNone/>
+            </a:pPr>
+            <a:r>
+              <a:rPr lang="en-US" sz="1500" i="1" dirty="0">
+                <a:solidFill>
+                  <a:srgbClr val="64748B"/>
+                </a:solidFill>
+                <a:latin typeface="Calibri" pitchFamily="34" charset="0"/>
+                <a:ea typeface="Calibri" pitchFamily="34" charset="-122"/>
+                <a:cs typeface="Calibri" pitchFamily="34" charset="-120"/>
+              </a:rPr>
+              <a:t>Your turn. Sort these eight into the two columns. The columns are blank on purpose — sort first, then work out what the split is.</a:t>
+            </a:r>
+            <a:endParaRPr lang="en-US" sz="1500" dirty="0"/>
           </a:p>
         </p:txBody>
       </p:sp>
@@ -4585,6 +6484,1306 @@
 <file path=ppt/slides/slide15.xml><?xml version="1.0" encoding="utf-8"?>
 <p:sld xmlns:a="http://schemas.openxmlformats.org/drawingml/2006/main" xmlns:r="http://schemas.openxmlformats.org/officeDocument/2006/relationships" xmlns:p="http://schemas.openxmlformats.org/presentationml/2006/main">
   <p:cSld name="Slide 15">
+    <p:bg>
+      <p:bgPr>
+        <a:solidFill>
+          <a:srgbClr val="F8FAFC"/>
+        </a:solidFill>
+      </p:bgPr>
+    </p:bg>
+    <p:spTree>
+      <p:nvGrpSpPr>
+        <p:cNvPr id="1" name=""/>
+        <p:cNvGrpSpPr/>
+        <p:nvPr/>
+      </p:nvGrpSpPr>
+      <p:grpSpPr>
+        <a:xfrm>
+          <a:off x="0" y="0"/>
+          <a:ext cx="0" cy="0"/>
+          <a:chOff x="0" y="0"/>
+          <a:chExt cx="0" cy="0"/>
+        </a:xfrm>
+      </p:grpSpPr>
+      <p:sp>
+        <p:nvSpPr>
+          <p:cNvPr id="2" name="Shape 0"/>
+          <p:cNvSpPr/>
+          <p:nvPr/>
+        </p:nvSpPr>
+        <p:spPr>
+          <a:xfrm>
+            <a:off x="0" y="0"/>
+            <a:ext cx="9144000" cy="566928"/>
+          </a:xfrm>
+          <a:prstGeom prst="rect">
+            <a:avLst/>
+          </a:prstGeom>
+          <a:solidFill>
+            <a:srgbClr val="C7922C"/>
+          </a:solidFill>
+          <a:ln/>
+        </p:spPr>
+      </p:sp>
+      <p:sp>
+        <p:nvSpPr>
+          <p:cNvPr id="3" name="Text 1"/>
+          <p:cNvSpPr/>
+          <p:nvPr/>
+        </p:nvSpPr>
+        <p:spPr>
+          <a:xfrm>
+            <a:off x="365760" y="54864"/>
+            <a:ext cx="8412480" cy="457200"/>
+          </a:xfrm>
+          <a:prstGeom prst="rect">
+            <a:avLst/>
+          </a:prstGeom>
+          <a:noFill/>
+          <a:ln/>
+        </p:spPr>
+        <p:txBody>
+          <a:bodyPr wrap="square" lIns="0" tIns="0" rIns="0" bIns="0" rtlCol="0" anchor="ctr"/>
+          <a:lstStyle/>
+          <a:p>
+            <a:pPr indent="0" marL="0">
+              <a:buNone/>
+            </a:pPr>
+            <a:r>
+              <a:rPr lang="en-US" sz="2200" b="1" dirty="0">
+                <a:solidFill>
+                  <a:srgbClr val="FFFFFF"/>
+                </a:solidFill>
+                <a:latin typeface="Calibri" pitchFamily="34" charset="0"/>
+                <a:ea typeface="Calibri" pitchFamily="34" charset="-122"/>
+                <a:cs typeface="Calibri" pitchFamily="34" charset="-120"/>
+              </a:rPr>
+              <a:t>✏️  Grammar — Your turn</a:t>
+            </a:r>
+            <a:endParaRPr lang="en-US" sz="2200" dirty="0"/>
+          </a:p>
+        </p:txBody>
+      </p:sp>
+      <p:sp>
+        <p:nvSpPr>
+          <p:cNvPr id="4" name="Text 2"/>
+          <p:cNvSpPr/>
+          <p:nvPr/>
+        </p:nvSpPr>
+        <p:spPr>
+          <a:xfrm>
+            <a:off x="365760" y="749808"/>
+            <a:ext cx="8229600" cy="237744"/>
+          </a:xfrm>
+          <a:prstGeom prst="rect">
+            <a:avLst/>
+          </a:prstGeom>
+          <a:noFill/>
+          <a:ln/>
+        </p:spPr>
+        <p:txBody>
+          <a:bodyPr wrap="square" lIns="0" tIns="0" rIns="0" bIns="0" rtlCol="0" anchor="ctr"/>
+          <a:lstStyle/>
+          <a:p>
+            <a:pPr indent="0" marL="0">
+              <a:buNone/>
+            </a:pPr>
+            <a:r>
+              <a:rPr lang="en-US" sz="1100" b="1" spc="100" kern="0" dirty="0">
+                <a:solidFill>
+                  <a:srgbClr val="C7922C"/>
+                </a:solidFill>
+                <a:latin typeface="Calibri" pitchFamily="34" charset="0"/>
+                <a:ea typeface="Calibri" pitchFamily="34" charset="-122"/>
+                <a:cs typeface="Calibri" pitchFamily="34" charset="-120"/>
+              </a:rPr>
+              <a:t>COMMAS IN A SERIES</a:t>
+            </a:r>
+            <a:endParaRPr lang="en-US" sz="1100" dirty="0"/>
+          </a:p>
+        </p:txBody>
+      </p:sp>
+      <p:sp>
+        <p:nvSpPr>
+          <p:cNvPr id="5" name="Shape 3"/>
+          <p:cNvSpPr/>
+          <p:nvPr/>
+        </p:nvSpPr>
+        <p:spPr>
+          <a:xfrm>
+            <a:off x="411480" y="1051560"/>
+            <a:ext cx="4114800" cy="457200"/>
+          </a:xfrm>
+          <a:prstGeom prst="roundRect">
+            <a:avLst>
+              <a:gd name="adj" fmla="val 16000"/>
+            </a:avLst>
+          </a:prstGeom>
+          <a:solidFill>
+            <a:srgbClr val="C7922C"/>
+          </a:solidFill>
+          <a:ln/>
+        </p:spPr>
+      </p:sp>
+      <p:sp>
+        <p:nvSpPr>
+          <p:cNvPr id="6" name="Text 4"/>
+          <p:cNvSpPr/>
+          <p:nvPr/>
+        </p:nvSpPr>
+        <p:spPr>
+          <a:xfrm>
+            <a:off x="457200" y="1106424"/>
+            <a:ext cx="4023360" cy="347472"/>
+          </a:xfrm>
+          <a:prstGeom prst="rect">
+            <a:avLst/>
+          </a:prstGeom>
+          <a:noFill/>
+          <a:ln/>
+        </p:spPr>
+        <p:txBody>
+          <a:bodyPr wrap="square" lIns="0" tIns="0" rIns="0" bIns="0" rtlCol="0" anchor="ctr"/>
+          <a:lstStyle/>
+          <a:p>
+            <a:pPr algn="ctr" indent="0" marL="0">
+              <a:buNone/>
+            </a:pPr>
+            <a:r>
+              <a:rPr lang="en-US" sz="1400" b="1" dirty="0">
+                <a:solidFill>
+                  <a:srgbClr val="FFFFFF"/>
+                </a:solidFill>
+                <a:latin typeface="Calibri" pitchFamily="34" charset="0"/>
+                <a:ea typeface="Calibri" pitchFamily="34" charset="-122"/>
+                <a:cs typeface="Calibri" pitchFamily="34" charset="-120"/>
+              </a:rPr>
+              <a:t>Group 1</a:t>
+            </a:r>
+            <a:endParaRPr lang="en-US" sz="1400" dirty="0"/>
+          </a:p>
+        </p:txBody>
+      </p:sp>
+      <p:sp>
+        <p:nvSpPr>
+          <p:cNvPr id="7" name="Shape 5"/>
+          <p:cNvSpPr/>
+          <p:nvPr/>
+        </p:nvSpPr>
+        <p:spPr>
+          <a:xfrm>
+            <a:off x="411480" y="1572768"/>
+            <a:ext cx="4114800" cy="2011680"/>
+          </a:xfrm>
+          <a:prstGeom prst="roundRect">
+            <a:avLst>
+              <a:gd name="adj" fmla="val 4545"/>
+            </a:avLst>
+          </a:prstGeom>
+          <a:solidFill>
+            <a:srgbClr val="FFFFFF"/>
+          </a:solidFill>
+          <a:ln/>
+          <a:effectLst>
+            <a:outerShdw sx="100000" sy="100000" kx="0" ky="0" algn="bl" rotWithShape="0" blurRad="101600" dist="38100" dir="2700000">
+              <a:srgbClr val="000000">
+                <a:alpha val="12000"/>
+              </a:srgbClr>
+            </a:outerShdw>
+          </a:effectLst>
+        </p:spPr>
+      </p:sp>
+      <p:sp>
+        <p:nvSpPr>
+          <p:cNvPr id="8" name="Text 6"/>
+          <p:cNvSpPr/>
+          <p:nvPr/>
+        </p:nvSpPr>
+        <p:spPr>
+          <a:xfrm>
+            <a:off x="502920" y="1664208"/>
+            <a:ext cx="3931920" cy="1828800"/>
+          </a:xfrm>
+          <a:prstGeom prst="rect">
+            <a:avLst/>
+          </a:prstGeom>
+          <a:noFill/>
+          <a:ln/>
+        </p:spPr>
+        <p:txBody>
+          <a:bodyPr wrap="square" lIns="0" tIns="0" rIns="0" bIns="0" rtlCol="0" anchor="ctr"/>
+          <a:lstStyle/>
+          <a:p>
+            <a:pPr algn="ctr" indent="0" marL="0">
+              <a:buNone/>
+            </a:pPr>
+            <a:r>
+              <a:rPr lang="en-US" sz="1600" dirty="0">
+                <a:solidFill>
+                  <a:srgbClr val="1E293B"/>
+                </a:solidFill>
+                <a:latin typeface="Calibri" pitchFamily="34" charset="0"/>
+                <a:ea typeface="Calibri" pitchFamily="34" charset="-122"/>
+                <a:cs typeface="Calibri" pitchFamily="34" charset="-120"/>
+              </a:rPr>
+              <a:t>soup, spoons, and thread</a:t>
+            </a:r>
+            <a:endParaRPr lang="en-US" sz="1600" dirty="0"/>
+          </a:p>
+          <a:p>
+            <a:pPr algn="ctr" indent="0" marL="0">
+              <a:buNone/>
+            </a:pPr>
+            <a:r>
+              <a:rPr lang="en-US" sz="1600" dirty="0">
+                <a:solidFill>
+                  <a:srgbClr val="1E293B"/>
+                </a:solidFill>
+                <a:latin typeface="Calibri" pitchFamily="34" charset="0"/>
+                <a:ea typeface="Calibri" pitchFamily="34" charset="-122"/>
+                <a:cs typeface="Calibri" pitchFamily="34" charset="-120"/>
+              </a:rPr>
+              <a:t>red, gold, and green</a:t>
+            </a:r>
+            <a:endParaRPr lang="en-US" sz="1600" dirty="0"/>
+          </a:p>
+          <a:p>
+            <a:pPr algn="ctr" indent="0" marL="0">
+              <a:buNone/>
+            </a:pPr>
+            <a:r>
+              <a:rPr lang="en-US" sz="1600" dirty="0">
+                <a:solidFill>
+                  <a:srgbClr val="1E293B"/>
+                </a:solidFill>
+                <a:latin typeface="Calibri" pitchFamily="34" charset="0"/>
+                <a:ea typeface="Calibri" pitchFamily="34" charset="-122"/>
+                <a:cs typeface="Calibri" pitchFamily="34" charset="-120"/>
+              </a:rPr>
+              <a:t>Mig, Roscuro, and Despereaux</a:t>
+            </a:r>
+            <a:endParaRPr lang="en-US" sz="1600" dirty="0"/>
+          </a:p>
+          <a:p>
+            <a:pPr algn="ctr" indent="0" marL="0">
+              <a:buNone/>
+            </a:pPr>
+            <a:r>
+              <a:rPr lang="en-US" sz="1600" dirty="0">
+                <a:solidFill>
+                  <a:srgbClr val="1E293B"/>
+                </a:solidFill>
+                <a:latin typeface="Calibri" pitchFamily="34" charset="0"/>
+                <a:ea typeface="Calibri" pitchFamily="34" charset="-122"/>
+                <a:cs typeface="Calibri" pitchFamily="34" charset="-120"/>
+              </a:rPr>
+              <a:t>ran, jumped, and hid</a:t>
+            </a:r>
+            <a:endParaRPr lang="en-US" sz="1600" dirty="0"/>
+          </a:p>
+        </p:txBody>
+      </p:sp>
+      <p:sp>
+        <p:nvSpPr>
+          <p:cNvPr id="9" name="Shape 7"/>
+          <p:cNvSpPr/>
+          <p:nvPr/>
+        </p:nvSpPr>
+        <p:spPr>
+          <a:xfrm>
+            <a:off x="4617720" y="1051560"/>
+            <a:ext cx="4114800" cy="457200"/>
+          </a:xfrm>
+          <a:prstGeom prst="roundRect">
+            <a:avLst>
+              <a:gd name="adj" fmla="val 16000"/>
+            </a:avLst>
+          </a:prstGeom>
+          <a:solidFill>
+            <a:srgbClr val="C7922C"/>
+          </a:solidFill>
+          <a:ln/>
+        </p:spPr>
+      </p:sp>
+      <p:sp>
+        <p:nvSpPr>
+          <p:cNvPr id="10" name="Text 8"/>
+          <p:cNvSpPr/>
+          <p:nvPr/>
+        </p:nvSpPr>
+        <p:spPr>
+          <a:xfrm>
+            <a:off x="4663440" y="1106424"/>
+            <a:ext cx="4023360" cy="347472"/>
+          </a:xfrm>
+          <a:prstGeom prst="rect">
+            <a:avLst/>
+          </a:prstGeom>
+          <a:noFill/>
+          <a:ln/>
+        </p:spPr>
+        <p:txBody>
+          <a:bodyPr wrap="square" lIns="0" tIns="0" rIns="0" bIns="0" rtlCol="0" anchor="ctr"/>
+          <a:lstStyle/>
+          <a:p>
+            <a:pPr algn="ctr" indent="0" marL="0">
+              <a:buNone/>
+            </a:pPr>
+            <a:r>
+              <a:rPr lang="en-US" sz="1400" b="1" dirty="0">
+                <a:solidFill>
+                  <a:srgbClr val="FFFFFF"/>
+                </a:solidFill>
+                <a:latin typeface="Calibri" pitchFamily="34" charset="0"/>
+                <a:ea typeface="Calibri" pitchFamily="34" charset="-122"/>
+                <a:cs typeface="Calibri" pitchFamily="34" charset="-120"/>
+              </a:rPr>
+              <a:t>Group 2</a:t>
+            </a:r>
+            <a:endParaRPr lang="en-US" sz="1400" dirty="0"/>
+          </a:p>
+        </p:txBody>
+      </p:sp>
+      <p:sp>
+        <p:nvSpPr>
+          <p:cNvPr id="11" name="Shape 9"/>
+          <p:cNvSpPr/>
+          <p:nvPr/>
+        </p:nvSpPr>
+        <p:spPr>
+          <a:xfrm>
+            <a:off x="4617720" y="1572768"/>
+            <a:ext cx="4114800" cy="2011680"/>
+          </a:xfrm>
+          <a:prstGeom prst="roundRect">
+            <a:avLst>
+              <a:gd name="adj" fmla="val 4545"/>
+            </a:avLst>
+          </a:prstGeom>
+          <a:solidFill>
+            <a:srgbClr val="FFFFFF"/>
+          </a:solidFill>
+          <a:ln/>
+          <a:effectLst>
+            <a:outerShdw sx="100000" sy="100000" kx="0" ky="0" algn="bl" rotWithShape="0" blurRad="101600" dist="38100" dir="2700000">
+              <a:srgbClr val="000000">
+                <a:alpha val="12000"/>
+              </a:srgbClr>
+            </a:outerShdw>
+          </a:effectLst>
+        </p:spPr>
+      </p:sp>
+      <p:sp>
+        <p:nvSpPr>
+          <p:cNvPr id="12" name="Text 10"/>
+          <p:cNvSpPr/>
+          <p:nvPr/>
+        </p:nvSpPr>
+        <p:spPr>
+          <a:xfrm>
+            <a:off x="4709160" y="1664208"/>
+            <a:ext cx="3931920" cy="1828800"/>
+          </a:xfrm>
+          <a:prstGeom prst="rect">
+            <a:avLst/>
+          </a:prstGeom>
+          <a:noFill/>
+          <a:ln/>
+        </p:spPr>
+        <p:txBody>
+          <a:bodyPr wrap="square" lIns="0" tIns="0" rIns="0" bIns="0" rtlCol="0" anchor="ctr"/>
+          <a:lstStyle/>
+          <a:p>
+            <a:pPr algn="ctr" indent="0" marL="0">
+              <a:buNone/>
+            </a:pPr>
+            <a:r>
+              <a:rPr lang="en-US" sz="1600" dirty="0">
+                <a:solidFill>
+                  <a:srgbClr val="1E293B"/>
+                </a:solidFill>
+                <a:latin typeface="Calibri" pitchFamily="34" charset="0"/>
+                <a:ea typeface="Calibri" pitchFamily="34" charset="-122"/>
+                <a:cs typeface="Calibri" pitchFamily="34" charset="-120"/>
+              </a:rPr>
+              <a:t>soup spoons and thread</a:t>
+            </a:r>
+            <a:endParaRPr lang="en-US" sz="1600" dirty="0"/>
+          </a:p>
+          <a:p>
+            <a:pPr algn="ctr" indent="0" marL="0">
+              <a:buNone/>
+            </a:pPr>
+            <a:r>
+              <a:rPr lang="en-US" sz="1600" dirty="0">
+                <a:solidFill>
+                  <a:srgbClr val="1E293B"/>
+                </a:solidFill>
+                <a:latin typeface="Calibri" pitchFamily="34" charset="0"/>
+                <a:ea typeface="Calibri" pitchFamily="34" charset="-122"/>
+                <a:cs typeface="Calibri" pitchFamily="34" charset="-120"/>
+              </a:rPr>
+              <a:t>red gold and green</a:t>
+            </a:r>
+            <a:endParaRPr lang="en-US" sz="1600" dirty="0"/>
+          </a:p>
+          <a:p>
+            <a:pPr algn="ctr" indent="0" marL="0">
+              <a:buNone/>
+            </a:pPr>
+            <a:r>
+              <a:rPr lang="en-US" sz="1600" dirty="0">
+                <a:solidFill>
+                  <a:srgbClr val="1E293B"/>
+                </a:solidFill>
+                <a:latin typeface="Calibri" pitchFamily="34" charset="0"/>
+                <a:ea typeface="Calibri" pitchFamily="34" charset="-122"/>
+                <a:cs typeface="Calibri" pitchFamily="34" charset="-120"/>
+              </a:rPr>
+              <a:t>Mig Roscuro and Despereaux</a:t>
+            </a:r>
+            <a:endParaRPr lang="en-US" sz="1600" dirty="0"/>
+          </a:p>
+          <a:p>
+            <a:pPr algn="ctr" indent="0" marL="0">
+              <a:buNone/>
+            </a:pPr>
+            <a:r>
+              <a:rPr lang="en-US" sz="1600" dirty="0">
+                <a:solidFill>
+                  <a:srgbClr val="1E293B"/>
+                </a:solidFill>
+                <a:latin typeface="Calibri" pitchFamily="34" charset="0"/>
+                <a:ea typeface="Calibri" pitchFamily="34" charset="-122"/>
+                <a:cs typeface="Calibri" pitchFamily="34" charset="-120"/>
+              </a:rPr>
+              <a:t>ran jumped and hid</a:t>
+            </a:r>
+            <a:endParaRPr lang="en-US" sz="1600" dirty="0"/>
+          </a:p>
+        </p:txBody>
+      </p:sp>
+      <p:sp>
+        <p:nvSpPr>
+          <p:cNvPr id="13" name="Text 11"/>
+          <p:cNvSpPr/>
+          <p:nvPr/>
+        </p:nvSpPr>
+        <p:spPr>
+          <a:xfrm>
+            <a:off x="365760" y="3703320"/>
+            <a:ext cx="8412480" cy="411480"/>
+          </a:xfrm>
+          <a:prstGeom prst="rect">
+            <a:avLst/>
+          </a:prstGeom>
+          <a:noFill/>
+          <a:ln/>
+        </p:spPr>
+        <p:txBody>
+          <a:bodyPr wrap="square" lIns="0" tIns="0" rIns="0" bIns="0" rtlCol="0" anchor="ctr"/>
+          <a:lstStyle/>
+          <a:p>
+            <a:pPr indent="0" marL="0">
+              <a:buNone/>
+            </a:pPr>
+            <a:r>
+              <a:rPr lang="en-US" sz="1500" b="1" dirty="0">
+                <a:solidFill>
+                  <a:srgbClr val="34B76F"/>
+                </a:solidFill>
+                <a:latin typeface="Calibri" pitchFamily="34" charset="0"/>
+                <a:ea typeface="Calibri" pitchFamily="34" charset="-122"/>
+                <a:cs typeface="Calibri" pitchFamily="34" charset="-120"/>
+              </a:rPr>
+              <a:t>Now name the split: what does every word in each group have in common?</a:t>
+            </a:r>
+            <a:endParaRPr lang="en-US" sz="1500" dirty="0"/>
+          </a:p>
+        </p:txBody>
+      </p:sp>
+    </p:spTree>
+  </p:cSld>
+  <p:clrMapOvr>
+    <a:masterClrMapping/>
+  </p:clrMapOvr>
+</p:sld>
+</file>
+
+<file path=ppt/slides/slide16.xml><?xml version="1.0" encoding="utf-8"?>
+<p:sld xmlns:a="http://schemas.openxmlformats.org/drawingml/2006/main" xmlns:r="http://schemas.openxmlformats.org/officeDocument/2006/relationships" xmlns:p="http://schemas.openxmlformats.org/presentationml/2006/main">
+  <p:cSld name="Slide 16">
+    <p:bg>
+      <p:bgPr>
+        <a:solidFill>
+          <a:srgbClr val="F8FAFC"/>
+        </a:solidFill>
+      </p:bgPr>
+    </p:bg>
+    <p:spTree>
+      <p:nvGrpSpPr>
+        <p:cNvPr id="1" name=""/>
+        <p:cNvGrpSpPr/>
+        <p:nvPr/>
+      </p:nvGrpSpPr>
+      <p:grpSpPr>
+        <a:xfrm>
+          <a:off x="0" y="0"/>
+          <a:ext cx="0" cy="0"/>
+          <a:chOff x="0" y="0"/>
+          <a:chExt cx="0" cy="0"/>
+        </a:xfrm>
+      </p:grpSpPr>
+      <p:sp>
+        <p:nvSpPr>
+          <p:cNvPr id="2" name="Shape 0"/>
+          <p:cNvSpPr/>
+          <p:nvPr/>
+        </p:nvSpPr>
+        <p:spPr>
+          <a:xfrm>
+            <a:off x="0" y="0"/>
+            <a:ext cx="9144000" cy="566928"/>
+          </a:xfrm>
+          <a:prstGeom prst="rect">
+            <a:avLst/>
+          </a:prstGeom>
+          <a:solidFill>
+            <a:srgbClr val="0E1C42"/>
+          </a:solidFill>
+          <a:ln/>
+        </p:spPr>
+      </p:sp>
+      <p:sp>
+        <p:nvSpPr>
+          <p:cNvPr id="3" name="Text 1"/>
+          <p:cNvSpPr/>
+          <p:nvPr/>
+        </p:nvSpPr>
+        <p:spPr>
+          <a:xfrm>
+            <a:off x="365760" y="54864"/>
+            <a:ext cx="8412480" cy="457200"/>
+          </a:xfrm>
+          <a:prstGeom prst="rect">
+            <a:avLst/>
+          </a:prstGeom>
+          <a:noFill/>
+          <a:ln/>
+        </p:spPr>
+        <p:txBody>
+          <a:bodyPr wrap="square" lIns="0" tIns="0" rIns="0" bIns="0" rtlCol="0" anchor="ctr"/>
+          <a:lstStyle/>
+          <a:p>
+            <a:pPr indent="0" marL="0">
+              <a:buNone/>
+            </a:pPr>
+            <a:r>
+              <a:rPr lang="en-US" sz="2200" b="1" dirty="0">
+                <a:solidFill>
+                  <a:srgbClr val="FFFFFF"/>
+                </a:solidFill>
+                <a:latin typeface="Calibri" pitchFamily="34" charset="0"/>
+                <a:ea typeface="Calibri" pitchFamily="34" charset="-122"/>
+                <a:cs typeface="Calibri" pitchFamily="34" charset="-120"/>
+              </a:rPr>
+              <a:t>🔠  Spelling</a:t>
+            </a:r>
+            <a:endParaRPr lang="en-US" sz="2200" dirty="0"/>
+          </a:p>
+        </p:txBody>
+      </p:sp>
+      <p:sp>
+        <p:nvSpPr>
+          <p:cNvPr id="4" name="Text 2"/>
+          <p:cNvSpPr/>
+          <p:nvPr/>
+        </p:nvSpPr>
+        <p:spPr>
+          <a:xfrm>
+            <a:off x="365760" y="777240"/>
+            <a:ext cx="8229600" cy="237744"/>
+          </a:xfrm>
+          <a:prstGeom prst="rect">
+            <a:avLst/>
+          </a:prstGeom>
+          <a:noFill/>
+          <a:ln/>
+        </p:spPr>
+        <p:txBody>
+          <a:bodyPr wrap="square" lIns="0" tIns="0" rIns="0" bIns="0" rtlCol="0" anchor="ctr"/>
+          <a:lstStyle/>
+          <a:p>
+            <a:pPr indent="0" marL="0">
+              <a:buNone/>
+            </a:pPr>
+            <a:r>
+              <a:rPr lang="en-US" sz="1100" b="1" spc="100" kern="0" dirty="0">
+                <a:solidFill>
+                  <a:srgbClr val="0E1C42"/>
+                </a:solidFill>
+                <a:latin typeface="Calibri" pitchFamily="34" charset="0"/>
+                <a:ea typeface="Calibri" pitchFamily="34" charset="-122"/>
+                <a:cs typeface="Calibri" pitchFamily="34" charset="-120"/>
+              </a:rPr>
+              <a:t>OPEN SYLLABLES IN LONGER WORDS</a:t>
+            </a:r>
+            <a:endParaRPr lang="en-US" sz="1100" dirty="0"/>
+          </a:p>
+        </p:txBody>
+      </p:sp>
+      <p:sp>
+        <p:nvSpPr>
+          <p:cNvPr id="5" name="Text 3"/>
+          <p:cNvSpPr/>
+          <p:nvPr/>
+        </p:nvSpPr>
+        <p:spPr>
+          <a:xfrm>
+            <a:off x="365760" y="1078992"/>
+            <a:ext cx="8229600" cy="237744"/>
+          </a:xfrm>
+          <a:prstGeom prst="rect">
+            <a:avLst/>
+          </a:prstGeom>
+          <a:noFill/>
+          <a:ln/>
+        </p:spPr>
+        <p:txBody>
+          <a:bodyPr wrap="square" lIns="0" tIns="0" rIns="0" bIns="0" rtlCol="0" anchor="ctr"/>
+          <a:lstStyle/>
+          <a:p>
+            <a:pPr indent="0" marL="0">
+              <a:buNone/>
+            </a:pPr>
+            <a:r>
+              <a:rPr lang="en-US" sz="1100" b="1" spc="100" kern="0" dirty="0">
+                <a:solidFill>
+                  <a:srgbClr val="64748B"/>
+                </a:solidFill>
+                <a:latin typeface="Calibri" pitchFamily="34" charset="0"/>
+                <a:ea typeface="Calibri" pitchFamily="34" charset="-122"/>
+                <a:cs typeface="Calibri" pitchFamily="34" charset="-120"/>
+              </a:rPr>
+              <a:t>WORD BANK</a:t>
+            </a:r>
+            <a:endParaRPr lang="en-US" sz="1100" dirty="0"/>
+          </a:p>
+        </p:txBody>
+      </p:sp>
+      <p:sp>
+        <p:nvSpPr>
+          <p:cNvPr id="6" name="Shape 4"/>
+          <p:cNvSpPr/>
+          <p:nvPr/>
+        </p:nvSpPr>
+        <p:spPr>
+          <a:xfrm>
+            <a:off x="365760" y="1353312"/>
+            <a:ext cx="8412480" cy="1005840"/>
+          </a:xfrm>
+          <a:prstGeom prst="roundRect">
+            <a:avLst>
+              <a:gd name="adj" fmla="val 9091"/>
+            </a:avLst>
+          </a:prstGeom>
+          <a:solidFill>
+            <a:srgbClr val="FFFFFF"/>
+          </a:solidFill>
+          <a:ln w="19050">
+            <a:solidFill>
+              <a:srgbClr val="0E1C42"/>
+            </a:solidFill>
+            <a:prstDash val="solid"/>
+          </a:ln>
+          <a:effectLst>
+            <a:outerShdw sx="100000" sy="100000" kx="0" ky="0" algn="bl" rotWithShape="0" blurRad="101600" dist="38100" dir="2700000">
+              <a:srgbClr val="000000">
+                <a:alpha val="12000"/>
+              </a:srgbClr>
+            </a:outerShdw>
+          </a:effectLst>
+        </p:spPr>
+      </p:sp>
+      <p:sp>
+        <p:nvSpPr>
+          <p:cNvPr id="7" name="Text 5"/>
+          <p:cNvSpPr/>
+          <p:nvPr/>
+        </p:nvSpPr>
+        <p:spPr>
+          <a:xfrm>
+            <a:off x="594360" y="1481328"/>
+            <a:ext cx="7955280" cy="749808"/>
+          </a:xfrm>
+          <a:prstGeom prst="rect">
+            <a:avLst/>
+          </a:prstGeom>
+          <a:noFill/>
+          <a:ln/>
+        </p:spPr>
+        <p:txBody>
+          <a:bodyPr wrap="square" lIns="0" tIns="0" rIns="0" bIns="0" rtlCol="0" anchor="ctr"/>
+          <a:lstStyle/>
+          <a:p>
+            <a:pPr indent="0" marL="0">
+              <a:buNone/>
+            </a:pPr>
+            <a:r>
+              <a:rPr lang="en-US" sz="1700" dirty="0">
+                <a:solidFill>
+                  <a:srgbClr val="0E1C42"/>
+                </a:solidFill>
+                <a:latin typeface="Calibri" pitchFamily="34" charset="0"/>
+                <a:ea typeface="Calibri" pitchFamily="34" charset="-122"/>
+                <a:cs typeface="Calibri" pitchFamily="34" charset="-120"/>
+              </a:rPr>
+              <a:t>tiger   ·   robot   ·   music   ·   tiny   ·   napkin   ·   velvet   ·   helmet   ·   sudden</a:t>
+            </a:r>
+            <a:endParaRPr lang="en-US" sz="1700" dirty="0"/>
+          </a:p>
+        </p:txBody>
+      </p:sp>
+      <p:sp>
+        <p:nvSpPr>
+          <p:cNvPr id="8" name="Text 6"/>
+          <p:cNvSpPr/>
+          <p:nvPr/>
+        </p:nvSpPr>
+        <p:spPr>
+          <a:xfrm>
+            <a:off x="365760" y="2514600"/>
+            <a:ext cx="8412480" cy="457200"/>
+          </a:xfrm>
+          <a:prstGeom prst="rect">
+            <a:avLst/>
+          </a:prstGeom>
+          <a:noFill/>
+          <a:ln/>
+        </p:spPr>
+        <p:txBody>
+          <a:bodyPr wrap="square" lIns="0" tIns="0" rIns="0" bIns="0" rtlCol="0" anchor="ctr"/>
+          <a:lstStyle/>
+          <a:p>
+            <a:pPr indent="0" marL="0">
+              <a:buNone/>
+            </a:pPr>
+            <a:r>
+              <a:rPr lang="en-US" sz="1500" i="1" dirty="0">
+                <a:solidFill>
+                  <a:srgbClr val="64748B"/>
+                </a:solidFill>
+                <a:latin typeface="Calibri" pitchFamily="34" charset="0"/>
+                <a:ea typeface="Calibri" pitchFamily="34" charset="-122"/>
+                <a:cs typeface="Calibri" pitchFamily="34" charset="-120"/>
+              </a:rPr>
+              <a:t>Which column does each word belong in?  Columns: Open syllable (long vowel at end)  |  Closed (short vowel)</a:t>
+            </a:r>
+            <a:endParaRPr lang="en-US" sz="1500" dirty="0"/>
+          </a:p>
+        </p:txBody>
+      </p:sp>
+    </p:spTree>
+  </p:cSld>
+  <p:clrMapOvr>
+    <a:masterClrMapping/>
+  </p:clrMapOvr>
+</p:sld>
+</file>
+
+<file path=ppt/slides/slide17.xml><?xml version="1.0" encoding="utf-8"?>
+<p:sld xmlns:a="http://schemas.openxmlformats.org/drawingml/2006/main" xmlns:r="http://schemas.openxmlformats.org/officeDocument/2006/relationships" xmlns:p="http://schemas.openxmlformats.org/presentationml/2006/main">
+  <p:cSld name="Slide 17">
+    <p:bg>
+      <p:bgPr>
+        <a:solidFill>
+          <a:srgbClr val="F8FAFC"/>
+        </a:solidFill>
+      </p:bgPr>
+    </p:bg>
+    <p:spTree>
+      <p:nvGrpSpPr>
+        <p:cNvPr id="1" name=""/>
+        <p:cNvGrpSpPr/>
+        <p:nvPr/>
+      </p:nvGrpSpPr>
+      <p:grpSpPr>
+        <a:xfrm>
+          <a:off x="0" y="0"/>
+          <a:ext cx="0" cy="0"/>
+          <a:chOff x="0" y="0"/>
+          <a:chExt cx="0" cy="0"/>
+        </a:xfrm>
+      </p:grpSpPr>
+      <p:sp>
+        <p:nvSpPr>
+          <p:cNvPr id="2" name="Shape 0"/>
+          <p:cNvSpPr/>
+          <p:nvPr/>
+        </p:nvSpPr>
+        <p:spPr>
+          <a:xfrm>
+            <a:off x="0" y="0"/>
+            <a:ext cx="9144000" cy="566928"/>
+          </a:xfrm>
+          <a:prstGeom prst="rect">
+            <a:avLst/>
+          </a:prstGeom>
+          <a:solidFill>
+            <a:srgbClr val="0E1C42"/>
+          </a:solidFill>
+          <a:ln/>
+        </p:spPr>
+      </p:sp>
+      <p:sp>
+        <p:nvSpPr>
+          <p:cNvPr id="3" name="Text 1"/>
+          <p:cNvSpPr/>
+          <p:nvPr/>
+        </p:nvSpPr>
+        <p:spPr>
+          <a:xfrm>
+            <a:off x="365760" y="54864"/>
+            <a:ext cx="8412480" cy="457200"/>
+          </a:xfrm>
+          <a:prstGeom prst="rect">
+            <a:avLst/>
+          </a:prstGeom>
+          <a:noFill/>
+          <a:ln/>
+        </p:spPr>
+        <p:txBody>
+          <a:bodyPr wrap="square" lIns="0" tIns="0" rIns="0" bIns="0" rtlCol="0" anchor="ctr"/>
+          <a:lstStyle/>
+          <a:p>
+            <a:pPr indent="0" marL="0">
+              <a:buNone/>
+            </a:pPr>
+            <a:r>
+              <a:rPr lang="en-US" sz="2200" b="1" dirty="0">
+                <a:solidFill>
+                  <a:srgbClr val="FFFFFF"/>
+                </a:solidFill>
+                <a:latin typeface="Calibri" pitchFamily="34" charset="0"/>
+                <a:ea typeface="Calibri" pitchFamily="34" charset="-122"/>
+                <a:cs typeface="Calibri" pitchFamily="34" charset="-120"/>
+              </a:rPr>
+              <a:t>🔠  Spelling</a:t>
+            </a:r>
+            <a:endParaRPr lang="en-US" sz="2200" dirty="0"/>
+          </a:p>
+        </p:txBody>
+      </p:sp>
+      <p:sp>
+        <p:nvSpPr>
+          <p:cNvPr id="4" name="Text 2"/>
+          <p:cNvSpPr/>
+          <p:nvPr/>
+        </p:nvSpPr>
+        <p:spPr>
+          <a:xfrm>
+            <a:off x="365760" y="777240"/>
+            <a:ext cx="8229600" cy="237744"/>
+          </a:xfrm>
+          <a:prstGeom prst="rect">
+            <a:avLst/>
+          </a:prstGeom>
+          <a:noFill/>
+          <a:ln/>
+        </p:spPr>
+        <p:txBody>
+          <a:bodyPr wrap="square" lIns="0" tIns="0" rIns="0" bIns="0" rtlCol="0" anchor="ctr"/>
+          <a:lstStyle/>
+          <a:p>
+            <a:pPr indent="0" marL="0">
+              <a:buNone/>
+            </a:pPr>
+            <a:r>
+              <a:rPr lang="en-US" sz="1100" b="1" spc="100" kern="0" dirty="0">
+                <a:solidFill>
+                  <a:srgbClr val="0E1C42"/>
+                </a:solidFill>
+                <a:latin typeface="Calibri" pitchFamily="34" charset="0"/>
+                <a:ea typeface="Calibri" pitchFamily="34" charset="-122"/>
+                <a:cs typeface="Calibri" pitchFamily="34" charset="-120"/>
+              </a:rPr>
+              <a:t>OPEN SYLLABLES IN LONGER WORDS</a:t>
+            </a:r>
+            <a:endParaRPr lang="en-US" sz="1100" dirty="0"/>
+          </a:p>
+        </p:txBody>
+      </p:sp>
+      <p:sp>
+        <p:nvSpPr>
+          <p:cNvPr id="5" name="Shape 3"/>
+          <p:cNvSpPr/>
+          <p:nvPr/>
+        </p:nvSpPr>
+        <p:spPr>
+          <a:xfrm>
+            <a:off x="411480" y="1078992"/>
+            <a:ext cx="4114800" cy="457200"/>
+          </a:xfrm>
+          <a:prstGeom prst="roundRect">
+            <a:avLst>
+              <a:gd name="adj" fmla="val 16000"/>
+            </a:avLst>
+          </a:prstGeom>
+          <a:solidFill>
+            <a:srgbClr val="0E1C42"/>
+          </a:solidFill>
+          <a:ln/>
+        </p:spPr>
+      </p:sp>
+      <p:sp>
+        <p:nvSpPr>
+          <p:cNvPr id="6" name="Text 4"/>
+          <p:cNvSpPr/>
+          <p:nvPr/>
+        </p:nvSpPr>
+        <p:spPr>
+          <a:xfrm>
+            <a:off x="457200" y="1133856"/>
+            <a:ext cx="4023360" cy="347472"/>
+          </a:xfrm>
+          <a:prstGeom prst="rect">
+            <a:avLst/>
+          </a:prstGeom>
+          <a:noFill/>
+          <a:ln/>
+        </p:spPr>
+        <p:txBody>
+          <a:bodyPr wrap="square" lIns="0" tIns="0" rIns="0" bIns="0" rtlCol="0" anchor="ctr"/>
+          <a:lstStyle/>
+          <a:p>
+            <a:pPr algn="ctr" indent="0" marL="0">
+              <a:buNone/>
+            </a:pPr>
+            <a:r>
+              <a:rPr lang="en-US" sz="1300" b="1" dirty="0">
+                <a:solidFill>
+                  <a:srgbClr val="FFFFFF"/>
+                </a:solidFill>
+                <a:latin typeface="Calibri" pitchFamily="34" charset="0"/>
+                <a:ea typeface="Calibri" pitchFamily="34" charset="-122"/>
+                <a:cs typeface="Calibri" pitchFamily="34" charset="-120"/>
+              </a:rPr>
+              <a:t>Open syllable (long vowel at end)</a:t>
+            </a:r>
+            <a:endParaRPr lang="en-US" sz="1300" dirty="0"/>
+          </a:p>
+        </p:txBody>
+      </p:sp>
+      <p:sp>
+        <p:nvSpPr>
+          <p:cNvPr id="7" name="Shape 5"/>
+          <p:cNvSpPr/>
+          <p:nvPr/>
+        </p:nvSpPr>
+        <p:spPr>
+          <a:xfrm>
+            <a:off x="411480" y="1591056"/>
+            <a:ext cx="4114800" cy="2103120"/>
+          </a:xfrm>
+          <a:prstGeom prst="roundRect">
+            <a:avLst>
+              <a:gd name="adj" fmla="val 4348"/>
+            </a:avLst>
+          </a:prstGeom>
+          <a:solidFill>
+            <a:srgbClr val="FFFFFF"/>
+          </a:solidFill>
+          <a:ln/>
+          <a:effectLst>
+            <a:outerShdw sx="100000" sy="100000" kx="0" ky="0" algn="bl" rotWithShape="0" blurRad="101600" dist="38100" dir="2700000">
+              <a:srgbClr val="000000">
+                <a:alpha val="12000"/>
+              </a:srgbClr>
+            </a:outerShdw>
+          </a:effectLst>
+        </p:spPr>
+      </p:sp>
+      <p:sp>
+        <p:nvSpPr>
+          <p:cNvPr id="8" name="Text 6"/>
+          <p:cNvSpPr/>
+          <p:nvPr/>
+        </p:nvSpPr>
+        <p:spPr>
+          <a:xfrm>
+            <a:off x="502920" y="1700784"/>
+            <a:ext cx="3931920" cy="1883664"/>
+          </a:xfrm>
+          <a:prstGeom prst="rect">
+            <a:avLst/>
+          </a:prstGeom>
+          <a:noFill/>
+          <a:ln/>
+        </p:spPr>
+        <p:txBody>
+          <a:bodyPr wrap="square" lIns="0" tIns="0" rIns="0" bIns="0" rtlCol="0" anchor="ctr"/>
+          <a:lstStyle/>
+          <a:p>
+            <a:pPr algn="ctr" indent="0" marL="0">
+              <a:buNone/>
+            </a:pPr>
+            <a:r>
+              <a:rPr lang="en-US" sz="1400" dirty="0">
+                <a:solidFill>
+                  <a:srgbClr val="1E293B"/>
+                </a:solidFill>
+                <a:latin typeface="Calibri" pitchFamily="34" charset="0"/>
+                <a:ea typeface="Calibri" pitchFamily="34" charset="-122"/>
+                <a:cs typeface="Calibri" pitchFamily="34" charset="-120"/>
+              </a:rPr>
+              <a:t>tiger</a:t>
+            </a:r>
+            <a:endParaRPr lang="en-US" sz="1400" dirty="0"/>
+          </a:p>
+          <a:p>
+            <a:pPr algn="ctr" indent="0" marL="0">
+              <a:buNone/>
+            </a:pPr>
+            <a:r>
+              <a:rPr lang="en-US" sz="1400" dirty="0">
+                <a:solidFill>
+                  <a:srgbClr val="1E293B"/>
+                </a:solidFill>
+                <a:latin typeface="Calibri" pitchFamily="34" charset="0"/>
+                <a:ea typeface="Calibri" pitchFamily="34" charset="-122"/>
+                <a:cs typeface="Calibri" pitchFamily="34" charset="-120"/>
+              </a:rPr>
+              <a:t>robot</a:t>
+            </a:r>
+            <a:endParaRPr lang="en-US" sz="1400" dirty="0"/>
+          </a:p>
+          <a:p>
+            <a:pPr algn="ctr" indent="0" marL="0">
+              <a:buNone/>
+            </a:pPr>
+            <a:r>
+              <a:rPr lang="en-US" sz="1400" dirty="0">
+                <a:solidFill>
+                  <a:srgbClr val="1E293B"/>
+                </a:solidFill>
+                <a:latin typeface="Calibri" pitchFamily="34" charset="0"/>
+                <a:ea typeface="Calibri" pitchFamily="34" charset="-122"/>
+                <a:cs typeface="Calibri" pitchFamily="34" charset="-120"/>
+              </a:rPr>
+              <a:t>music</a:t>
+            </a:r>
+            <a:endParaRPr lang="en-US" sz="1400" dirty="0"/>
+          </a:p>
+          <a:p>
+            <a:pPr algn="ctr" indent="0" marL="0">
+              <a:buNone/>
+            </a:pPr>
+            <a:r>
+              <a:rPr lang="en-US" sz="1400" dirty="0">
+                <a:solidFill>
+                  <a:srgbClr val="1E293B"/>
+                </a:solidFill>
+                <a:latin typeface="Calibri" pitchFamily="34" charset="0"/>
+                <a:ea typeface="Calibri" pitchFamily="34" charset="-122"/>
+                <a:cs typeface="Calibri" pitchFamily="34" charset="-120"/>
+              </a:rPr>
+              <a:t>tiny</a:t>
+            </a:r>
+            <a:endParaRPr lang="en-US" sz="1400" dirty="0"/>
+          </a:p>
+        </p:txBody>
+      </p:sp>
+      <p:sp>
+        <p:nvSpPr>
+          <p:cNvPr id="9" name="Shape 7"/>
+          <p:cNvSpPr/>
+          <p:nvPr/>
+        </p:nvSpPr>
+        <p:spPr>
+          <a:xfrm>
+            <a:off x="4617720" y="1078992"/>
+            <a:ext cx="4114800" cy="457200"/>
+          </a:xfrm>
+          <a:prstGeom prst="roundRect">
+            <a:avLst>
+              <a:gd name="adj" fmla="val 16000"/>
+            </a:avLst>
+          </a:prstGeom>
+          <a:solidFill>
+            <a:srgbClr val="0E1C42"/>
+          </a:solidFill>
+          <a:ln/>
+        </p:spPr>
+      </p:sp>
+      <p:sp>
+        <p:nvSpPr>
+          <p:cNvPr id="10" name="Text 8"/>
+          <p:cNvSpPr/>
+          <p:nvPr/>
+        </p:nvSpPr>
+        <p:spPr>
+          <a:xfrm>
+            <a:off x="4663440" y="1133856"/>
+            <a:ext cx="4023360" cy="347472"/>
+          </a:xfrm>
+          <a:prstGeom prst="rect">
+            <a:avLst/>
+          </a:prstGeom>
+          <a:noFill/>
+          <a:ln/>
+        </p:spPr>
+        <p:txBody>
+          <a:bodyPr wrap="square" lIns="0" tIns="0" rIns="0" bIns="0" rtlCol="0" anchor="ctr"/>
+          <a:lstStyle/>
+          <a:p>
+            <a:pPr algn="ctr" indent="0" marL="0">
+              <a:buNone/>
+            </a:pPr>
+            <a:r>
+              <a:rPr lang="en-US" sz="1300" b="1" dirty="0">
+                <a:solidFill>
+                  <a:srgbClr val="FFFFFF"/>
+                </a:solidFill>
+                <a:latin typeface="Calibri" pitchFamily="34" charset="0"/>
+                <a:ea typeface="Calibri" pitchFamily="34" charset="-122"/>
+                <a:cs typeface="Calibri" pitchFamily="34" charset="-120"/>
+              </a:rPr>
+              <a:t>Closed (short vowel)</a:t>
+            </a:r>
+            <a:endParaRPr lang="en-US" sz="1300" dirty="0"/>
+          </a:p>
+        </p:txBody>
+      </p:sp>
+      <p:sp>
+        <p:nvSpPr>
+          <p:cNvPr id="11" name="Shape 9"/>
+          <p:cNvSpPr/>
+          <p:nvPr/>
+        </p:nvSpPr>
+        <p:spPr>
+          <a:xfrm>
+            <a:off x="4617720" y="1591056"/>
+            <a:ext cx="4114800" cy="2103120"/>
+          </a:xfrm>
+          <a:prstGeom prst="roundRect">
+            <a:avLst>
+              <a:gd name="adj" fmla="val 4348"/>
+            </a:avLst>
+          </a:prstGeom>
+          <a:solidFill>
+            <a:srgbClr val="FFFFFF"/>
+          </a:solidFill>
+          <a:ln/>
+          <a:effectLst>
+            <a:outerShdw sx="100000" sy="100000" kx="0" ky="0" algn="bl" rotWithShape="0" blurRad="101600" dist="38100" dir="2700000">
+              <a:srgbClr val="000000">
+                <a:alpha val="12000"/>
+              </a:srgbClr>
+            </a:outerShdw>
+          </a:effectLst>
+        </p:spPr>
+      </p:sp>
+      <p:sp>
+        <p:nvSpPr>
+          <p:cNvPr id="12" name="Text 10"/>
+          <p:cNvSpPr/>
+          <p:nvPr/>
+        </p:nvSpPr>
+        <p:spPr>
+          <a:xfrm>
+            <a:off x="4709160" y="1700784"/>
+            <a:ext cx="3931920" cy="1883664"/>
+          </a:xfrm>
+          <a:prstGeom prst="rect">
+            <a:avLst/>
+          </a:prstGeom>
+          <a:noFill/>
+          <a:ln/>
+        </p:spPr>
+        <p:txBody>
+          <a:bodyPr wrap="square" lIns="0" tIns="0" rIns="0" bIns="0" rtlCol="0" anchor="ctr"/>
+          <a:lstStyle/>
+          <a:p>
+            <a:pPr algn="ctr" indent="0" marL="0">
+              <a:buNone/>
+            </a:pPr>
+            <a:r>
+              <a:rPr lang="en-US" sz="1400" dirty="0">
+                <a:solidFill>
+                  <a:srgbClr val="1E293B"/>
+                </a:solidFill>
+                <a:latin typeface="Calibri" pitchFamily="34" charset="0"/>
+                <a:ea typeface="Calibri" pitchFamily="34" charset="-122"/>
+                <a:cs typeface="Calibri" pitchFamily="34" charset="-120"/>
+              </a:rPr>
+              <a:t>napkin</a:t>
+            </a:r>
+            <a:endParaRPr lang="en-US" sz="1400" dirty="0"/>
+          </a:p>
+          <a:p>
+            <a:pPr algn="ctr" indent="0" marL="0">
+              <a:buNone/>
+            </a:pPr>
+            <a:r>
+              <a:rPr lang="en-US" sz="1400" dirty="0">
+                <a:solidFill>
+                  <a:srgbClr val="1E293B"/>
+                </a:solidFill>
+                <a:latin typeface="Calibri" pitchFamily="34" charset="0"/>
+                <a:ea typeface="Calibri" pitchFamily="34" charset="-122"/>
+                <a:cs typeface="Calibri" pitchFamily="34" charset="-120"/>
+              </a:rPr>
+              <a:t>velvet</a:t>
+            </a:r>
+            <a:endParaRPr lang="en-US" sz="1400" dirty="0"/>
+          </a:p>
+          <a:p>
+            <a:pPr algn="ctr" indent="0" marL="0">
+              <a:buNone/>
+            </a:pPr>
+            <a:r>
+              <a:rPr lang="en-US" sz="1400" dirty="0">
+                <a:solidFill>
+                  <a:srgbClr val="1E293B"/>
+                </a:solidFill>
+                <a:latin typeface="Calibri" pitchFamily="34" charset="0"/>
+                <a:ea typeface="Calibri" pitchFamily="34" charset="-122"/>
+                <a:cs typeface="Calibri" pitchFamily="34" charset="-120"/>
+              </a:rPr>
+              <a:t>helmet</a:t>
+            </a:r>
+            <a:endParaRPr lang="en-US" sz="1400" dirty="0"/>
+          </a:p>
+          <a:p>
+            <a:pPr algn="ctr" indent="0" marL="0">
+              <a:buNone/>
+            </a:pPr>
+            <a:r>
+              <a:rPr lang="en-US" sz="1400" dirty="0">
+                <a:solidFill>
+                  <a:srgbClr val="1E293B"/>
+                </a:solidFill>
+                <a:latin typeface="Calibri" pitchFamily="34" charset="0"/>
+                <a:ea typeface="Calibri" pitchFamily="34" charset="-122"/>
+                <a:cs typeface="Calibri" pitchFamily="34" charset="-120"/>
+              </a:rPr>
+              <a:t>sudden</a:t>
+            </a:r>
+            <a:endParaRPr lang="en-US" sz="1400" dirty="0"/>
+          </a:p>
+        </p:txBody>
+      </p:sp>
+    </p:spTree>
+  </p:cSld>
+  <p:clrMapOvr>
+    <a:masterClrMapping/>
+  </p:clrMapOvr>
+</p:sld>
+</file>
+
+<file path=ppt/slides/slide18.xml><?xml version="1.0" encoding="utf-8"?>
+<p:sld xmlns:a="http://schemas.openxmlformats.org/drawingml/2006/main" xmlns:r="http://schemas.openxmlformats.org/officeDocument/2006/relationships" xmlns:p="http://schemas.openxmlformats.org/presentationml/2006/main">
+  <p:cSld name="Slide 18">
     <p:bg>
       <p:bgPr>
         <a:solidFill>
@@ -4919,9 +8118,9 @@
 </p:sld>
 </file>
 
-<file path=ppt/slides/slide16.xml><?xml version="1.0" encoding="utf-8"?>
+<file path=ppt/slides/slide19.xml><?xml version="1.0" encoding="utf-8"?>
 <p:sld xmlns:a="http://schemas.openxmlformats.org/drawingml/2006/main" xmlns:r="http://schemas.openxmlformats.org/officeDocument/2006/relationships" xmlns:p="http://schemas.openxmlformats.org/presentationml/2006/main">
-  <p:cSld name="Slide 16">
+  <p:cSld name="Slide 19">
     <p:bg>
       <p:bgPr>
         <a:solidFill>
@@ -6479,7 +9678,7 @@
     <p:bg>
       <p:bgPr>
         <a:solidFill>
-          <a:srgbClr val="F8FAFC"/>
+          <a:srgbClr val="FFFFFF"/>
         </a:solidFill>
       </p:bgPr>
     </p:bg>
@@ -6564,7 +9763,7 @@
         </p:nvSpPr>
         <p:spPr>
           <a:xfrm>
-            <a:off x="365760" y="749808"/>
+            <a:off x="365760" y="804672"/>
             <a:ext cx="8229600" cy="237744"/>
           </a:xfrm>
           <a:prstGeom prst="rect">
@@ -6589,7 +9788,7 @@
                 <a:ea typeface="Calibri" pitchFamily="34" charset="-122"/>
                 <a:cs typeface="Calibri" pitchFamily="34" charset="-120"/>
               </a:rPr>
-              <a:t>FIX THESE SENTENCES</a:t>
+              <a:t>CORRECT MODEL — STUDY WHAT IS RIGHT</a:t>
             </a:r>
             <a:endParaRPr lang="en-US" sz="1100" dirty="0"/>
           </a:p>
@@ -6603,16 +9802,16 @@
         </p:nvSpPr>
         <p:spPr>
           <a:xfrm>
-            <a:off x="365760" y="1024128"/>
-            <a:ext cx="8412480" cy="777240"/>
+            <a:off x="365760" y="1078992"/>
+            <a:ext cx="8412480" cy="822960"/>
           </a:xfrm>
           <a:prstGeom prst="roundRect">
             <a:avLst>
-              <a:gd name="adj" fmla="val 11765"/>
+              <a:gd name="adj" fmla="val 11111"/>
             </a:avLst>
           </a:prstGeom>
           <a:solidFill>
-            <a:srgbClr val="FFFFFF"/>
+            <a:srgbClr val="E5F7FC"/>
           </a:solidFill>
           <a:ln w="19050">
             <a:solidFill>
@@ -6637,8 +9836,8 @@
         </p:nvSpPr>
         <p:spPr>
           <a:xfrm>
-            <a:off x="594360" y="1152144"/>
-            <a:ext cx="7955280" cy="521208"/>
+            <a:off x="594360" y="1207008"/>
+            <a:ext cx="7955280" cy="566928"/>
           </a:xfrm>
           <a:prstGeom prst="rect">
             <a:avLst/>
@@ -6662,7 +9861,7 @@
                 <a:ea typeface="Calibri" pitchFamily="34" charset="-122"/>
                 <a:cs typeface="Calibri" pitchFamily="34" charset="-120"/>
               </a:rPr>
-              <a:t>1. despereaux sat in the sunshine with the princess and told her the story of how he came to rescue her</a:t>
+              <a:t>Despereaux spoke softly, slowly, and clearly as the small, brave princess leaned closer.</a:t>
             </a:r>
             <a:endParaRPr lang="en-US" sz="1700" dirty="0"/>
           </a:p>
@@ -6670,37 +9869,42 @@
       </p:sp>
       <p:sp>
         <p:nvSpPr>
-          <p:cNvPr id="7" name="Shape 5"/>
-          <p:cNvSpPr/>
-          <p:nvPr/>
-        </p:nvSpPr>
-        <p:spPr>
-          <a:xfrm>
-            <a:off x="365760" y="1874520"/>
-            <a:ext cx="8412480" cy="777240"/>
-          </a:xfrm>
-          <a:prstGeom prst="roundRect">
-            <a:avLst>
-              <a:gd name="adj" fmla="val 11765"/>
-            </a:avLst>
-          </a:prstGeom>
-          <a:solidFill>
-            <a:srgbClr val="FFFFFF"/>
-          </a:solidFill>
-          <a:ln w="19050">
-            <a:solidFill>
-              <a:srgbClr val="55C8E8"/>
-            </a:solidFill>
-            <a:prstDash val="solid"/>
-          </a:ln>
-          <a:effectLst>
-            <a:outerShdw sx="100000" sy="100000" kx="0" ky="0" algn="bl" rotWithShape="0" blurRad="101600" dist="38100" dir="2700000">
-              <a:srgbClr val="000000">
-                <a:alpha val="12000"/>
-              </a:srgbClr>
-            </a:outerShdw>
-          </a:effectLst>
-        </p:spPr>
+          <p:cNvPr id="7" name="Text 5"/>
+          <p:cNvSpPr/>
+          <p:nvPr/>
+        </p:nvSpPr>
+        <p:spPr>
+          <a:xfrm>
+            <a:off x="365760" y="2103120"/>
+            <a:ext cx="8229600" cy="237744"/>
+          </a:xfrm>
+          <a:prstGeom prst="rect">
+            <a:avLst/>
+          </a:prstGeom>
+          <a:noFill/>
+          <a:ln/>
+        </p:spPr>
+        <p:txBody>
+          <a:bodyPr wrap="square" lIns="0" tIns="0" rIns="0" bIns="0" rtlCol="0" anchor="ctr"/>
+          <a:lstStyle/>
+          <a:p>
+            <a:pPr indent="0" marL="0">
+              <a:buNone/>
+            </a:pPr>
+            <a:r>
+              <a:rPr lang="en-US" sz="1100" b="1" spc="100" kern="0" dirty="0">
+                <a:solidFill>
+                  <a:srgbClr val="55C8E8"/>
+                </a:solidFill>
+                <a:latin typeface="Calibri" pitchFamily="34" charset="0"/>
+                <a:ea typeface="Calibri" pitchFamily="34" charset="-122"/>
+                <a:cs typeface="Calibri" pitchFamily="34" charset="-120"/>
+              </a:rPr>
+              <a:t>NOTICE</a:t>
+            </a:r>
+            <a:endParaRPr lang="en-US" sz="1100" dirty="0"/>
+          </a:p>
+        </p:txBody>
       </p:sp>
       <p:sp>
         <p:nvSpPr>
@@ -6710,8 +9914,8 @@
         </p:nvSpPr>
         <p:spPr>
           <a:xfrm>
-            <a:off x="594360" y="2002536"/>
-            <a:ext cx="7955280" cy="521208"/>
+            <a:off x="365760" y="2359152"/>
+            <a:ext cx="8412480" cy="1097280"/>
           </a:xfrm>
           <a:prstGeom prst="rect">
             <a:avLst/>
@@ -6720,63 +9924,24 @@
           <a:ln/>
         </p:spPr>
         <p:txBody>
-          <a:bodyPr wrap="square" lIns="0" tIns="0" rIns="0" bIns="0" rtlCol="0" anchor="ctr"/>
-          <a:lstStyle/>
-          <a:p>
-            <a:pPr indent="0" marL="0">
-              <a:buNone/>
-            </a:pPr>
-            <a:r>
-              <a:rPr lang="en-US" sz="1700" dirty="0">
-                <a:solidFill>
-                  <a:srgbClr val="1E293B"/>
-                </a:solidFill>
-                <a:latin typeface="Calibri" pitchFamily="34" charset="0"/>
-                <a:ea typeface="Calibri" pitchFamily="34" charset="-122"/>
-                <a:cs typeface="Calibri" pitchFamily="34" charset="-120"/>
-              </a:rPr>
-              <a:t>2. the princess listened carefully closely and gratefully as the small brave mouse told his whole story</a:t>
-            </a:r>
-            <a:endParaRPr lang="en-US" sz="1700" dirty="0"/>
-          </a:p>
-        </p:txBody>
-      </p:sp>
-      <p:sp>
-        <p:nvSpPr>
-          <p:cNvPr id="9" name="Text 7"/>
-          <p:cNvSpPr/>
-          <p:nvPr/>
-        </p:nvSpPr>
-        <p:spPr>
-          <a:xfrm>
-            <a:off x="365760" y="2788920"/>
-            <a:ext cx="8412480" cy="365760"/>
-          </a:xfrm>
-          <a:prstGeom prst="rect">
-            <a:avLst/>
-          </a:prstGeom>
-          <a:noFill/>
-          <a:ln/>
-        </p:spPr>
-        <p:txBody>
-          <a:bodyPr wrap="square" lIns="0" tIns="0" rIns="0" bIns="0" rtlCol="0" anchor="ctr"/>
-          <a:lstStyle/>
-          <a:p>
-            <a:pPr indent="0" marL="0">
-              <a:buNone/>
-            </a:pPr>
-            <a:r>
-              <a:rPr lang="en-US" sz="1600" b="1" dirty="0">
-                <a:solidFill>
-                  <a:srgbClr val="0E1C42"/>
-                </a:solidFill>
-                <a:latin typeface="Calibri" pitchFamily="34" charset="0"/>
-                <a:ea typeface="Calibri" pitchFamily="34" charset="-122"/>
-                <a:cs typeface="Calibri" pitchFamily="34" charset="-120"/>
-              </a:rPr>
-              <a:t>Rewrite both sentences correctly in your notebook.</a:t>
-            </a:r>
-            <a:endParaRPr lang="en-US" sz="1600" dirty="0"/>
+          <a:bodyPr wrap="square" lIns="0" tIns="0" rIns="0" bIns="0" rtlCol="0" anchor="t"/>
+          <a:lstStyle/>
+          <a:p>
+            <a:pPr indent="0" marL="0">
+              <a:buNone/>
+            </a:pPr>
+            <a:r>
+              <a:rPr lang="en-US" sz="1500" dirty="0">
+                <a:solidFill>
+                  <a:srgbClr val="1E293B"/>
+                </a:solidFill>
+                <a:latin typeface="Calibri" pitchFamily="34" charset="0"/>
+                <a:ea typeface="Calibri" pitchFamily="34" charset="-122"/>
+                <a:cs typeface="Calibri" pitchFamily="34" charset="-120"/>
+              </a:rPr>
+              <a:t>commas separate the three words in the series, with and before the last one. A comma also goes between small and brave, because both describe the same noun and could swap places.</a:t>
+            </a:r>
+            <a:endParaRPr lang="en-US" sz="1500" dirty="0"/>
           </a:p>
         </p:txBody>
       </p:sp>
@@ -6904,7 +10069,7 @@
                 <a:ea typeface="Calibri" pitchFamily="34" charset="-122"/>
                 <a:cs typeface="Calibri" pitchFamily="34" charset="-120"/>
               </a:rPr>
-              <a:t>FIX THESE SENTENCES</a:t>
+              <a:t>NOW FIX THIS ONE</a:t>
             </a:r>
             <a:endParaRPr lang="en-US" sz="1100" dirty="0"/>
           </a:p>
@@ -6977,7 +10142,7 @@
                 <a:ea typeface="Calibri" pitchFamily="34" charset="-122"/>
                 <a:cs typeface="Calibri" pitchFamily="34" charset="-120"/>
               </a:rPr>
-              <a:t>1. despereaux sat in the sunshine with the princess and told her the story of how he came to rescue her</a:t>
+              <a:t>the princess listened carefully closely and gratefully as the small brave mouse told his whole story</a:t>
             </a:r>
             <a:endParaRPr lang="en-US" sz="1700" dirty="0"/>
           </a:p>
@@ -6985,48 +10150,14 @@
       </p:sp>
       <p:sp>
         <p:nvSpPr>
-          <p:cNvPr id="7" name="Shape 5"/>
-          <p:cNvSpPr/>
-          <p:nvPr/>
-        </p:nvSpPr>
-        <p:spPr>
-          <a:xfrm>
-            <a:off x="365760" y="1874520"/>
-            <a:ext cx="8412480" cy="777240"/>
-          </a:xfrm>
-          <a:prstGeom prst="roundRect">
-            <a:avLst>
-              <a:gd name="adj" fmla="val 11765"/>
-            </a:avLst>
-          </a:prstGeom>
-          <a:solidFill>
-            <a:srgbClr val="FFFFFF"/>
-          </a:solidFill>
-          <a:ln w="19050">
-            <a:solidFill>
-              <a:srgbClr val="55C8E8"/>
-            </a:solidFill>
-            <a:prstDash val="solid"/>
-          </a:ln>
-          <a:effectLst>
-            <a:outerShdw sx="100000" sy="100000" kx="0" ky="0" algn="bl" rotWithShape="0" blurRad="101600" dist="38100" dir="2700000">
-              <a:srgbClr val="000000">
-                <a:alpha val="12000"/>
-              </a:srgbClr>
-            </a:outerShdw>
-          </a:effectLst>
-        </p:spPr>
-      </p:sp>
-      <p:sp>
-        <p:nvSpPr>
-          <p:cNvPr id="8" name="Text 6"/>
-          <p:cNvSpPr/>
-          <p:nvPr/>
-        </p:nvSpPr>
-        <p:spPr>
-          <a:xfrm>
-            <a:off x="594360" y="2002536"/>
-            <a:ext cx="7955280" cy="521208"/>
+          <p:cNvPr id="7" name="Text 5"/>
+          <p:cNvSpPr/>
+          <p:nvPr/>
+        </p:nvSpPr>
+        <p:spPr>
+          <a:xfrm>
+            <a:off x="365760" y="2788920"/>
+            <a:ext cx="8412480" cy="365760"/>
           </a:xfrm>
           <a:prstGeom prst="rect">
             <a:avLst/>
@@ -7042,169 +10173,17 @@
               <a:buNone/>
             </a:pPr>
             <a:r>
-              <a:rPr lang="en-US" sz="1700" dirty="0">
-                <a:solidFill>
-                  <a:srgbClr val="1E293B"/>
-                </a:solidFill>
-                <a:latin typeface="Calibri" pitchFamily="34" charset="0"/>
-                <a:ea typeface="Calibri" pitchFamily="34" charset="-122"/>
-                <a:cs typeface="Calibri" pitchFamily="34" charset="-120"/>
-              </a:rPr>
-              <a:t>2. the princess listened carefully closely and gratefully as the small brave mouse told his whole story</a:t>
-            </a:r>
-            <a:endParaRPr lang="en-US" sz="1700" dirty="0"/>
-          </a:p>
-        </p:txBody>
-      </p:sp>
-      <p:sp>
-        <p:nvSpPr>
-          <p:cNvPr id="9" name="Shape 7"/>
-          <p:cNvSpPr/>
-          <p:nvPr/>
-        </p:nvSpPr>
-        <p:spPr>
-          <a:xfrm>
-            <a:off x="365760" y="2743200"/>
-            <a:ext cx="8412480" cy="1417320"/>
-          </a:xfrm>
-          <a:prstGeom prst="roundRect">
-            <a:avLst>
-              <a:gd name="adj" fmla="val 6452"/>
-            </a:avLst>
-          </a:prstGeom>
-          <a:solidFill>
-            <a:srgbClr val="E8F8EF"/>
-          </a:solidFill>
-          <a:ln/>
-          <a:effectLst>
-            <a:outerShdw sx="100000" sy="100000" kx="0" ky="0" algn="bl" rotWithShape="0" blurRad="101600" dist="38100" dir="2700000">
-              <a:srgbClr val="000000">
-                <a:alpha val="12000"/>
-              </a:srgbClr>
-            </a:outerShdw>
-          </a:effectLst>
-        </p:spPr>
-      </p:sp>
-      <p:sp>
-        <p:nvSpPr>
-          <p:cNvPr id="10" name="Text 8"/>
-          <p:cNvSpPr/>
-          <p:nvPr/>
-        </p:nvSpPr>
-        <p:spPr>
-          <a:xfrm>
-            <a:off x="566928" y="2816352"/>
-            <a:ext cx="8229600" cy="237744"/>
-          </a:xfrm>
-          <a:prstGeom prst="rect">
-            <a:avLst/>
-          </a:prstGeom>
-          <a:noFill/>
-          <a:ln/>
-        </p:spPr>
-        <p:txBody>
-          <a:bodyPr wrap="square" lIns="0" tIns="0" rIns="0" bIns="0" rtlCol="0" anchor="ctr"/>
-          <a:lstStyle/>
-          <a:p>
-            <a:pPr indent="0" marL="0">
-              <a:buNone/>
-            </a:pPr>
-            <a:r>
-              <a:rPr lang="en-US" sz="1100" b="1" spc="100" kern="0" dirty="0">
-                <a:solidFill>
-                  <a:srgbClr val="34B76F"/>
-                </a:solidFill>
-                <a:latin typeface="Calibri" pitchFamily="34" charset="0"/>
-                <a:ea typeface="Calibri" pitchFamily="34" charset="-122"/>
-                <a:cs typeface="Calibri" pitchFamily="34" charset="-120"/>
-              </a:rPr>
-              <a:t>✅  CORRECTED</a:t>
-            </a:r>
-            <a:endParaRPr lang="en-US" sz="1100" dirty="0"/>
-          </a:p>
-        </p:txBody>
-      </p:sp>
-      <p:sp>
-        <p:nvSpPr>
-          <p:cNvPr id="11" name="Text 9"/>
-          <p:cNvSpPr/>
-          <p:nvPr/>
-        </p:nvSpPr>
-        <p:spPr>
-          <a:xfrm>
-            <a:off x="566928" y="3072384"/>
-            <a:ext cx="8010144" cy="685800"/>
-          </a:xfrm>
-          <a:prstGeom prst="rect">
-            <a:avLst/>
-          </a:prstGeom>
-          <a:noFill/>
-          <a:ln/>
-        </p:spPr>
-        <p:txBody>
-          <a:bodyPr wrap="square" lIns="0" tIns="0" rIns="0" bIns="0" rtlCol="0" anchor="ctr"/>
-          <a:lstStyle/>
-          <a:p>
-            <a:pPr indent="0" marL="0">
-              <a:buNone/>
-            </a:pPr>
-            <a:endParaRPr lang="en-US" sz="1400" dirty="0"/>
-          </a:p>
-          <a:p>
-            <a:pPr indent="0" marL="0">
-              <a:buNone/>
-            </a:pPr>
-            <a:r>
-              <a:rPr lang="en-US" sz="1400" i="1" dirty="0">
-                <a:solidFill>
-                  <a:srgbClr val="1E293B"/>
-                </a:solidFill>
-                <a:latin typeface="Calibri" pitchFamily="34" charset="0"/>
-                <a:ea typeface="Calibri" pitchFamily="34" charset="-122"/>
-                <a:cs typeface="Calibri" pitchFamily="34" charset="-120"/>
-              </a:rPr>
-              <a:t>1. Despereaux sat in the sunshine with the princess and told her the story of how he came to rescue her.</a:t>
-            </a:r>
-            <a:endParaRPr lang="en-US" sz="1400" dirty="0"/>
-          </a:p>
-        </p:txBody>
-      </p:sp>
-      <p:sp>
-        <p:nvSpPr>
-          <p:cNvPr id="12" name="Text 10"/>
-          <p:cNvSpPr/>
-          <p:nvPr/>
-        </p:nvSpPr>
-        <p:spPr>
-          <a:xfrm>
-            <a:off x="566928" y="3767328"/>
-            <a:ext cx="8010144" cy="320040"/>
-          </a:xfrm>
-          <a:prstGeom prst="rect">
-            <a:avLst/>
-          </a:prstGeom>
-          <a:noFill/>
-          <a:ln/>
-        </p:spPr>
-        <p:txBody>
-          <a:bodyPr wrap="square" lIns="0" tIns="0" rIns="0" bIns="0" rtlCol="0" anchor="ctr"/>
-          <a:lstStyle/>
-          <a:p>
-            <a:pPr indent="0" marL="0">
-              <a:buNone/>
-            </a:pPr>
-            <a:r>
-              <a:rPr lang="en-US" sz="1200" dirty="0">
-                <a:solidFill>
-                  <a:srgbClr val="64748B"/>
-                </a:solidFill>
-                <a:latin typeface="Calibri" pitchFamily="34" charset="0"/>
-                <a:ea typeface="Calibri" pitchFamily="34" charset="-122"/>
-                <a:cs typeface="Calibri" pitchFamily="34" charset="-120"/>
-              </a:rPr>
-              <a:t>Did you catch the commas in the series (carefully, closely, and gratefully) and the comma between two adjectives (small, brave)?</a:t>
-            </a:r>
-            <a:endParaRPr lang="en-US" sz="1200" dirty="0"/>
+              <a:rPr lang="en-US" sz="1600" b="1" dirty="0">
+                <a:solidFill>
+                  <a:srgbClr val="0E1C42"/>
+                </a:solidFill>
+                <a:latin typeface="Calibri" pitchFamily="34" charset="0"/>
+                <a:ea typeface="Calibri" pitchFamily="34" charset="-122"/>
+                <a:cs typeface="Calibri" pitchFamily="34" charset="-120"/>
+              </a:rPr>
+              <a:t>Rewrite the sentence correctly in your notebook.</a:t>
+            </a:r>
+            <a:endParaRPr lang="en-US" sz="1600" dirty="0"/>
           </a:p>
         </p:txBody>
       </p:sp>
@@ -7222,7 +10201,7 @@
     <p:bg>
       <p:bgPr>
         <a:solidFill>
-          <a:srgbClr val="FFFFFF"/>
+          <a:srgbClr val="F8FAFC"/>
         </a:solidFill>
       </p:bgPr>
     </p:bg>
@@ -7255,7 +10234,7 @@
             <a:avLst/>
           </a:prstGeom>
           <a:solidFill>
-            <a:srgbClr val="8B6FC0"/>
+            <a:srgbClr val="55C8E8"/>
           </a:solidFill>
           <a:ln/>
         </p:spPr>
@@ -7293,7 +10272,7 @@
                 <a:ea typeface="Calibri" pitchFamily="34" charset="-122"/>
                 <a:cs typeface="Calibri" pitchFamily="34" charset="-120"/>
               </a:rPr>
-              <a:t>🌱  Morphology</a:t>
+              <a:t>✏️  Daily Oral Language</a:t>
             </a:r>
             <a:endParaRPr lang="en-US" sz="2200" dirty="0"/>
           </a:p>
@@ -7307,7 +10286,7 @@
         </p:nvSpPr>
         <p:spPr>
           <a:xfrm>
-            <a:off x="365760" y="804672"/>
+            <a:off x="365760" y="749808"/>
             <a:ext cx="8229600" cy="237744"/>
           </a:xfrm>
           <a:prstGeom prst="rect">
@@ -7326,13 +10305,13 @@
             <a:r>
               <a:rPr lang="en-US" sz="1100" b="1" spc="100" kern="0" dirty="0">
                 <a:solidFill>
-                  <a:srgbClr val="8B6FC0"/>
-                </a:solidFill>
-                <a:latin typeface="Calibri" pitchFamily="34" charset="0"/>
-                <a:ea typeface="Calibri" pitchFamily="34" charset="-122"/>
-                <a:cs typeface="Calibri" pitchFamily="34" charset="-120"/>
-              </a:rPr>
-              <a:t>IN- / IM-</a:t>
+                  <a:srgbClr val="55C8E8"/>
+                </a:solidFill>
+                <a:latin typeface="Calibri" pitchFamily="34" charset="0"/>
+                <a:ea typeface="Calibri" pitchFamily="34" charset="-122"/>
+                <a:cs typeface="Calibri" pitchFamily="34" charset="-120"/>
+              </a:rPr>
+              <a:t>NOW FIX THIS ONE</a:t>
             </a:r>
             <a:endParaRPr lang="en-US" sz="1100" dirty="0"/>
           </a:p>
@@ -7346,18 +10325,23 @@
         </p:nvSpPr>
         <p:spPr>
           <a:xfrm>
-            <a:off x="365760" y="1097280"/>
-            <a:ext cx="8412480" cy="621792"/>
+            <a:off x="365760" y="1024128"/>
+            <a:ext cx="8412480" cy="777240"/>
           </a:xfrm>
           <a:prstGeom prst="roundRect">
             <a:avLst>
-              <a:gd name="adj" fmla="val 14706"/>
+              <a:gd name="adj" fmla="val 11765"/>
             </a:avLst>
           </a:prstGeom>
           <a:solidFill>
-            <a:srgbClr val="F0E8FF"/>
+            <a:srgbClr val="FFFFFF"/>
           </a:solidFill>
-          <a:ln/>
+          <a:ln w="19050">
+            <a:solidFill>
+              <a:srgbClr val="55C8E8"/>
+            </a:solidFill>
+            <a:prstDash val="solid"/>
+          </a:ln>
           <a:effectLst>
             <a:outerShdw sx="100000" sy="100000" kx="0" ky="0" algn="bl" rotWithShape="0" blurRad="101600" dist="38100" dir="2700000">
               <a:srgbClr val="000000">
@@ -7375,8 +10359,8 @@
         </p:nvSpPr>
         <p:spPr>
           <a:xfrm>
-            <a:off x="594360" y="1216152"/>
-            <a:ext cx="7863840" cy="384048"/>
+            <a:off x="594360" y="1152144"/>
+            <a:ext cx="7955280" cy="521208"/>
           </a:xfrm>
           <a:prstGeom prst="rect">
             <a:avLst/>
@@ -7392,17 +10376,17 @@
               <a:buNone/>
             </a:pPr>
             <a:r>
-              <a:rPr lang="en-US" sz="1500" dirty="0">
-                <a:solidFill>
-                  <a:srgbClr val="1E293B"/>
-                </a:solidFill>
-                <a:latin typeface="Calibri" pitchFamily="34" charset="0"/>
-                <a:ea typeface="Calibri" pitchFamily="34" charset="-122"/>
-                <a:cs typeface="Calibri" pitchFamily="34" charset="-120"/>
-              </a:rPr>
-              <a:t>🌱  impossible — base word: possible</a:t>
-            </a:r>
-            <a:endParaRPr lang="en-US" sz="1500" dirty="0"/>
+              <a:rPr lang="en-US" sz="1700" dirty="0">
+                <a:solidFill>
+                  <a:srgbClr val="1E293B"/>
+                </a:solidFill>
+                <a:latin typeface="Calibri" pitchFamily="34" charset="0"/>
+                <a:ea typeface="Calibri" pitchFamily="34" charset="-122"/>
+                <a:cs typeface="Calibri" pitchFamily="34" charset="-120"/>
+              </a:rPr>
+              <a:t>the princess listened carefully closely and gratefully as the small brave mouse told his whole story</a:t>
+            </a:r>
+            <a:endParaRPr lang="en-US" sz="1700" dirty="0"/>
           </a:p>
         </p:txBody>
       </p:sp>
@@ -7414,16 +10398,16 @@
         </p:nvSpPr>
         <p:spPr>
           <a:xfrm>
-            <a:off x="365760" y="1792224"/>
-            <a:ext cx="8412480" cy="621792"/>
+            <a:off x="365760" y="2743200"/>
+            <a:ext cx="8412480" cy="1417320"/>
           </a:xfrm>
           <a:prstGeom prst="roundRect">
             <a:avLst>
-              <a:gd name="adj" fmla="val 14706"/>
+              <a:gd name="adj" fmla="val 6452"/>
             </a:avLst>
           </a:prstGeom>
           <a:solidFill>
-            <a:srgbClr val="F8F4FF"/>
+            <a:srgbClr val="E8F8EF"/>
           </a:solidFill>
           <a:ln/>
           <a:effectLst>
@@ -7443,8 +10427,8 @@
         </p:nvSpPr>
         <p:spPr>
           <a:xfrm>
-            <a:off x="594360" y="1911096"/>
-            <a:ext cx="7863840" cy="384048"/>
+            <a:off x="566928" y="2816352"/>
+            <a:ext cx="8229600" cy="237744"/>
           </a:xfrm>
           <a:prstGeom prst="rect">
             <a:avLst/>
@@ -7460,59 +10444,30 @@
               <a:buNone/>
             </a:pPr>
             <a:r>
-              <a:rPr lang="en-US" sz="1500" dirty="0">
-                <a:solidFill>
-                  <a:srgbClr val="1E293B"/>
-                </a:solidFill>
-                <a:latin typeface="Calibri" pitchFamily="34" charset="0"/>
-                <a:ea typeface="Calibri" pitchFamily="34" charset="-122"/>
-                <a:cs typeface="Calibri" pitchFamily="34" charset="-120"/>
-              </a:rPr>
-              <a:t>🌱  incorrect — base word: correct</a:t>
-            </a:r>
-            <a:endParaRPr lang="en-US" sz="1500" dirty="0"/>
-          </a:p>
-        </p:txBody>
-      </p:sp>
-      <p:sp>
-        <p:nvSpPr>
-          <p:cNvPr id="9" name="Shape 7"/>
-          <p:cNvSpPr/>
-          <p:nvPr/>
-        </p:nvSpPr>
-        <p:spPr>
-          <a:xfrm>
-            <a:off x="365760" y="2487168"/>
-            <a:ext cx="8412480" cy="621792"/>
-          </a:xfrm>
-          <a:prstGeom prst="roundRect">
-            <a:avLst>
-              <a:gd name="adj" fmla="val 14706"/>
-            </a:avLst>
-          </a:prstGeom>
-          <a:solidFill>
-            <a:srgbClr val="F0E8FF"/>
-          </a:solidFill>
-          <a:ln/>
-          <a:effectLst>
-            <a:outerShdw sx="100000" sy="100000" kx="0" ky="0" algn="bl" rotWithShape="0" blurRad="101600" dist="38100" dir="2700000">
-              <a:srgbClr val="000000">
-                <a:alpha val="12000"/>
-              </a:srgbClr>
-            </a:outerShdw>
-          </a:effectLst>
-        </p:spPr>
-      </p:sp>
-      <p:sp>
-        <p:nvSpPr>
-          <p:cNvPr id="10" name="Text 8"/>
-          <p:cNvSpPr/>
-          <p:nvPr/>
-        </p:nvSpPr>
-        <p:spPr>
-          <a:xfrm>
-            <a:off x="594360" y="2606040"/>
-            <a:ext cx="7863840" cy="384048"/>
+              <a:rPr lang="en-US" sz="1100" b="1" spc="100" kern="0" dirty="0">
+                <a:solidFill>
+                  <a:srgbClr val="34B76F"/>
+                </a:solidFill>
+                <a:latin typeface="Calibri" pitchFamily="34" charset="0"/>
+                <a:ea typeface="Calibri" pitchFamily="34" charset="-122"/>
+                <a:cs typeface="Calibri" pitchFamily="34" charset="-120"/>
+              </a:rPr>
+              <a:t>✅  CORRECTED</a:t>
+            </a:r>
+            <a:endParaRPr lang="en-US" sz="1100" dirty="0"/>
+          </a:p>
+        </p:txBody>
+      </p:sp>
+      <p:sp>
+        <p:nvSpPr>
+          <p:cNvPr id="9" name="Text 7"/>
+          <p:cNvSpPr/>
+          <p:nvPr/>
+        </p:nvSpPr>
+        <p:spPr>
+          <a:xfrm>
+            <a:off x="566928" y="3072384"/>
+            <a:ext cx="8010144" cy="685800"/>
           </a:xfrm>
           <a:prstGeom prst="rect">
             <a:avLst/>
@@ -7528,85 +10483,23 @@
               <a:buNone/>
             </a:pPr>
             <a:r>
-              <a:rPr lang="en-US" sz="1500" dirty="0">
-                <a:solidFill>
-                  <a:srgbClr val="1E293B"/>
-                </a:solidFill>
-                <a:latin typeface="Calibri" pitchFamily="34" charset="0"/>
-                <a:ea typeface="Calibri" pitchFamily="34" charset="-122"/>
-                <a:cs typeface="Calibri" pitchFamily="34" charset="-120"/>
-              </a:rPr>
-              <a:t>🌱  impatient — base word: patient</a:t>
-            </a:r>
-            <a:endParaRPr lang="en-US" sz="1500" dirty="0"/>
-          </a:p>
-        </p:txBody>
-      </p:sp>
-      <p:sp>
-        <p:nvSpPr>
-          <p:cNvPr id="11" name="Shape 9"/>
-          <p:cNvSpPr/>
-          <p:nvPr/>
-        </p:nvSpPr>
-        <p:spPr>
-          <a:xfrm>
-            <a:off x="365760" y="3182112"/>
-            <a:ext cx="8412480" cy="621792"/>
-          </a:xfrm>
-          <a:prstGeom prst="roundRect">
-            <a:avLst>
-              <a:gd name="adj" fmla="val 14706"/>
-            </a:avLst>
-          </a:prstGeom>
-          <a:solidFill>
-            <a:srgbClr val="F8F4FF"/>
-          </a:solidFill>
-          <a:ln/>
-          <a:effectLst>
-            <a:outerShdw sx="100000" sy="100000" kx="0" ky="0" algn="bl" rotWithShape="0" blurRad="101600" dist="38100" dir="2700000">
-              <a:srgbClr val="000000">
-                <a:alpha val="12000"/>
-              </a:srgbClr>
-            </a:outerShdw>
-          </a:effectLst>
-        </p:spPr>
-      </p:sp>
-      <p:sp>
-        <p:nvSpPr>
-          <p:cNvPr id="12" name="Text 10"/>
-          <p:cNvSpPr/>
-          <p:nvPr/>
-        </p:nvSpPr>
-        <p:spPr>
-          <a:xfrm>
-            <a:off x="594360" y="3300984"/>
-            <a:ext cx="7863840" cy="384048"/>
-          </a:xfrm>
-          <a:prstGeom prst="rect">
-            <a:avLst/>
-          </a:prstGeom>
-          <a:noFill/>
-          <a:ln/>
-        </p:spPr>
-        <p:txBody>
-          <a:bodyPr wrap="square" lIns="0" tIns="0" rIns="0" bIns="0" rtlCol="0" anchor="ctr"/>
-          <a:lstStyle/>
-          <a:p>
-            <a:pPr indent="0" marL="0">
-              <a:buNone/>
-            </a:pPr>
-            <a:r>
-              <a:rPr lang="en-US" sz="1500" dirty="0">
-                <a:solidFill>
-                  <a:srgbClr val="1E293B"/>
-                </a:solidFill>
-                <a:latin typeface="Calibri" pitchFamily="34" charset="0"/>
-                <a:ea typeface="Calibri" pitchFamily="34" charset="-122"/>
-                <a:cs typeface="Calibri" pitchFamily="34" charset="-120"/>
-              </a:rPr>
-              <a:t>🌱  invisible — base word: visible</a:t>
-            </a:r>
-            <a:endParaRPr lang="en-US" sz="1500" dirty="0"/>
+              <a:rPr lang="en-US" sz="1400" i="1" dirty="0">
+                <a:solidFill>
+                  <a:srgbClr val="1E293B"/>
+                </a:solidFill>
+                <a:latin typeface="Calibri" pitchFamily="34" charset="0"/>
+                <a:ea typeface="Calibri" pitchFamily="34" charset="-122"/>
+                <a:cs typeface="Calibri" pitchFamily="34" charset="-120"/>
+              </a:rPr>
+              <a:t>The princess listened carefully, closely, and gratefully as the small, brave mouse told his whole story.</a:t>
+            </a:r>
+            <a:endParaRPr lang="en-US" sz="1400" dirty="0"/>
+          </a:p>
+          <a:p>
+            <a:pPr indent="0" marL="0">
+              <a:buNone/>
+            </a:pPr>
+            <a:endParaRPr lang="en-US" sz="1400" dirty="0"/>
           </a:p>
         </p:txBody>
       </p:sp>
